--- a/Documentation/Silkscreen/Design.pptx
+++ b/Documentation/Silkscreen/Design.pptx
@@ -7,9 +7,9 @@
   <p:sldIdLst>
     <p:sldId id="258" r:id="rId2"/>
     <p:sldId id="256" r:id="rId3"/>
-    <p:sldId id="259" r:id="rId4"/>
+    <p:sldId id="263" r:id="rId4"/>
     <p:sldId id="260" r:id="rId5"/>
-    <p:sldId id="261" r:id="rId6"/>
+    <p:sldId id="262" r:id="rId6"/>
   </p:sldIdLst>
   <p:sldSz cx="7199313" cy="7199313"/>
   <p:notesSz cx="6858000" cy="9144000"/>
@@ -247,7 +247,7 @@
           <a:p>
             <a:fld id="{DB89F38B-51E1-4C90-A834-FCA36791B729}" type="datetimeFigureOut">
               <a:rPr lang="es-ES" smtClean="0"/>
-              <a:t>01/04/2022</a:t>
+              <a:t>21/08/2022</a:t>
             </a:fld>
             <a:endParaRPr lang="es-ES"/>
           </a:p>
@@ -417,7 +417,7 @@
           <a:p>
             <a:fld id="{DB89F38B-51E1-4C90-A834-FCA36791B729}" type="datetimeFigureOut">
               <a:rPr lang="es-ES" smtClean="0"/>
-              <a:t>01/04/2022</a:t>
+              <a:t>21/08/2022</a:t>
             </a:fld>
             <a:endParaRPr lang="es-ES"/>
           </a:p>
@@ -597,7 +597,7 @@
           <a:p>
             <a:fld id="{DB89F38B-51E1-4C90-A834-FCA36791B729}" type="datetimeFigureOut">
               <a:rPr lang="es-ES" smtClean="0"/>
-              <a:t>01/04/2022</a:t>
+              <a:t>21/08/2022</a:t>
             </a:fld>
             <a:endParaRPr lang="es-ES"/>
           </a:p>
@@ -767,7 +767,7 @@
           <a:p>
             <a:fld id="{DB89F38B-51E1-4C90-A834-FCA36791B729}" type="datetimeFigureOut">
               <a:rPr lang="es-ES" smtClean="0"/>
-              <a:t>01/04/2022</a:t>
+              <a:t>21/08/2022</a:t>
             </a:fld>
             <a:endParaRPr lang="es-ES"/>
           </a:p>
@@ -1011,7 +1011,7 @@
           <a:p>
             <a:fld id="{DB89F38B-51E1-4C90-A834-FCA36791B729}" type="datetimeFigureOut">
               <a:rPr lang="es-ES" smtClean="0"/>
-              <a:t>01/04/2022</a:t>
+              <a:t>21/08/2022</a:t>
             </a:fld>
             <a:endParaRPr lang="es-ES"/>
           </a:p>
@@ -1243,7 +1243,7 @@
           <a:p>
             <a:fld id="{DB89F38B-51E1-4C90-A834-FCA36791B729}" type="datetimeFigureOut">
               <a:rPr lang="es-ES" smtClean="0"/>
-              <a:t>01/04/2022</a:t>
+              <a:t>21/08/2022</a:t>
             </a:fld>
             <a:endParaRPr lang="es-ES"/>
           </a:p>
@@ -1610,7 +1610,7 @@
           <a:p>
             <a:fld id="{DB89F38B-51E1-4C90-A834-FCA36791B729}" type="datetimeFigureOut">
               <a:rPr lang="es-ES" smtClean="0"/>
-              <a:t>01/04/2022</a:t>
+              <a:t>21/08/2022</a:t>
             </a:fld>
             <a:endParaRPr lang="es-ES"/>
           </a:p>
@@ -1728,7 +1728,7 @@
           <a:p>
             <a:fld id="{DB89F38B-51E1-4C90-A834-FCA36791B729}" type="datetimeFigureOut">
               <a:rPr lang="es-ES" smtClean="0"/>
-              <a:t>01/04/2022</a:t>
+              <a:t>21/08/2022</a:t>
             </a:fld>
             <a:endParaRPr lang="es-ES"/>
           </a:p>
@@ -1823,7 +1823,7 @@
           <a:p>
             <a:fld id="{DB89F38B-51E1-4C90-A834-FCA36791B729}" type="datetimeFigureOut">
               <a:rPr lang="es-ES" smtClean="0"/>
-              <a:t>01/04/2022</a:t>
+              <a:t>21/08/2022</a:t>
             </a:fld>
             <a:endParaRPr lang="es-ES"/>
           </a:p>
@@ -2100,7 +2100,7 @@
           <a:p>
             <a:fld id="{DB89F38B-51E1-4C90-A834-FCA36791B729}" type="datetimeFigureOut">
               <a:rPr lang="es-ES" smtClean="0"/>
-              <a:t>01/04/2022</a:t>
+              <a:t>21/08/2022</a:t>
             </a:fld>
             <a:endParaRPr lang="es-ES"/>
           </a:p>
@@ -2357,7 +2357,7 @@
           <a:p>
             <a:fld id="{DB89F38B-51E1-4C90-A834-FCA36791B729}" type="datetimeFigureOut">
               <a:rPr lang="es-ES" smtClean="0"/>
-              <a:t>01/04/2022</a:t>
+              <a:t>21/08/2022</a:t>
             </a:fld>
             <a:endParaRPr lang="es-ES"/>
           </a:p>
@@ -2570,7 +2570,7 @@
           <a:p>
             <a:fld id="{DB89F38B-51E1-4C90-A834-FCA36791B729}" type="datetimeFigureOut">
               <a:rPr lang="es-ES" smtClean="0"/>
-              <a:t>01/04/2022</a:t>
+              <a:t>21/08/2022</a:t>
             </a:fld>
             <a:endParaRPr lang="es-ES"/>
           </a:p>
@@ -2990,7 +2990,7 @@
           <p:nvPr>
             <p:extLst>
               <p:ext uri="{D42A27DB-BD31-4B8C-83A1-F6EECF244321}">
-                <p14:modId xmlns:p14="http://schemas.microsoft.com/office/powerpoint/2010/main" val="1638003721"/>
+                <p14:modId xmlns:p14="http://schemas.microsoft.com/office/powerpoint/2010/main" val="2713998296"/>
               </p:ext>
             </p:extLst>
           </p:nvPr>
@@ -3003,12 +3003,12 @@
           <a:graphicData uri="http://schemas.openxmlformats.org/presentationml/2006/ole">
             <mc:AlternateContent xmlns:mc="http://schemas.openxmlformats.org/markup-compatibility/2006">
               <mc:Choice xmlns:v="urn:schemas-microsoft-com:vml" Requires="v">
-                <p:oleObj spid="_x0000_s1028" name="Worksheet" r:id="rId3" imgW="5629218" imgH="3248059" progId="Excel.Sheet.12">
+                <p:oleObj name="Worksheet" r:id="rId2" imgW="5629218" imgH="3248059" progId="Excel.Sheet.12">
                   <p:embed/>
                 </p:oleObj>
               </mc:Choice>
               <mc:Fallback>
-                <p:oleObj name="Worksheet" r:id="rId3" imgW="5629218" imgH="3248059" progId="Excel.Sheet.12">
+                <p:oleObj name="Worksheet" r:id="rId2" imgW="5629218" imgH="3248059" progId="Excel.Sheet.12">
                   <p:embed/>
                   <p:pic>
                     <p:nvPicPr>
@@ -3017,7 +3017,7 @@
                       <p:nvPr/>
                     </p:nvPicPr>
                     <p:blipFill>
-                      <a:blip r:embed="rId4"/>
+                      <a:blip r:embed="rId3"/>
                       <a:stretch>
                         <a:fillRect/>
                       </a:stretch>
@@ -3070,10 +3070,10 @@
       </p:grpSpPr>
       <p:pic>
         <p:nvPicPr>
-          <p:cNvPr id="24" name="Imagen 23">
+          <p:cNvPr id="8" name="Imagen 7">
             <a:extLst>
               <a:ext uri="{FF2B5EF4-FFF2-40B4-BE49-F238E27FC236}">
-                <a16:creationId xmlns:a16="http://schemas.microsoft.com/office/drawing/2014/main" id="{9EC25328-1EBB-42FB-B32D-1F28DA4AD4E6}"/>
+                <a16:creationId xmlns:a16="http://schemas.microsoft.com/office/drawing/2014/main" id="{291D1F9E-A07B-BF1D-D3DE-CCBB7D4D5781}"/>
               </a:ext>
             </a:extLst>
           </p:cNvPr>
@@ -3094,11 +3094,6 @@
                 </a:srgbClr>
               </a:clrTo>
             </a:clrChange>
-            <a:extLst>
-              <a:ext uri="{28A0092B-C50C-407E-A947-70E740481C1C}">
-                <a14:useLocalDpi xmlns:a14="http://schemas.microsoft.com/office/drawing/2010/main" val="0"/>
-              </a:ext>
-            </a:extLst>
           </a:blip>
           <a:stretch>
             <a:fillRect/>
@@ -3106,8 +3101,8 @@
         </p:blipFill>
         <p:spPr>
           <a:xfrm>
-            <a:off x="0" y="270989"/>
-            <a:ext cx="7199313" cy="6611614"/>
+            <a:off x="-13433" y="388178"/>
+            <a:ext cx="7226178" cy="6819887"/>
           </a:xfrm>
           <a:prstGeom prst="rect">
             <a:avLst/>
@@ -3128,7 +3123,7 @@
         </p:nvSpPr>
         <p:spPr>
           <a:xfrm>
-            <a:off x="2315594" y="6565661"/>
+            <a:off x="5974185" y="6396764"/>
             <a:ext cx="707735" cy="246221"/>
           </a:xfrm>
           <a:prstGeom prst="rect">
@@ -3168,10 +3163,10 @@
         </p:nvGrpSpPr>
         <p:grpSpPr>
           <a:xfrm rot="16200000">
-            <a:off x="6251978" y="5413336"/>
-            <a:ext cx="870470" cy="648883"/>
-            <a:chOff x="9142802" y="3068846"/>
-            <a:chExt cx="1231936" cy="721516"/>
+            <a:off x="6273492" y="5394086"/>
+            <a:ext cx="850433" cy="513161"/>
+            <a:chOff x="9191453" y="3085439"/>
+            <a:chExt cx="1217138" cy="716971"/>
           </a:xfrm>
         </p:grpSpPr>
         <p:sp>
@@ -3188,8 +3183,8 @@
           </p:nvSpPr>
           <p:spPr>
             <a:xfrm rot="5400000">
-              <a:off x="9874220" y="3239414"/>
-              <a:ext cx="641680" cy="359356"/>
+              <a:off x="9050290" y="3264245"/>
+              <a:ext cx="641681" cy="359355"/>
             </a:xfrm>
             <a:prstGeom prst="rect">
               <a:avLst/>
@@ -3226,8 +3221,8 @@
           </p:nvSpPr>
           <p:spPr>
             <a:xfrm rot="5400000">
-              <a:off x="9550237" y="3268534"/>
-              <a:ext cx="716971" cy="326686"/>
+              <a:off x="9296889" y="3280582"/>
+              <a:ext cx="716971" cy="326685"/>
             </a:xfrm>
             <a:prstGeom prst="rect">
               <a:avLst/>
@@ -3267,8 +3262,8 @@
           </p:nvSpPr>
           <p:spPr>
             <a:xfrm rot="5400000">
-              <a:off x="9271643" y="3210009"/>
-              <a:ext cx="641680" cy="359356"/>
+              <a:off x="9609990" y="3240789"/>
+              <a:ext cx="641679" cy="359355"/>
             </a:xfrm>
             <a:prstGeom prst="rect">
               <a:avLst/>
@@ -3308,8 +3303,8 @@
           </p:nvSpPr>
           <p:spPr>
             <a:xfrm rot="5400000">
-              <a:off x="9001640" y="3210008"/>
-              <a:ext cx="641680" cy="359356"/>
+              <a:off x="9908072" y="3252197"/>
+              <a:ext cx="641681" cy="359357"/>
             </a:xfrm>
             <a:prstGeom prst="rect">
               <a:avLst/>
@@ -3349,9 +3344,9 @@
           <p:nvPr/>
         </p:nvSpPr>
         <p:spPr>
-          <a:xfrm rot="16200000">
-            <a:off x="6102922" y="5620503"/>
-            <a:ext cx="837050" cy="220524"/>
+          <a:xfrm>
+            <a:off x="6536824" y="5044173"/>
+            <a:ext cx="535270" cy="204927"/>
           </a:xfrm>
           <a:prstGeom prst="rect">
             <a:avLst/>
@@ -3361,14 +3356,18 @@
           </a:solidFill>
         </p:spPr>
         <p:txBody>
-          <a:bodyPr wrap="square">
-            <a:spAutoFit/>
+          <a:bodyPr wrap="square" lIns="0" rIns="0">
+            <a:noAutofit/>
           </a:bodyPr>
           <a:lstStyle/>
           <a:p>
-            <a:pPr algn="ctr"/>
+            <a:pPr algn="ctr" defTabSz="0">
+              <a:tabLst>
+                <a:tab pos="0" algn="l"/>
+              </a:tabLst>
+            </a:pPr>
             <a:r>
-              <a:rPr lang="es-ES" sz="800" dirty="0">
+              <a:rPr lang="es-ES" sz="790" spc="50" dirty="0">
                 <a:solidFill>
                   <a:schemeClr val="bg1"/>
                 </a:solidFill>
@@ -3376,7 +3375,7 @@
               </a:rPr>
               <a:t>SERIAL</a:t>
             </a:r>
-            <a:endParaRPr lang="es-ES" sz="800" dirty="0">
+            <a:endParaRPr lang="es-ES" sz="790" spc="50" dirty="0">
               <a:solidFill>
                 <a:schemeClr val="bg1"/>
               </a:solidFill>
@@ -3397,8 +3396,8 @@
           <p:nvPr/>
         </p:nvSpPr>
         <p:spPr>
-          <a:xfrm>
-            <a:off x="6421742" y="2816148"/>
+          <a:xfrm rot="16200000">
+            <a:off x="5114322" y="6723826"/>
             <a:ext cx="707735" cy="246221"/>
           </a:xfrm>
           <a:prstGeom prst="rect">
@@ -3438,8 +3437,8 @@
         </p:nvSpPr>
         <p:spPr>
           <a:xfrm>
-            <a:off x="6411185" y="5312240"/>
-            <a:ext cx="728850" cy="837050"/>
+            <a:off x="6539775" y="5044173"/>
+            <a:ext cx="535270" cy="1041977"/>
           </a:xfrm>
           <a:prstGeom prst="roundRect">
             <a:avLst>
@@ -3491,8 +3490,8 @@
           <p:nvPr/>
         </p:nvGrpSpPr>
         <p:grpSpPr>
-          <a:xfrm rot="5400000">
-            <a:off x="3718616" y="4144663"/>
+          <a:xfrm>
+            <a:off x="2009042" y="5496715"/>
             <a:ext cx="1683896" cy="707886"/>
             <a:chOff x="3713954" y="815975"/>
             <a:chExt cx="1683896" cy="707886"/>
@@ -3645,10 +3644,10 @@
         </p:nvGrpSpPr>
         <p:grpSpPr>
           <a:xfrm>
-            <a:off x="426120" y="3545188"/>
-            <a:ext cx="886381" cy="215444"/>
-            <a:chOff x="4679245" y="3290345"/>
-            <a:chExt cx="864592" cy="215444"/>
+            <a:off x="330770" y="3467111"/>
+            <a:ext cx="1234734" cy="261611"/>
+            <a:chOff x="4711030" y="3314697"/>
+            <a:chExt cx="832807" cy="149966"/>
           </a:xfrm>
         </p:grpSpPr>
         <p:sp>
@@ -3665,7 +3664,7 @@
           </p:nvSpPr>
           <p:spPr>
             <a:xfrm>
-              <a:off x="4711030" y="3325666"/>
+              <a:off x="4711030" y="3315692"/>
               <a:ext cx="832807" cy="147974"/>
             </a:xfrm>
             <a:prstGeom prst="roundRect">
@@ -3703,7 +3702,7 @@
             <a:lstStyle/>
             <a:p>
               <a:pPr algn="r"/>
-              <a:endParaRPr lang="es-ES" dirty="0"/>
+              <a:endParaRPr lang="es-ES" sz="3200" dirty="0"/>
             </a:p>
           </p:txBody>
         </p:sp>
@@ -3721,7 +3720,7 @@
           </p:nvSpPr>
           <p:spPr>
             <a:xfrm>
-              <a:off x="4918707" y="3323088"/>
+              <a:off x="4918707" y="3315693"/>
               <a:ext cx="622513" cy="147974"/>
             </a:xfrm>
             <a:prstGeom prst="roundRect">
@@ -3758,9 +3757,9 @@
             <a:bodyPr lIns="0" rIns="0" rtlCol="0" anchor="ctr"/>
             <a:lstStyle/>
             <a:p>
-              <a:pPr algn="r"/>
+              <a:pPr algn="ctr"/>
               <a:r>
-                <a:rPr lang="es-ES" sz="900" dirty="0">
+                <a:rPr lang="es-ES" sz="1200" dirty="0">
                   <a:solidFill>
                     <a:schemeClr val="tx1"/>
                   </a:solidFill>
@@ -3785,8 +3784,8 @@
           </p:nvSpPr>
           <p:spPr>
             <a:xfrm>
-              <a:off x="4679245" y="3290345"/>
-              <a:ext cx="382578" cy="215444"/>
+              <a:off x="4726670" y="3314697"/>
+              <a:ext cx="335151" cy="149966"/>
             </a:xfrm>
             <a:prstGeom prst="rect">
               <a:avLst/>
@@ -3800,375 +3799,13 @@
             <a:lstStyle/>
             <a:p>
               <a:r>
-                <a:rPr lang="es-ES" sz="800" dirty="0">
+                <a:rPr lang="es-ES" sz="1100" b="1" dirty="0">
                   <a:solidFill>
                     <a:schemeClr val="bg1"/>
                   </a:solidFill>
                   <a:latin typeface="Audiowide" panose="02000503000000020004" pitchFamily="2" charset="0"/>
                 </a:rPr>
                 <a:t>16</a:t>
-              </a:r>
-            </a:p>
-          </p:txBody>
-        </p:sp>
-      </p:grpSp>
-      <p:grpSp>
-        <p:nvGrpSpPr>
-          <p:cNvPr id="128" name="Grupo 127">
-            <a:extLst>
-              <a:ext uri="{FF2B5EF4-FFF2-40B4-BE49-F238E27FC236}">
-                <a16:creationId xmlns:a16="http://schemas.microsoft.com/office/drawing/2014/main" id="{36D3F85E-2CBB-44E0-A8C1-E306D00D743D}"/>
-              </a:ext>
-            </a:extLst>
-          </p:cNvPr>
-          <p:cNvGrpSpPr/>
-          <p:nvPr/>
-        </p:nvGrpSpPr>
-        <p:grpSpPr>
-          <a:xfrm>
-            <a:off x="3140786" y="3545188"/>
-            <a:ext cx="886381" cy="215444"/>
-            <a:chOff x="4679245" y="3290345"/>
-            <a:chExt cx="864592" cy="215444"/>
-          </a:xfrm>
-        </p:grpSpPr>
-        <p:sp>
-          <p:nvSpPr>
-            <p:cNvPr id="129" name="Rectángulo: esquinas redondeadas 128">
-              <a:extLst>
-                <a:ext uri="{FF2B5EF4-FFF2-40B4-BE49-F238E27FC236}">
-                  <a16:creationId xmlns:a16="http://schemas.microsoft.com/office/drawing/2014/main" id="{50320277-844E-4A97-9245-E996EFA7E08F}"/>
-                </a:ext>
-              </a:extLst>
-            </p:cNvPr>
-            <p:cNvSpPr/>
-            <p:nvPr/>
-          </p:nvSpPr>
-          <p:spPr>
-            <a:xfrm>
-              <a:off x="4711030" y="3325666"/>
-              <a:ext cx="832807" cy="147974"/>
-            </a:xfrm>
-            <a:prstGeom prst="roundRect">
-              <a:avLst>
-                <a:gd name="adj" fmla="val 50000"/>
-              </a:avLst>
-            </a:prstGeom>
-            <a:solidFill>
-              <a:schemeClr val="tx1"/>
-            </a:solidFill>
-            <a:ln w="12700">
-              <a:solidFill>
-                <a:schemeClr val="tx1"/>
-              </a:solidFill>
-            </a:ln>
-          </p:spPr>
-          <p:style>
-            <a:lnRef idx="2">
-              <a:schemeClr val="accent1">
-                <a:shade val="50000"/>
-              </a:schemeClr>
-            </a:lnRef>
-            <a:fillRef idx="1">
-              <a:schemeClr val="accent1"/>
-            </a:fillRef>
-            <a:effectRef idx="0">
-              <a:schemeClr val="accent1"/>
-            </a:effectRef>
-            <a:fontRef idx="minor">
-              <a:schemeClr val="lt1"/>
-            </a:fontRef>
-          </p:style>
-          <p:txBody>
-            <a:bodyPr rtlCol="0" anchor="ctr"/>
-            <a:lstStyle/>
-            <a:p>
-              <a:pPr algn="r"/>
-              <a:endParaRPr lang="es-ES" dirty="0"/>
-            </a:p>
-          </p:txBody>
-        </p:sp>
-        <p:sp>
-          <p:nvSpPr>
-            <p:cNvPr id="130" name="Rectángulo: esquinas redondeadas 129">
-              <a:extLst>
-                <a:ext uri="{FF2B5EF4-FFF2-40B4-BE49-F238E27FC236}">
-                  <a16:creationId xmlns:a16="http://schemas.microsoft.com/office/drawing/2014/main" id="{E8D4A354-92E1-4C37-873B-2AC103EF15C1}"/>
-                </a:ext>
-              </a:extLst>
-            </p:cNvPr>
-            <p:cNvSpPr/>
-            <p:nvPr/>
-          </p:nvSpPr>
-          <p:spPr>
-            <a:xfrm>
-              <a:off x="4918707" y="3323088"/>
-              <a:ext cx="622513" cy="147974"/>
-            </a:xfrm>
-            <a:prstGeom prst="roundRect">
-              <a:avLst>
-                <a:gd name="adj" fmla="val 50000"/>
-              </a:avLst>
-            </a:prstGeom>
-            <a:solidFill>
-              <a:schemeClr val="bg1"/>
-            </a:solidFill>
-            <a:ln w="12700">
-              <a:solidFill>
-                <a:schemeClr val="tx1"/>
-              </a:solidFill>
-            </a:ln>
-          </p:spPr>
-          <p:style>
-            <a:lnRef idx="2">
-              <a:schemeClr val="accent1">
-                <a:shade val="50000"/>
-              </a:schemeClr>
-            </a:lnRef>
-            <a:fillRef idx="1">
-              <a:schemeClr val="accent1"/>
-            </a:fillRef>
-            <a:effectRef idx="0">
-              <a:schemeClr val="accent1"/>
-            </a:effectRef>
-            <a:fontRef idx="minor">
-              <a:schemeClr val="lt1"/>
-            </a:fontRef>
-          </p:style>
-          <p:txBody>
-            <a:bodyPr lIns="0" rIns="0" rtlCol="0" anchor="ctr"/>
-            <a:lstStyle/>
-            <a:p>
-              <a:pPr algn="r"/>
-              <a:r>
-                <a:rPr lang="es-ES" sz="900" dirty="0">
-                  <a:solidFill>
-                    <a:schemeClr val="tx1"/>
-                  </a:solidFill>
-                  <a:latin typeface="Audiowide" panose="02000503000000020004" pitchFamily="2" charset="0"/>
-                </a:rPr>
-                <a:t>Output 3</a:t>
-              </a:r>
-            </a:p>
-          </p:txBody>
-        </p:sp>
-        <p:sp>
-          <p:nvSpPr>
-            <p:cNvPr id="131" name="CuadroTexto 130">
-              <a:extLst>
-                <a:ext uri="{FF2B5EF4-FFF2-40B4-BE49-F238E27FC236}">
-                  <a16:creationId xmlns:a16="http://schemas.microsoft.com/office/drawing/2014/main" id="{28AC8FA8-BAF1-446C-ABB8-4029008F462B}"/>
-                </a:ext>
-              </a:extLst>
-            </p:cNvPr>
-            <p:cNvSpPr txBox="1"/>
-            <p:nvPr/>
-          </p:nvSpPr>
-          <p:spPr>
-            <a:xfrm>
-              <a:off x="4679245" y="3290345"/>
-              <a:ext cx="382578" cy="215444"/>
-            </a:xfrm>
-            <a:prstGeom prst="rect">
-              <a:avLst/>
-            </a:prstGeom>
-            <a:noFill/>
-          </p:spPr>
-          <p:txBody>
-            <a:bodyPr wrap="square">
-              <a:spAutoFit/>
-            </a:bodyPr>
-            <a:lstStyle/>
-            <a:p>
-              <a:r>
-                <a:rPr lang="es-ES" sz="800" dirty="0">
-                  <a:solidFill>
-                    <a:schemeClr val="bg1"/>
-                  </a:solidFill>
-                  <a:latin typeface="Audiowide" panose="02000503000000020004" pitchFamily="2" charset="0"/>
-                </a:rPr>
-                <a:t>18</a:t>
-              </a:r>
-            </a:p>
-          </p:txBody>
-        </p:sp>
-      </p:grpSp>
-      <p:grpSp>
-        <p:nvGrpSpPr>
-          <p:cNvPr id="132" name="Grupo 131">
-            <a:extLst>
-              <a:ext uri="{FF2B5EF4-FFF2-40B4-BE49-F238E27FC236}">
-                <a16:creationId xmlns:a16="http://schemas.microsoft.com/office/drawing/2014/main" id="{60607DB0-5A1F-4CEB-987E-F2B9EFC9F45C}"/>
-              </a:ext>
-            </a:extLst>
-          </p:cNvPr>
-          <p:cNvGrpSpPr/>
-          <p:nvPr/>
-        </p:nvGrpSpPr>
-        <p:grpSpPr>
-          <a:xfrm>
-            <a:off x="4168445" y="3545188"/>
-            <a:ext cx="886154" cy="215444"/>
-            <a:chOff x="4679245" y="3290345"/>
-            <a:chExt cx="864592" cy="215444"/>
-          </a:xfrm>
-        </p:grpSpPr>
-        <p:sp>
-          <p:nvSpPr>
-            <p:cNvPr id="133" name="Rectángulo: esquinas redondeadas 132">
-              <a:extLst>
-                <a:ext uri="{FF2B5EF4-FFF2-40B4-BE49-F238E27FC236}">
-                  <a16:creationId xmlns:a16="http://schemas.microsoft.com/office/drawing/2014/main" id="{CADCB9FF-8C79-4376-AECF-AA78916AF7EC}"/>
-                </a:ext>
-              </a:extLst>
-            </p:cNvPr>
-            <p:cNvSpPr/>
-            <p:nvPr/>
-          </p:nvSpPr>
-          <p:spPr>
-            <a:xfrm>
-              <a:off x="4711030" y="3325666"/>
-              <a:ext cx="832807" cy="147974"/>
-            </a:xfrm>
-            <a:prstGeom prst="roundRect">
-              <a:avLst>
-                <a:gd name="adj" fmla="val 50000"/>
-              </a:avLst>
-            </a:prstGeom>
-            <a:solidFill>
-              <a:schemeClr val="tx1"/>
-            </a:solidFill>
-            <a:ln w="12700">
-              <a:solidFill>
-                <a:schemeClr val="tx1"/>
-              </a:solidFill>
-            </a:ln>
-          </p:spPr>
-          <p:style>
-            <a:lnRef idx="2">
-              <a:schemeClr val="accent1">
-                <a:shade val="50000"/>
-              </a:schemeClr>
-            </a:lnRef>
-            <a:fillRef idx="1">
-              <a:schemeClr val="accent1"/>
-            </a:fillRef>
-            <a:effectRef idx="0">
-              <a:schemeClr val="accent1"/>
-            </a:effectRef>
-            <a:fontRef idx="minor">
-              <a:schemeClr val="lt1"/>
-            </a:fontRef>
-          </p:style>
-          <p:txBody>
-            <a:bodyPr rtlCol="0" anchor="ctr"/>
-            <a:lstStyle/>
-            <a:p>
-              <a:pPr algn="r"/>
-              <a:endParaRPr lang="es-ES" dirty="0"/>
-            </a:p>
-          </p:txBody>
-        </p:sp>
-        <p:sp>
-          <p:nvSpPr>
-            <p:cNvPr id="134" name="Rectángulo: esquinas redondeadas 133">
-              <a:extLst>
-                <a:ext uri="{FF2B5EF4-FFF2-40B4-BE49-F238E27FC236}">
-                  <a16:creationId xmlns:a16="http://schemas.microsoft.com/office/drawing/2014/main" id="{FBD919F5-54C2-468C-966F-22023A589B85}"/>
-                </a:ext>
-              </a:extLst>
-            </p:cNvPr>
-            <p:cNvSpPr/>
-            <p:nvPr/>
-          </p:nvSpPr>
-          <p:spPr>
-            <a:xfrm>
-              <a:off x="4918707" y="3323088"/>
-              <a:ext cx="622513" cy="147974"/>
-            </a:xfrm>
-            <a:prstGeom prst="roundRect">
-              <a:avLst>
-                <a:gd name="adj" fmla="val 50000"/>
-              </a:avLst>
-            </a:prstGeom>
-            <a:solidFill>
-              <a:schemeClr val="bg1"/>
-            </a:solidFill>
-            <a:ln w="12700">
-              <a:solidFill>
-                <a:schemeClr val="tx1"/>
-              </a:solidFill>
-            </a:ln>
-          </p:spPr>
-          <p:style>
-            <a:lnRef idx="2">
-              <a:schemeClr val="accent1">
-                <a:shade val="50000"/>
-              </a:schemeClr>
-            </a:lnRef>
-            <a:fillRef idx="1">
-              <a:schemeClr val="accent1"/>
-            </a:fillRef>
-            <a:effectRef idx="0">
-              <a:schemeClr val="accent1"/>
-            </a:effectRef>
-            <a:fontRef idx="minor">
-              <a:schemeClr val="lt1"/>
-            </a:fontRef>
-          </p:style>
-          <p:txBody>
-            <a:bodyPr lIns="0" rIns="0" rtlCol="0" anchor="ctr"/>
-            <a:lstStyle/>
-            <a:p>
-              <a:pPr algn="r"/>
-              <a:r>
-                <a:rPr lang="es-ES" sz="900" dirty="0">
-                  <a:solidFill>
-                    <a:schemeClr val="tx1"/>
-                  </a:solidFill>
-                  <a:latin typeface="Audiowide" panose="02000503000000020004" pitchFamily="2" charset="0"/>
-                </a:rPr>
-                <a:t>Output 4</a:t>
-              </a:r>
-            </a:p>
-          </p:txBody>
-        </p:sp>
-        <p:sp>
-          <p:nvSpPr>
-            <p:cNvPr id="135" name="CuadroTexto 134">
-              <a:extLst>
-                <a:ext uri="{FF2B5EF4-FFF2-40B4-BE49-F238E27FC236}">
-                  <a16:creationId xmlns:a16="http://schemas.microsoft.com/office/drawing/2014/main" id="{EDE1BAFC-7689-4490-91C6-C580E60D16D0}"/>
-                </a:ext>
-              </a:extLst>
-            </p:cNvPr>
-            <p:cNvSpPr txBox="1"/>
-            <p:nvPr/>
-          </p:nvSpPr>
-          <p:spPr>
-            <a:xfrm>
-              <a:off x="4679245" y="3290345"/>
-              <a:ext cx="382578" cy="215444"/>
-            </a:xfrm>
-            <a:prstGeom prst="rect">
-              <a:avLst/>
-            </a:prstGeom>
-            <a:noFill/>
-          </p:spPr>
-          <p:txBody>
-            <a:bodyPr wrap="square">
-              <a:spAutoFit/>
-            </a:bodyPr>
-            <a:lstStyle/>
-            <a:p>
-              <a:r>
-                <a:rPr lang="es-ES" sz="800" dirty="0">
-                  <a:solidFill>
-                    <a:schemeClr val="bg1"/>
-                  </a:solidFill>
-                  <a:latin typeface="Audiowide" panose="02000503000000020004" pitchFamily="2" charset="0"/>
-                </a:rPr>
-                <a:t>19</a:t>
               </a:r>
             </a:p>
           </p:txBody>
@@ -4188,10 +3825,10 @@
         </p:nvGrpSpPr>
         <p:grpSpPr>
           <a:xfrm>
-            <a:off x="1040714" y="177036"/>
-            <a:ext cx="3730175" cy="461667"/>
+            <a:off x="1186020" y="270465"/>
+            <a:ext cx="3532209" cy="461667"/>
             <a:chOff x="993938" y="5977235"/>
-            <a:chExt cx="3730175" cy="461667"/>
+            <a:chExt cx="3532209" cy="461667"/>
           </a:xfrm>
         </p:grpSpPr>
         <p:grpSp>
@@ -4305,10 +3942,10 @@
           </p:nvGrpSpPr>
           <p:grpSpPr>
             <a:xfrm>
-              <a:off x="1996071" y="5977236"/>
-              <a:ext cx="1299799" cy="461665"/>
-              <a:chOff x="574430" y="5970636"/>
-              <a:chExt cx="1299799" cy="461665"/>
+              <a:off x="1901804" y="5977236"/>
+              <a:ext cx="1271515" cy="461665"/>
+              <a:chOff x="480163" y="5970636"/>
+              <a:chExt cx="1271515" cy="461665"/>
             </a:xfrm>
           </p:grpSpPr>
           <p:sp>
@@ -4325,7 +3962,7 @@
             </p:nvSpPr>
             <p:spPr>
               <a:xfrm>
-                <a:off x="574430" y="5970636"/>
+                <a:off x="480163" y="5970636"/>
                 <a:ext cx="308291" cy="461665"/>
               </a:xfrm>
               <a:prstGeom prst="rect">
@@ -4363,7 +4000,7 @@
             </p:nvSpPr>
             <p:spPr>
               <a:xfrm>
-                <a:off x="1565938" y="5970636"/>
+                <a:off x="1443387" y="5970636"/>
                 <a:ext cx="308291" cy="461665"/>
               </a:xfrm>
               <a:prstGeom prst="rect">
@@ -4402,10 +4039,10 @@
           </p:nvGrpSpPr>
           <p:grpSpPr>
             <a:xfrm>
-              <a:off x="3390821" y="5977236"/>
-              <a:ext cx="908183" cy="461665"/>
-              <a:chOff x="540651" y="5970636"/>
-              <a:chExt cx="908183" cy="461665"/>
+              <a:off x="3268270" y="5977236"/>
+              <a:ext cx="832768" cy="461665"/>
+              <a:chOff x="418100" y="5970636"/>
+              <a:chExt cx="832768" cy="461665"/>
             </a:xfrm>
           </p:grpSpPr>
           <p:sp>
@@ -4422,7 +4059,7 @@
             </p:nvSpPr>
             <p:spPr>
               <a:xfrm>
-                <a:off x="540651" y="5970636"/>
+                <a:off x="418100" y="5970636"/>
                 <a:ext cx="308291" cy="461665"/>
               </a:xfrm>
               <a:prstGeom prst="rect">
@@ -4460,7 +4097,7 @@
             </p:nvSpPr>
             <p:spPr>
               <a:xfrm>
-                <a:off x="1140543" y="5970636"/>
+                <a:off x="942577" y="5970636"/>
                 <a:ext cx="308291" cy="461665"/>
               </a:xfrm>
               <a:prstGeom prst="rect">
@@ -4499,10 +4136,10 @@
           </p:nvGrpSpPr>
           <p:grpSpPr>
             <a:xfrm>
-              <a:off x="2425307" y="5977235"/>
-              <a:ext cx="2298806" cy="461666"/>
-              <a:chOff x="-1851541" y="5970635"/>
-              <a:chExt cx="2298806" cy="461666"/>
+              <a:off x="2331040" y="5977235"/>
+              <a:ext cx="2195107" cy="461666"/>
+              <a:chOff x="-1945808" y="5970635"/>
+              <a:chExt cx="2195107" cy="461666"/>
             </a:xfrm>
           </p:grpSpPr>
           <p:sp>
@@ -4519,7 +4156,7 @@
             </p:nvSpPr>
             <p:spPr>
               <a:xfrm>
-                <a:off x="138974" y="5970635"/>
+                <a:off x="-58992" y="5970635"/>
                 <a:ext cx="308291" cy="461665"/>
               </a:xfrm>
               <a:prstGeom prst="rect">
@@ -4557,7 +4194,7 @@
             </p:nvSpPr>
             <p:spPr>
               <a:xfrm>
-                <a:off x="-1851541" y="5970636"/>
+                <a:off x="-1945808" y="5970636"/>
                 <a:ext cx="308291" cy="461665"/>
               </a:xfrm>
               <a:prstGeom prst="rect">
@@ -4597,7 +4234,7 @@
         </p:nvGrpSpPr>
         <p:grpSpPr>
           <a:xfrm rot="5400000">
-            <a:off x="1301428" y="5264220"/>
+            <a:off x="357846" y="6019331"/>
             <a:ext cx="261610" cy="883033"/>
             <a:chOff x="6778219" y="1366503"/>
             <a:chExt cx="261610" cy="663456"/>
@@ -4697,286 +4334,43 @@
           </p:txBody>
         </p:sp>
       </p:grpSp>
-      <p:grpSp>
-        <p:nvGrpSpPr>
-          <p:cNvPr id="136" name="Grupo 135">
+      <p:sp>
+        <p:nvSpPr>
+          <p:cNvPr id="145" name="CuadroTexto 144">
             <a:extLst>
               <a:ext uri="{FF2B5EF4-FFF2-40B4-BE49-F238E27FC236}">
-                <a16:creationId xmlns:a16="http://schemas.microsoft.com/office/drawing/2014/main" id="{4714960D-2DB8-44DC-B0F0-695592214008}"/>
+                <a16:creationId xmlns:a16="http://schemas.microsoft.com/office/drawing/2014/main" id="{EB1D1819-39DD-462C-8AD7-A62421EF882C}"/>
               </a:ext>
             </a:extLst>
           </p:cNvPr>
-          <p:cNvGrpSpPr/>
+          <p:cNvSpPr txBox="1"/>
           <p:nvPr/>
-        </p:nvGrpSpPr>
-        <p:grpSpPr>
+        </p:nvSpPr>
+        <p:spPr>
           <a:xfrm>
-            <a:off x="1803121" y="3545188"/>
-            <a:ext cx="886381" cy="215444"/>
-            <a:chOff x="4679245" y="3290345"/>
-            <a:chExt cx="864592" cy="215444"/>
+            <a:off x="5948413" y="5087499"/>
+            <a:ext cx="641412" cy="261610"/>
           </a:xfrm>
-        </p:grpSpPr>
-        <p:sp>
-          <p:nvSpPr>
-            <p:cNvPr id="137" name="Rectángulo: esquinas redondeadas 136">
-              <a:extLst>
-                <a:ext uri="{FF2B5EF4-FFF2-40B4-BE49-F238E27FC236}">
-                  <a16:creationId xmlns:a16="http://schemas.microsoft.com/office/drawing/2014/main" id="{D7DB57BE-3C3B-4028-A5CA-15C4BE6CF426}"/>
-                </a:ext>
-              </a:extLst>
-            </p:cNvPr>
-            <p:cNvSpPr/>
-            <p:nvPr/>
-          </p:nvSpPr>
-          <p:spPr>
-            <a:xfrm>
-              <a:off x="4711030" y="3325666"/>
-              <a:ext cx="832807" cy="147974"/>
-            </a:xfrm>
-            <a:prstGeom prst="roundRect">
-              <a:avLst>
-                <a:gd name="adj" fmla="val 50000"/>
-              </a:avLst>
-            </a:prstGeom>
-            <a:solidFill>
-              <a:schemeClr val="tx1"/>
-            </a:solidFill>
-            <a:ln w="12700">
-              <a:solidFill>
-                <a:schemeClr val="tx1"/>
-              </a:solidFill>
-            </a:ln>
-          </p:spPr>
-          <p:style>
-            <a:lnRef idx="2">
-              <a:schemeClr val="accent1">
-                <a:shade val="50000"/>
-              </a:schemeClr>
-            </a:lnRef>
-            <a:fillRef idx="1">
-              <a:schemeClr val="accent1"/>
-            </a:fillRef>
-            <a:effectRef idx="0">
-              <a:schemeClr val="accent1"/>
-            </a:effectRef>
-            <a:fontRef idx="minor">
-              <a:schemeClr val="lt1"/>
-            </a:fontRef>
-          </p:style>
-          <p:txBody>
-            <a:bodyPr rtlCol="0" anchor="ctr"/>
-            <a:lstStyle/>
-            <a:p>
-              <a:pPr algn="r"/>
-              <a:endParaRPr lang="es-ES" dirty="0"/>
-            </a:p>
-          </p:txBody>
-        </p:sp>
-        <p:sp>
-          <p:nvSpPr>
-            <p:cNvPr id="140" name="Rectángulo: esquinas redondeadas 139">
-              <a:extLst>
-                <a:ext uri="{FF2B5EF4-FFF2-40B4-BE49-F238E27FC236}">
-                  <a16:creationId xmlns:a16="http://schemas.microsoft.com/office/drawing/2014/main" id="{7B7B1053-846E-4EBF-9C2C-CAACF03724C6}"/>
-                </a:ext>
-              </a:extLst>
-            </p:cNvPr>
-            <p:cNvSpPr/>
-            <p:nvPr/>
-          </p:nvSpPr>
-          <p:spPr>
-            <a:xfrm>
-              <a:off x="4918707" y="3323088"/>
-              <a:ext cx="622513" cy="147974"/>
-            </a:xfrm>
-            <a:prstGeom prst="roundRect">
-              <a:avLst>
-                <a:gd name="adj" fmla="val 50000"/>
-              </a:avLst>
-            </a:prstGeom>
-            <a:solidFill>
-              <a:schemeClr val="bg1"/>
-            </a:solidFill>
-            <a:ln w="12700">
-              <a:solidFill>
-                <a:schemeClr val="tx1"/>
-              </a:solidFill>
-            </a:ln>
-          </p:spPr>
-          <p:style>
-            <a:lnRef idx="2">
-              <a:schemeClr val="accent1">
-                <a:shade val="50000"/>
-              </a:schemeClr>
-            </a:lnRef>
-            <a:fillRef idx="1">
-              <a:schemeClr val="accent1"/>
-            </a:fillRef>
-            <a:effectRef idx="0">
-              <a:schemeClr val="accent1"/>
-            </a:effectRef>
-            <a:fontRef idx="minor">
-              <a:schemeClr val="lt1"/>
-            </a:fontRef>
-          </p:style>
-          <p:txBody>
-            <a:bodyPr lIns="0" rIns="0" rtlCol="0" anchor="ctr"/>
-            <a:lstStyle/>
-            <a:p>
-              <a:pPr algn="r"/>
-              <a:r>
-                <a:rPr lang="es-ES" sz="900" dirty="0">
-                  <a:solidFill>
-                    <a:schemeClr val="tx1"/>
-                  </a:solidFill>
-                  <a:latin typeface="Audiowide" panose="02000503000000020004" pitchFamily="2" charset="0"/>
-                </a:rPr>
-                <a:t>Output 2</a:t>
-              </a:r>
-            </a:p>
-          </p:txBody>
-        </p:sp>
-        <p:sp>
-          <p:nvSpPr>
-            <p:cNvPr id="142" name="CuadroTexto 141">
-              <a:extLst>
-                <a:ext uri="{FF2B5EF4-FFF2-40B4-BE49-F238E27FC236}">
-                  <a16:creationId xmlns:a16="http://schemas.microsoft.com/office/drawing/2014/main" id="{1CE53834-22E7-4510-9E22-963EC4CBC09C}"/>
-                </a:ext>
-              </a:extLst>
-            </p:cNvPr>
-            <p:cNvSpPr txBox="1"/>
-            <p:nvPr/>
-          </p:nvSpPr>
-          <p:spPr>
-            <a:xfrm>
-              <a:off x="4679245" y="3290345"/>
-              <a:ext cx="382578" cy="215444"/>
-            </a:xfrm>
-            <a:prstGeom prst="rect">
-              <a:avLst/>
-            </a:prstGeom>
-            <a:noFill/>
-          </p:spPr>
-          <p:txBody>
-            <a:bodyPr wrap="square">
-              <a:spAutoFit/>
-            </a:bodyPr>
-            <a:lstStyle/>
-            <a:p>
-              <a:r>
-                <a:rPr lang="es-ES" sz="800" dirty="0">
-                  <a:solidFill>
-                    <a:schemeClr val="bg1"/>
-                  </a:solidFill>
-                  <a:latin typeface="Audiowide" panose="02000503000000020004" pitchFamily="2" charset="0"/>
-                </a:rPr>
-                <a:t>17</a:t>
-              </a:r>
-            </a:p>
-          </p:txBody>
-        </p:sp>
-      </p:grpSp>
-      <p:grpSp>
-        <p:nvGrpSpPr>
-          <p:cNvPr id="17" name="Grupo 16">
-            <a:extLst>
-              <a:ext uri="{FF2B5EF4-FFF2-40B4-BE49-F238E27FC236}">
-                <a16:creationId xmlns:a16="http://schemas.microsoft.com/office/drawing/2014/main" id="{58F7D9D3-3041-482B-AFA7-C9F285D5E488}"/>
-              </a:ext>
-            </a:extLst>
-          </p:cNvPr>
-          <p:cNvGrpSpPr/>
-          <p:nvPr/>
-        </p:nvGrpSpPr>
-        <p:grpSpPr>
-          <a:xfrm rot="16200000">
-            <a:off x="6108420" y="1348758"/>
-            <a:ext cx="1030287" cy="261610"/>
-            <a:chOff x="7199313" y="1657087"/>
-            <a:chExt cx="1030287" cy="261610"/>
-          </a:xfrm>
-        </p:grpSpPr>
-        <p:sp>
-          <p:nvSpPr>
-            <p:cNvPr id="145" name="CuadroTexto 144">
-              <a:extLst>
-                <a:ext uri="{FF2B5EF4-FFF2-40B4-BE49-F238E27FC236}">
-                  <a16:creationId xmlns:a16="http://schemas.microsoft.com/office/drawing/2014/main" id="{EB1D1819-39DD-462C-8AD7-A62421EF882C}"/>
-                </a:ext>
-              </a:extLst>
-            </p:cNvPr>
-            <p:cNvSpPr txBox="1"/>
-            <p:nvPr/>
-          </p:nvSpPr>
-          <p:spPr>
-            <a:xfrm>
-              <a:off x="7199313" y="1657087"/>
-              <a:ext cx="1030287" cy="261610"/>
-            </a:xfrm>
-            <a:prstGeom prst="rect">
-              <a:avLst/>
-            </a:prstGeom>
-            <a:noFill/>
-          </p:spPr>
-          <p:txBody>
-            <a:bodyPr wrap="square" rtlCol="0">
-              <a:spAutoFit/>
-            </a:bodyPr>
-            <a:lstStyle/>
-            <a:p>
-              <a:r>
-                <a:rPr lang="es-ES" sz="1100" b="1" dirty="0">
-                  <a:latin typeface="Audiowide" panose="02000503000000020004" pitchFamily="2" charset="0"/>
-                </a:rPr>
-                <a:t>Flash</a:t>
-              </a:r>
-            </a:p>
-          </p:txBody>
-        </p:sp>
-        <p:cxnSp>
-          <p:nvCxnSpPr>
-            <p:cNvPr id="146" name="Conector recto de flecha 145">
-              <a:extLst>
-                <a:ext uri="{FF2B5EF4-FFF2-40B4-BE49-F238E27FC236}">
-                  <a16:creationId xmlns:a16="http://schemas.microsoft.com/office/drawing/2014/main" id="{8DE73C4C-4A8A-41C4-84E3-874F8BB37C45}"/>
-                </a:ext>
-              </a:extLst>
-            </p:cNvPr>
-            <p:cNvCxnSpPr>
-              <a:cxnSpLocks/>
-            </p:cNvCxnSpPr>
-            <p:nvPr/>
-          </p:nvCxnSpPr>
-          <p:spPr>
-            <a:xfrm rot="5400000" flipV="1">
-              <a:off x="7973041" y="1634532"/>
-              <a:ext cx="0" cy="298249"/>
-            </a:xfrm>
-            <a:prstGeom prst="straightConnector1">
-              <a:avLst/>
-            </a:prstGeom>
-            <a:ln w="57150">
-              <a:tailEnd type="triangle"/>
-            </a:ln>
-          </p:spPr>
-          <p:style>
-            <a:lnRef idx="3">
-              <a:schemeClr val="dk1"/>
-            </a:lnRef>
-            <a:fillRef idx="0">
-              <a:schemeClr val="dk1"/>
-            </a:fillRef>
-            <a:effectRef idx="2">
-              <a:schemeClr val="dk1"/>
-            </a:effectRef>
-            <a:fontRef idx="minor">
-              <a:schemeClr val="tx1"/>
-            </a:fontRef>
-          </p:style>
-        </p:cxnSp>
-      </p:grpSp>
+          <a:prstGeom prst="rect">
+            <a:avLst/>
+          </a:prstGeom>
+          <a:noFill/>
+        </p:spPr>
+        <p:txBody>
+          <a:bodyPr wrap="square" rtlCol="0">
+            <a:spAutoFit/>
+          </a:bodyPr>
+          <a:lstStyle/>
+          <a:p>
+            <a:r>
+              <a:rPr lang="es-ES" sz="1100" b="1" dirty="0">
+                <a:latin typeface="Audiowide" panose="02000503000000020004" pitchFamily="2" charset="0"/>
+              </a:rPr>
+              <a:t>Flash</a:t>
+            </a:r>
+          </a:p>
+        </p:txBody>
+      </p:sp>
       <p:graphicFrame>
         <p:nvGraphicFramePr>
           <p:cNvPr id="147" name="Tabla 7">
@@ -4992,14 +4386,14 @@
           <p:nvPr>
             <p:extLst>
               <p:ext uri="{D42A27DB-BD31-4B8C-83A1-F6EECF244321}">
-                <p14:modId xmlns:p14="http://schemas.microsoft.com/office/powerpoint/2010/main" val="3067852748"/>
+                <p14:modId xmlns:p14="http://schemas.microsoft.com/office/powerpoint/2010/main" val="223216645"/>
               </p:ext>
             </p:extLst>
           </p:nvPr>
         </p:nvGraphicFramePr>
         <p:xfrm>
-          <a:off x="5663363" y="1137709"/>
-          <a:ext cx="844635" cy="656234"/>
+          <a:off x="6070726" y="1130130"/>
+          <a:ext cx="1025500" cy="850820"/>
         </p:xfrm>
         <a:graphic>
           <a:graphicData uri="http://schemas.openxmlformats.org/drawingml/2006/table">
@@ -5008,28 +4402,28 @@
                 <a:tableStyleId>{073A0DAA-6AF3-43AB-8588-CEC1D06C72B9}</a:tableStyleId>
               </a:tblPr>
               <a:tblGrid>
-                <a:gridCol w="202449">
+                <a:gridCol w="245800">
                   <a:extLst>
                     <a:ext uri="{9D8B030D-6E8A-4147-A177-3AD203B41FA5}">
                       <a16:colId xmlns:a16="http://schemas.microsoft.com/office/drawing/2014/main" val="486858203"/>
                     </a:ext>
                   </a:extLst>
                 </a:gridCol>
-                <a:gridCol w="214062">
+                <a:gridCol w="259900">
                   <a:extLst>
                     <a:ext uri="{9D8B030D-6E8A-4147-A177-3AD203B41FA5}">
                       <a16:colId xmlns:a16="http://schemas.microsoft.com/office/drawing/2014/main" val="3938050864"/>
                     </a:ext>
                   </a:extLst>
                 </a:gridCol>
-                <a:gridCol w="214062">
+                <a:gridCol w="259900">
                   <a:extLst>
                     <a:ext uri="{9D8B030D-6E8A-4147-A177-3AD203B41FA5}">
                       <a16:colId xmlns:a16="http://schemas.microsoft.com/office/drawing/2014/main" val="3072194285"/>
                     </a:ext>
                   </a:extLst>
                 </a:gridCol>
-                <a:gridCol w="214062">
+                <a:gridCol w="259900">
                   <a:extLst>
                     <a:ext uri="{9D8B030D-6E8A-4147-A177-3AD203B41FA5}">
                       <a16:colId xmlns:a16="http://schemas.microsoft.com/office/drawing/2014/main" val="624226288"/>
@@ -5037,7 +4431,7 @@
                   </a:extLst>
                 </a:gridCol>
               </a:tblGrid>
-              <a:tr h="229953">
+              <a:tr h="337276">
                 <a:tc>
                   <a:txBody>
                     <a:bodyPr/>
@@ -5045,7 +4439,7 @@
                     <a:p>
                       <a:pPr algn="ctr"/>
                       <a:r>
-                        <a:rPr lang="es-ES" sz="1600" b="1" dirty="0">
+                        <a:rPr lang="es-ES" sz="2400" b="1" dirty="0">
                           <a:latin typeface="Audiowide" panose="02000503000000020004" pitchFamily="2" charset="0"/>
                         </a:rPr>
                         <a:t>-</a:t>
@@ -5103,7 +4497,7 @@
                     <a:p>
                       <a:pPr algn="ctr"/>
                       <a:r>
-                        <a:rPr lang="es-ES" sz="1600" b="1" dirty="0">
+                        <a:rPr lang="es-ES" sz="2400" b="1" dirty="0">
                           <a:latin typeface="Audiowide" panose="02000503000000020004" pitchFamily="2" charset="0"/>
                         </a:rPr>
                         <a:t>-</a:t>
@@ -5163,7 +4557,7 @@
                     <a:p>
                       <a:pPr algn="ctr"/>
                       <a:r>
-                        <a:rPr lang="es-ES" sz="1600" b="1" dirty="0">
+                        <a:rPr lang="es-ES" sz="2400" b="1" dirty="0">
                           <a:latin typeface="Audiowide" panose="02000503000000020004" pitchFamily="2" charset="0"/>
                         </a:rPr>
                         <a:t>-</a:t>
@@ -5223,7 +4617,7 @@
                     <a:p>
                       <a:pPr algn="ctr"/>
                       <a:r>
-                        <a:rPr lang="es-ES" sz="1600" b="1" dirty="0">
+                        <a:rPr lang="es-ES" sz="2400" b="1" dirty="0">
                           <a:latin typeface="Audiowide" panose="02000503000000020004" pitchFamily="2" charset="0"/>
                         </a:rPr>
                         <a:t>-</a:t>
@@ -5280,7 +4674,7 @@
                   </a:ext>
                 </a:extLst>
               </a:tr>
-              <a:tr h="206197">
+              <a:tr h="242530">
                 <a:tc>
                   <a:txBody>
                     <a:bodyPr/>
@@ -5288,7 +4682,7 @@
                     <a:p>
                       <a:pPr algn="ctr"/>
                       <a:r>
-                        <a:rPr lang="es-ES" sz="900" b="1" dirty="0">
+                        <a:rPr lang="es-ES" sz="1100" b="1" dirty="0">
                           <a:latin typeface="Audiowide" panose="02000503000000020004" pitchFamily="2" charset="0"/>
                         </a:rPr>
                         <a:t>23</a:t>
@@ -5348,7 +4742,7 @@
                     <a:p>
                       <a:pPr algn="ctr"/>
                       <a:r>
-                        <a:rPr lang="es-ES" sz="900" b="1" dirty="0">
+                        <a:rPr lang="es-ES" sz="1100" b="1" dirty="0">
                           <a:latin typeface="Audiowide" panose="02000503000000020004" pitchFamily="2" charset="0"/>
                         </a:rPr>
                         <a:t>25</a:t>
@@ -5410,7 +4804,7 @@
                     <a:p>
                       <a:pPr algn="ctr"/>
                       <a:r>
-                        <a:rPr lang="es-ES" sz="900" b="1" dirty="0">
+                        <a:rPr lang="es-ES" sz="1100" b="1" dirty="0">
                           <a:latin typeface="Audiowide" panose="02000503000000020004" pitchFamily="2" charset="0"/>
                         </a:rPr>
                         <a:t>26</a:t>
@@ -5472,7 +4866,7 @@
                     <a:p>
                       <a:pPr algn="ctr"/>
                       <a:r>
-                        <a:rPr lang="es-ES" sz="900" b="1" dirty="0">
+                        <a:rPr lang="es-ES" sz="1100" b="1" dirty="0">
                           <a:latin typeface="Audiowide" panose="02000503000000020004" pitchFamily="2" charset="0"/>
                         </a:rPr>
                         <a:t>27</a:t>
@@ -5531,7 +4925,7 @@
                   </a:ext>
                 </a:extLst>
               </a:tr>
-              <a:tr h="206197">
+              <a:tr h="242530">
                 <a:tc>
                   <a:txBody>
                     <a:bodyPr/>
@@ -5539,7 +4933,7 @@
                     <a:p>
                       <a:pPr algn="ctr"/>
                       <a:r>
-                        <a:rPr lang="es-ES" sz="900" b="1" dirty="0">
+                        <a:rPr lang="es-ES" sz="1100" b="1" dirty="0">
                           <a:latin typeface="Audiowide" panose="02000503000000020004" pitchFamily="2" charset="0"/>
                         </a:rPr>
                         <a:t>4</a:t>
@@ -5597,7 +4991,7 @@
                     <a:p>
                       <a:pPr algn="ctr"/>
                       <a:r>
-                        <a:rPr lang="es-ES" sz="900" b="1" dirty="0">
+                        <a:rPr lang="es-ES" sz="1100" b="1" dirty="0">
                           <a:latin typeface="Audiowide" panose="02000503000000020004" pitchFamily="2" charset="0"/>
                         </a:rPr>
                         <a:t>5</a:t>
@@ -5657,7 +5051,7 @@
                     <a:p>
                       <a:pPr algn="ctr"/>
                       <a:r>
-                        <a:rPr lang="es-ES" sz="900" b="1" dirty="0">
+                        <a:rPr lang="es-ES" sz="1100" b="1" dirty="0">
                           <a:latin typeface="Audiowide" panose="02000503000000020004" pitchFamily="2" charset="0"/>
                         </a:rPr>
                         <a:t>14</a:t>
@@ -5717,7 +5111,7 @@
                     <a:p>
                       <a:pPr algn="ctr"/>
                       <a:r>
-                        <a:rPr lang="es-ES" sz="900" b="1" dirty="0">
+                        <a:rPr lang="es-ES" sz="1100" b="1" dirty="0">
                           <a:latin typeface="Audiowide" panose="02000503000000020004" pitchFamily="2" charset="0"/>
                         </a:rPr>
                         <a:t>15</a:t>
@@ -5792,7 +5186,7 @@
         </p:nvGrpSpPr>
         <p:grpSpPr>
           <a:xfrm rot="16200000">
-            <a:off x="6239764" y="2090358"/>
+            <a:off x="6188868" y="2350764"/>
             <a:ext cx="862623" cy="644795"/>
             <a:chOff x="9153906" y="3039497"/>
             <a:chExt cx="1220831" cy="716971"/>
@@ -5962,54 +5356,6 @@
       </p:grpSp>
       <p:sp>
         <p:nvSpPr>
-          <p:cNvPr id="169" name="CuadroTexto 168">
-            <a:extLst>
-              <a:ext uri="{FF2B5EF4-FFF2-40B4-BE49-F238E27FC236}">
-                <a16:creationId xmlns:a16="http://schemas.microsoft.com/office/drawing/2014/main" id="{146C4107-9C02-4C10-A15E-848C25314ED4}"/>
-              </a:ext>
-            </a:extLst>
-          </p:cNvPr>
-          <p:cNvSpPr txBox="1"/>
-          <p:nvPr/>
-        </p:nvSpPr>
-        <p:spPr>
-          <a:xfrm rot="16200000">
-            <a:off x="6061884" y="2299399"/>
-            <a:ext cx="837050" cy="220524"/>
-          </a:xfrm>
-          <a:prstGeom prst="rect">
-            <a:avLst/>
-          </a:prstGeom>
-          <a:solidFill>
-            <a:schemeClr val="tx1"/>
-          </a:solidFill>
-        </p:spPr>
-        <p:txBody>
-          <a:bodyPr wrap="square">
-            <a:spAutoFit/>
-          </a:bodyPr>
-          <a:lstStyle/>
-          <a:p>
-            <a:pPr algn="ctr"/>
-            <a:r>
-              <a:rPr lang="es-ES" sz="800" dirty="0">
-                <a:solidFill>
-                  <a:schemeClr val="bg1"/>
-                </a:solidFill>
-                <a:latin typeface="Audiowide" panose="02000503000000020004" pitchFamily="2" charset="0"/>
-              </a:rPr>
-              <a:t>I2C</a:t>
-            </a:r>
-            <a:endParaRPr lang="es-ES" sz="800" dirty="0">
-              <a:solidFill>
-                <a:schemeClr val="bg1"/>
-              </a:solidFill>
-            </a:endParaRPr>
-          </a:p>
-        </p:txBody>
-      </p:sp>
-      <p:sp>
-        <p:nvSpPr>
           <p:cNvPr id="170" name="Rectángulo: esquinas redondeadas 169">
             <a:extLst>
               <a:ext uri="{FF2B5EF4-FFF2-40B4-BE49-F238E27FC236}">
@@ -6022,8 +5368,8 @@
         </p:nvSpPr>
         <p:spPr>
           <a:xfrm>
-            <a:off x="6362772" y="1991136"/>
-            <a:ext cx="789565" cy="837050"/>
+            <a:off x="6524357" y="2066879"/>
+            <a:ext cx="577084" cy="1021713"/>
           </a:xfrm>
           <a:prstGeom prst="roundRect">
             <a:avLst>
@@ -6076,8 +5422,8 @@
         </p:nvSpPr>
         <p:spPr>
           <a:xfrm>
-            <a:off x="5663363" y="1152531"/>
-            <a:ext cx="844634" cy="641412"/>
+            <a:off x="6070726" y="1130131"/>
+            <a:ext cx="1025500" cy="837050"/>
           </a:xfrm>
           <a:prstGeom prst="roundRect">
             <a:avLst/>
@@ -6111,6 +5457,1383 @@
           <a:p>
             <a:pPr algn="ctr"/>
             <a:endParaRPr lang="es-ES"/>
+          </a:p>
+        </p:txBody>
+      </p:sp>
+      <p:grpSp>
+        <p:nvGrpSpPr>
+          <p:cNvPr id="9" name="Grupo 8">
+            <a:extLst>
+              <a:ext uri="{FF2B5EF4-FFF2-40B4-BE49-F238E27FC236}">
+                <a16:creationId xmlns:a16="http://schemas.microsoft.com/office/drawing/2014/main" id="{AC46E214-2EA0-7B37-40C4-185D9FCEC282}"/>
+              </a:ext>
+            </a:extLst>
+          </p:cNvPr>
+          <p:cNvGrpSpPr/>
+          <p:nvPr/>
+        </p:nvGrpSpPr>
+        <p:grpSpPr>
+          <a:xfrm>
+            <a:off x="1101176" y="1107018"/>
+            <a:ext cx="3711316" cy="461667"/>
+            <a:chOff x="993938" y="5977235"/>
+            <a:chExt cx="3711316" cy="461667"/>
+          </a:xfrm>
+        </p:grpSpPr>
+        <p:grpSp>
+          <p:nvGrpSpPr>
+            <p:cNvPr id="10" name="Grupo 9">
+              <a:extLst>
+                <a:ext uri="{FF2B5EF4-FFF2-40B4-BE49-F238E27FC236}">
+                  <a16:creationId xmlns:a16="http://schemas.microsoft.com/office/drawing/2014/main" id="{DDCF81D9-0A42-30BA-335F-F2B77CC98371}"/>
+                </a:ext>
+              </a:extLst>
+            </p:cNvPr>
+            <p:cNvGrpSpPr/>
+            <p:nvPr/>
+          </p:nvGrpSpPr>
+          <p:grpSpPr>
+            <a:xfrm>
+              <a:off x="993938" y="5977236"/>
+              <a:ext cx="899338" cy="461666"/>
+              <a:chOff x="993938" y="5970636"/>
+              <a:chExt cx="899338" cy="461666"/>
+            </a:xfrm>
+          </p:grpSpPr>
+          <p:sp>
+            <p:nvSpPr>
+              <p:cNvPr id="21" name="CuadroTexto 20">
+                <a:extLst>
+                  <a:ext uri="{FF2B5EF4-FFF2-40B4-BE49-F238E27FC236}">
+                    <a16:creationId xmlns:a16="http://schemas.microsoft.com/office/drawing/2014/main" id="{ABA12C70-491F-F0B0-0CD6-561A03F46CA4}"/>
+                  </a:ext>
+                </a:extLst>
+              </p:cNvPr>
+              <p:cNvSpPr txBox="1"/>
+              <p:nvPr/>
+            </p:nvSpPr>
+            <p:spPr>
+              <a:xfrm>
+                <a:off x="993938" y="5970637"/>
+                <a:ext cx="308291" cy="461665"/>
+              </a:xfrm>
+              <a:prstGeom prst="rect">
+                <a:avLst/>
+              </a:prstGeom>
+              <a:noFill/>
+            </p:spPr>
+            <p:txBody>
+              <a:bodyPr wrap="square">
+                <a:spAutoFit/>
+              </a:bodyPr>
+              <a:lstStyle/>
+              <a:p>
+                <a:r>
+                  <a:rPr lang="es-ES" sz="2400" dirty="0">
+                    <a:latin typeface="Audiowide" panose="02000503000000020004" pitchFamily="2" charset="0"/>
+                  </a:rPr>
+                  <a:t>-</a:t>
+                </a:r>
+                <a:endParaRPr lang="es-ES" sz="2400" dirty="0"/>
+              </a:p>
+            </p:txBody>
+          </p:sp>
+          <p:sp>
+            <p:nvSpPr>
+              <p:cNvPr id="22" name="CuadroTexto 21">
+                <a:extLst>
+                  <a:ext uri="{FF2B5EF4-FFF2-40B4-BE49-F238E27FC236}">
+                    <a16:creationId xmlns:a16="http://schemas.microsoft.com/office/drawing/2014/main" id="{C3EE6A94-F623-BC49-2A8C-84EFC711ECAA}"/>
+                  </a:ext>
+                </a:extLst>
+              </p:cNvPr>
+              <p:cNvSpPr txBox="1"/>
+              <p:nvPr/>
+            </p:nvSpPr>
+            <p:spPr>
+              <a:xfrm>
+                <a:off x="1584985" y="5970636"/>
+                <a:ext cx="308291" cy="461665"/>
+              </a:xfrm>
+              <a:prstGeom prst="rect">
+                <a:avLst/>
+              </a:prstGeom>
+              <a:noFill/>
+            </p:spPr>
+            <p:txBody>
+              <a:bodyPr wrap="square">
+                <a:spAutoFit/>
+              </a:bodyPr>
+              <a:lstStyle/>
+              <a:p>
+                <a:r>
+                  <a:rPr lang="es-ES" sz="2400" dirty="0">
+                    <a:latin typeface="Audiowide" panose="02000503000000020004" pitchFamily="2" charset="0"/>
+                  </a:rPr>
+                  <a:t>+</a:t>
+                </a:r>
+                <a:endParaRPr lang="es-ES" sz="2400" dirty="0"/>
+              </a:p>
+            </p:txBody>
+          </p:sp>
+        </p:grpSp>
+        <p:grpSp>
+          <p:nvGrpSpPr>
+            <p:cNvPr id="11" name="Grupo 10">
+              <a:extLst>
+                <a:ext uri="{FF2B5EF4-FFF2-40B4-BE49-F238E27FC236}">
+                  <a16:creationId xmlns:a16="http://schemas.microsoft.com/office/drawing/2014/main" id="{1EBBECA4-C391-7D63-FC84-058D9EA5B799}"/>
+                </a:ext>
+              </a:extLst>
+            </p:cNvPr>
+            <p:cNvGrpSpPr/>
+            <p:nvPr/>
+          </p:nvGrpSpPr>
+          <p:grpSpPr>
+            <a:xfrm>
+              <a:off x="1901804" y="5977236"/>
+              <a:ext cx="1271515" cy="461665"/>
+              <a:chOff x="480163" y="5970636"/>
+              <a:chExt cx="1271515" cy="461665"/>
+            </a:xfrm>
+          </p:grpSpPr>
+          <p:sp>
+            <p:nvSpPr>
+              <p:cNvPr id="19" name="CuadroTexto 18">
+                <a:extLst>
+                  <a:ext uri="{FF2B5EF4-FFF2-40B4-BE49-F238E27FC236}">
+                    <a16:creationId xmlns:a16="http://schemas.microsoft.com/office/drawing/2014/main" id="{91E9EDA1-DB05-DFD5-35BA-A2AFA90CC793}"/>
+                  </a:ext>
+                </a:extLst>
+              </p:cNvPr>
+              <p:cNvSpPr txBox="1"/>
+              <p:nvPr/>
+            </p:nvSpPr>
+            <p:spPr>
+              <a:xfrm>
+                <a:off x="480163" y="5970636"/>
+                <a:ext cx="308291" cy="461665"/>
+              </a:xfrm>
+              <a:prstGeom prst="rect">
+                <a:avLst/>
+              </a:prstGeom>
+              <a:noFill/>
+            </p:spPr>
+            <p:txBody>
+              <a:bodyPr wrap="square">
+                <a:spAutoFit/>
+              </a:bodyPr>
+              <a:lstStyle/>
+              <a:p>
+                <a:r>
+                  <a:rPr lang="es-ES" sz="2400" dirty="0">
+                    <a:latin typeface="Audiowide" panose="02000503000000020004" pitchFamily="2" charset="0"/>
+                  </a:rPr>
+                  <a:t>-</a:t>
+                </a:r>
+                <a:endParaRPr lang="es-ES" sz="2400" dirty="0"/>
+              </a:p>
+            </p:txBody>
+          </p:sp>
+          <p:sp>
+            <p:nvSpPr>
+              <p:cNvPr id="20" name="CuadroTexto 19">
+                <a:extLst>
+                  <a:ext uri="{FF2B5EF4-FFF2-40B4-BE49-F238E27FC236}">
+                    <a16:creationId xmlns:a16="http://schemas.microsoft.com/office/drawing/2014/main" id="{2187E1E2-9CAE-335D-0DC0-B331ADA7936F}"/>
+                  </a:ext>
+                </a:extLst>
+              </p:cNvPr>
+              <p:cNvSpPr txBox="1"/>
+              <p:nvPr/>
+            </p:nvSpPr>
+            <p:spPr>
+              <a:xfrm>
+                <a:off x="1443387" y="5970636"/>
+                <a:ext cx="308291" cy="461665"/>
+              </a:xfrm>
+              <a:prstGeom prst="rect">
+                <a:avLst/>
+              </a:prstGeom>
+              <a:noFill/>
+            </p:spPr>
+            <p:txBody>
+              <a:bodyPr wrap="square">
+                <a:spAutoFit/>
+              </a:bodyPr>
+              <a:lstStyle/>
+              <a:p>
+                <a:r>
+                  <a:rPr lang="es-ES" sz="2400" dirty="0">
+                    <a:latin typeface="Audiowide" panose="02000503000000020004" pitchFamily="2" charset="0"/>
+                  </a:rPr>
+                  <a:t>-</a:t>
+                </a:r>
+                <a:endParaRPr lang="es-ES" sz="2400" dirty="0"/>
+              </a:p>
+            </p:txBody>
+          </p:sp>
+        </p:grpSp>
+        <p:grpSp>
+          <p:nvGrpSpPr>
+            <p:cNvPr id="12" name="Grupo 11">
+              <a:extLst>
+                <a:ext uri="{FF2B5EF4-FFF2-40B4-BE49-F238E27FC236}">
+                  <a16:creationId xmlns:a16="http://schemas.microsoft.com/office/drawing/2014/main" id="{5F7AFC18-9C2D-6DE2-6D0A-D90B8734B631}"/>
+                </a:ext>
+              </a:extLst>
+            </p:cNvPr>
+            <p:cNvGrpSpPr/>
+            <p:nvPr/>
+          </p:nvGrpSpPr>
+          <p:grpSpPr>
+            <a:xfrm>
+              <a:off x="3447377" y="5977236"/>
+              <a:ext cx="653661" cy="461665"/>
+              <a:chOff x="597207" y="5970636"/>
+              <a:chExt cx="653661" cy="461665"/>
+            </a:xfrm>
+          </p:grpSpPr>
+          <p:sp>
+            <p:nvSpPr>
+              <p:cNvPr id="16" name="CuadroTexto 15">
+                <a:extLst>
+                  <a:ext uri="{FF2B5EF4-FFF2-40B4-BE49-F238E27FC236}">
+                    <a16:creationId xmlns:a16="http://schemas.microsoft.com/office/drawing/2014/main" id="{40354A8D-6A43-475D-7205-D3EA6E3E238B}"/>
+                  </a:ext>
+                </a:extLst>
+              </p:cNvPr>
+              <p:cNvSpPr txBox="1"/>
+              <p:nvPr/>
+            </p:nvSpPr>
+            <p:spPr>
+              <a:xfrm>
+                <a:off x="597207" y="5970636"/>
+                <a:ext cx="308291" cy="461665"/>
+              </a:xfrm>
+              <a:prstGeom prst="rect">
+                <a:avLst/>
+              </a:prstGeom>
+              <a:noFill/>
+            </p:spPr>
+            <p:txBody>
+              <a:bodyPr wrap="square">
+                <a:spAutoFit/>
+              </a:bodyPr>
+              <a:lstStyle/>
+              <a:p>
+                <a:r>
+                  <a:rPr lang="es-ES" sz="2400" dirty="0">
+                    <a:latin typeface="Audiowide" panose="02000503000000020004" pitchFamily="2" charset="0"/>
+                  </a:rPr>
+                  <a:t>+</a:t>
+                </a:r>
+                <a:endParaRPr lang="es-ES" sz="2400" dirty="0"/>
+              </a:p>
+            </p:txBody>
+          </p:sp>
+          <p:sp>
+            <p:nvSpPr>
+              <p:cNvPr id="18" name="CuadroTexto 17">
+                <a:extLst>
+                  <a:ext uri="{FF2B5EF4-FFF2-40B4-BE49-F238E27FC236}">
+                    <a16:creationId xmlns:a16="http://schemas.microsoft.com/office/drawing/2014/main" id="{C76E4CBA-631A-E63E-48F3-BE8232B15332}"/>
+                  </a:ext>
+                </a:extLst>
+              </p:cNvPr>
+              <p:cNvSpPr txBox="1"/>
+              <p:nvPr/>
+            </p:nvSpPr>
+            <p:spPr>
+              <a:xfrm>
+                <a:off x="942577" y="5970636"/>
+                <a:ext cx="308291" cy="461665"/>
+              </a:xfrm>
+              <a:prstGeom prst="rect">
+                <a:avLst/>
+              </a:prstGeom>
+              <a:noFill/>
+            </p:spPr>
+            <p:txBody>
+              <a:bodyPr wrap="square">
+                <a:spAutoFit/>
+              </a:bodyPr>
+              <a:lstStyle/>
+              <a:p>
+                <a:r>
+                  <a:rPr lang="es-ES" sz="2400" dirty="0">
+                    <a:latin typeface="Audiowide" panose="02000503000000020004" pitchFamily="2" charset="0"/>
+                  </a:rPr>
+                  <a:t>-</a:t>
+                </a:r>
+                <a:endParaRPr lang="es-ES" sz="2400" dirty="0"/>
+              </a:p>
+            </p:txBody>
+          </p:sp>
+        </p:grpSp>
+        <p:grpSp>
+          <p:nvGrpSpPr>
+            <p:cNvPr id="13" name="Grupo 12">
+              <a:extLst>
+                <a:ext uri="{FF2B5EF4-FFF2-40B4-BE49-F238E27FC236}">
+                  <a16:creationId xmlns:a16="http://schemas.microsoft.com/office/drawing/2014/main" id="{A6C1E1DB-D206-02D5-2A41-CF41AA51568E}"/>
+                </a:ext>
+              </a:extLst>
+            </p:cNvPr>
+            <p:cNvGrpSpPr/>
+            <p:nvPr/>
+          </p:nvGrpSpPr>
+          <p:grpSpPr>
+            <a:xfrm>
+              <a:off x="2510147" y="5977235"/>
+              <a:ext cx="2195107" cy="461666"/>
+              <a:chOff x="-1766701" y="5970635"/>
+              <a:chExt cx="2195107" cy="461666"/>
+            </a:xfrm>
+          </p:grpSpPr>
+          <p:sp>
+            <p:nvSpPr>
+              <p:cNvPr id="14" name="CuadroTexto 13">
+                <a:extLst>
+                  <a:ext uri="{FF2B5EF4-FFF2-40B4-BE49-F238E27FC236}">
+                    <a16:creationId xmlns:a16="http://schemas.microsoft.com/office/drawing/2014/main" id="{380C2292-DB8E-5371-5B98-E114BAC70802}"/>
+                  </a:ext>
+                </a:extLst>
+              </p:cNvPr>
+              <p:cNvSpPr txBox="1"/>
+              <p:nvPr/>
+            </p:nvSpPr>
+            <p:spPr>
+              <a:xfrm>
+                <a:off x="120115" y="5970635"/>
+                <a:ext cx="308291" cy="461665"/>
+              </a:xfrm>
+              <a:prstGeom prst="rect">
+                <a:avLst/>
+              </a:prstGeom>
+              <a:noFill/>
+            </p:spPr>
+            <p:txBody>
+              <a:bodyPr wrap="square">
+                <a:spAutoFit/>
+              </a:bodyPr>
+              <a:lstStyle/>
+              <a:p>
+                <a:r>
+                  <a:rPr lang="es-ES" sz="2400" dirty="0">
+                    <a:latin typeface="Audiowide" panose="02000503000000020004" pitchFamily="2" charset="0"/>
+                  </a:rPr>
+                  <a:t>+</a:t>
+                </a:r>
+                <a:endParaRPr lang="es-ES" sz="2400" dirty="0"/>
+              </a:p>
+            </p:txBody>
+          </p:sp>
+          <p:sp>
+            <p:nvSpPr>
+              <p:cNvPr id="15" name="CuadroTexto 14">
+                <a:extLst>
+                  <a:ext uri="{FF2B5EF4-FFF2-40B4-BE49-F238E27FC236}">
+                    <a16:creationId xmlns:a16="http://schemas.microsoft.com/office/drawing/2014/main" id="{7AE5EF7C-41A4-B495-F08E-A393A92CF709}"/>
+                  </a:ext>
+                </a:extLst>
+              </p:cNvPr>
+              <p:cNvSpPr txBox="1"/>
+              <p:nvPr/>
+            </p:nvSpPr>
+            <p:spPr>
+              <a:xfrm>
+                <a:off x="-1766701" y="5970636"/>
+                <a:ext cx="308291" cy="461665"/>
+              </a:xfrm>
+              <a:prstGeom prst="rect">
+                <a:avLst/>
+              </a:prstGeom>
+              <a:noFill/>
+            </p:spPr>
+            <p:txBody>
+              <a:bodyPr wrap="square">
+                <a:spAutoFit/>
+              </a:bodyPr>
+              <a:lstStyle/>
+              <a:p>
+                <a:r>
+                  <a:rPr lang="es-ES" sz="2400" dirty="0">
+                    <a:latin typeface="Audiowide" panose="02000503000000020004" pitchFamily="2" charset="0"/>
+                  </a:rPr>
+                  <a:t>+</a:t>
+                </a:r>
+                <a:endParaRPr lang="es-ES" sz="2400" dirty="0"/>
+              </a:p>
+            </p:txBody>
+          </p:sp>
+        </p:grpSp>
+      </p:grpSp>
+      <p:grpSp>
+        <p:nvGrpSpPr>
+          <p:cNvPr id="23" name="Grupo 22">
+            <a:extLst>
+              <a:ext uri="{FF2B5EF4-FFF2-40B4-BE49-F238E27FC236}">
+                <a16:creationId xmlns:a16="http://schemas.microsoft.com/office/drawing/2014/main" id="{F259E1A9-400B-1E1C-E9E1-75F8A7AC997F}"/>
+              </a:ext>
+            </a:extLst>
+          </p:cNvPr>
+          <p:cNvGrpSpPr/>
+          <p:nvPr/>
+        </p:nvGrpSpPr>
+        <p:grpSpPr>
+          <a:xfrm>
+            <a:off x="1604279" y="3468850"/>
+            <a:ext cx="1234734" cy="261611"/>
+            <a:chOff x="4711030" y="3314697"/>
+            <a:chExt cx="832807" cy="149966"/>
+          </a:xfrm>
+        </p:grpSpPr>
+        <p:sp>
+          <p:nvSpPr>
+            <p:cNvPr id="26" name="Rectángulo: esquinas redondeadas 25">
+              <a:extLst>
+                <a:ext uri="{FF2B5EF4-FFF2-40B4-BE49-F238E27FC236}">
+                  <a16:creationId xmlns:a16="http://schemas.microsoft.com/office/drawing/2014/main" id="{02B8A1BE-06F6-1008-BCAC-92D35B25D501}"/>
+                </a:ext>
+              </a:extLst>
+            </p:cNvPr>
+            <p:cNvSpPr/>
+            <p:nvPr/>
+          </p:nvSpPr>
+          <p:spPr>
+            <a:xfrm>
+              <a:off x="4711030" y="3315692"/>
+              <a:ext cx="832807" cy="147974"/>
+            </a:xfrm>
+            <a:prstGeom prst="roundRect">
+              <a:avLst>
+                <a:gd name="adj" fmla="val 50000"/>
+              </a:avLst>
+            </a:prstGeom>
+            <a:solidFill>
+              <a:schemeClr val="tx1"/>
+            </a:solidFill>
+            <a:ln w="12700">
+              <a:solidFill>
+                <a:schemeClr val="tx1"/>
+              </a:solidFill>
+            </a:ln>
+          </p:spPr>
+          <p:style>
+            <a:lnRef idx="2">
+              <a:schemeClr val="accent1">
+                <a:shade val="50000"/>
+              </a:schemeClr>
+            </a:lnRef>
+            <a:fillRef idx="1">
+              <a:schemeClr val="accent1"/>
+            </a:fillRef>
+            <a:effectRef idx="0">
+              <a:schemeClr val="accent1"/>
+            </a:effectRef>
+            <a:fontRef idx="minor">
+              <a:schemeClr val="lt1"/>
+            </a:fontRef>
+          </p:style>
+          <p:txBody>
+            <a:bodyPr rtlCol="0" anchor="ctr"/>
+            <a:lstStyle/>
+            <a:p>
+              <a:pPr algn="r"/>
+              <a:endParaRPr lang="es-ES" sz="3200" dirty="0"/>
+            </a:p>
+          </p:txBody>
+        </p:sp>
+        <p:sp>
+          <p:nvSpPr>
+            <p:cNvPr id="27" name="Rectángulo: esquinas redondeadas 26">
+              <a:extLst>
+                <a:ext uri="{FF2B5EF4-FFF2-40B4-BE49-F238E27FC236}">
+                  <a16:creationId xmlns:a16="http://schemas.microsoft.com/office/drawing/2014/main" id="{A59B2F50-6B81-80BA-F3BE-9D861C25E3D6}"/>
+                </a:ext>
+              </a:extLst>
+            </p:cNvPr>
+            <p:cNvSpPr/>
+            <p:nvPr/>
+          </p:nvSpPr>
+          <p:spPr>
+            <a:xfrm>
+              <a:off x="4918707" y="3315693"/>
+              <a:ext cx="622513" cy="147974"/>
+            </a:xfrm>
+            <a:prstGeom prst="roundRect">
+              <a:avLst>
+                <a:gd name="adj" fmla="val 50000"/>
+              </a:avLst>
+            </a:prstGeom>
+            <a:solidFill>
+              <a:schemeClr val="bg1"/>
+            </a:solidFill>
+            <a:ln w="12700">
+              <a:solidFill>
+                <a:schemeClr val="tx1"/>
+              </a:solidFill>
+            </a:ln>
+          </p:spPr>
+          <p:style>
+            <a:lnRef idx="2">
+              <a:schemeClr val="accent1">
+                <a:shade val="50000"/>
+              </a:schemeClr>
+            </a:lnRef>
+            <a:fillRef idx="1">
+              <a:schemeClr val="accent1"/>
+            </a:fillRef>
+            <a:effectRef idx="0">
+              <a:schemeClr val="accent1"/>
+            </a:effectRef>
+            <a:fontRef idx="minor">
+              <a:schemeClr val="lt1"/>
+            </a:fontRef>
+          </p:style>
+          <p:txBody>
+            <a:bodyPr lIns="0" rIns="0" rtlCol="0" anchor="ctr"/>
+            <a:lstStyle/>
+            <a:p>
+              <a:pPr algn="ctr"/>
+              <a:r>
+                <a:rPr lang="es-ES" sz="1200" dirty="0">
+                  <a:solidFill>
+                    <a:schemeClr val="tx1"/>
+                  </a:solidFill>
+                  <a:latin typeface="Audiowide" panose="02000503000000020004" pitchFamily="2" charset="0"/>
+                </a:rPr>
+                <a:t>Output 2</a:t>
+              </a:r>
+            </a:p>
+          </p:txBody>
+        </p:sp>
+        <p:sp>
+          <p:nvSpPr>
+            <p:cNvPr id="28" name="CuadroTexto 27">
+              <a:extLst>
+                <a:ext uri="{FF2B5EF4-FFF2-40B4-BE49-F238E27FC236}">
+                  <a16:creationId xmlns:a16="http://schemas.microsoft.com/office/drawing/2014/main" id="{35E1FAB5-0BB3-FBB6-8B28-84CD44C0F5F4}"/>
+                </a:ext>
+              </a:extLst>
+            </p:cNvPr>
+            <p:cNvSpPr txBox="1"/>
+            <p:nvPr/>
+          </p:nvSpPr>
+          <p:spPr>
+            <a:xfrm>
+              <a:off x="4726670" y="3314697"/>
+              <a:ext cx="335151" cy="149966"/>
+            </a:xfrm>
+            <a:prstGeom prst="rect">
+              <a:avLst/>
+            </a:prstGeom>
+            <a:noFill/>
+          </p:spPr>
+          <p:txBody>
+            <a:bodyPr wrap="square">
+              <a:spAutoFit/>
+            </a:bodyPr>
+            <a:lstStyle/>
+            <a:p>
+              <a:r>
+                <a:rPr lang="es-ES" sz="1100" dirty="0">
+                  <a:solidFill>
+                    <a:schemeClr val="bg1"/>
+                  </a:solidFill>
+                  <a:latin typeface="Audiowide" panose="02000503000000020004" pitchFamily="2" charset="0"/>
+                </a:rPr>
+                <a:t>17</a:t>
+              </a:r>
+            </a:p>
+          </p:txBody>
+        </p:sp>
+      </p:grpSp>
+      <p:grpSp>
+        <p:nvGrpSpPr>
+          <p:cNvPr id="29" name="Grupo 28">
+            <a:extLst>
+              <a:ext uri="{FF2B5EF4-FFF2-40B4-BE49-F238E27FC236}">
+                <a16:creationId xmlns:a16="http://schemas.microsoft.com/office/drawing/2014/main" id="{E8E147E4-7930-A166-D013-6BE1C04A33A6}"/>
+              </a:ext>
+            </a:extLst>
+          </p:cNvPr>
+          <p:cNvGrpSpPr/>
+          <p:nvPr/>
+        </p:nvGrpSpPr>
+        <p:grpSpPr>
+          <a:xfrm>
+            <a:off x="2904406" y="3468850"/>
+            <a:ext cx="1234734" cy="261611"/>
+            <a:chOff x="4711030" y="3314697"/>
+            <a:chExt cx="832807" cy="149966"/>
+          </a:xfrm>
+        </p:grpSpPr>
+        <p:sp>
+          <p:nvSpPr>
+            <p:cNvPr id="30" name="Rectángulo: esquinas redondeadas 29">
+              <a:extLst>
+                <a:ext uri="{FF2B5EF4-FFF2-40B4-BE49-F238E27FC236}">
+                  <a16:creationId xmlns:a16="http://schemas.microsoft.com/office/drawing/2014/main" id="{FC8B2C2D-36AC-8CE2-3F03-BC7E6AC8AC11}"/>
+                </a:ext>
+              </a:extLst>
+            </p:cNvPr>
+            <p:cNvSpPr/>
+            <p:nvPr/>
+          </p:nvSpPr>
+          <p:spPr>
+            <a:xfrm>
+              <a:off x="4711030" y="3315692"/>
+              <a:ext cx="832807" cy="147974"/>
+            </a:xfrm>
+            <a:prstGeom prst="roundRect">
+              <a:avLst>
+                <a:gd name="adj" fmla="val 50000"/>
+              </a:avLst>
+            </a:prstGeom>
+            <a:solidFill>
+              <a:schemeClr val="tx1"/>
+            </a:solidFill>
+            <a:ln w="12700">
+              <a:solidFill>
+                <a:schemeClr val="tx1"/>
+              </a:solidFill>
+            </a:ln>
+          </p:spPr>
+          <p:style>
+            <a:lnRef idx="2">
+              <a:schemeClr val="accent1">
+                <a:shade val="50000"/>
+              </a:schemeClr>
+            </a:lnRef>
+            <a:fillRef idx="1">
+              <a:schemeClr val="accent1"/>
+            </a:fillRef>
+            <a:effectRef idx="0">
+              <a:schemeClr val="accent1"/>
+            </a:effectRef>
+            <a:fontRef idx="minor">
+              <a:schemeClr val="lt1"/>
+            </a:fontRef>
+          </p:style>
+          <p:txBody>
+            <a:bodyPr rtlCol="0" anchor="ctr"/>
+            <a:lstStyle/>
+            <a:p>
+              <a:pPr algn="r"/>
+              <a:endParaRPr lang="es-ES" sz="3200" dirty="0"/>
+            </a:p>
+          </p:txBody>
+        </p:sp>
+        <p:sp>
+          <p:nvSpPr>
+            <p:cNvPr id="32" name="Rectángulo: esquinas redondeadas 31">
+              <a:extLst>
+                <a:ext uri="{FF2B5EF4-FFF2-40B4-BE49-F238E27FC236}">
+                  <a16:creationId xmlns:a16="http://schemas.microsoft.com/office/drawing/2014/main" id="{AB546801-69B3-BFF1-6760-54B5305E48C0}"/>
+                </a:ext>
+              </a:extLst>
+            </p:cNvPr>
+            <p:cNvSpPr/>
+            <p:nvPr/>
+          </p:nvSpPr>
+          <p:spPr>
+            <a:xfrm>
+              <a:off x="4918707" y="3315693"/>
+              <a:ext cx="622513" cy="147974"/>
+            </a:xfrm>
+            <a:prstGeom prst="roundRect">
+              <a:avLst>
+                <a:gd name="adj" fmla="val 50000"/>
+              </a:avLst>
+            </a:prstGeom>
+            <a:solidFill>
+              <a:schemeClr val="bg1"/>
+            </a:solidFill>
+            <a:ln w="12700">
+              <a:solidFill>
+                <a:schemeClr val="tx1"/>
+              </a:solidFill>
+            </a:ln>
+          </p:spPr>
+          <p:style>
+            <a:lnRef idx="2">
+              <a:schemeClr val="accent1">
+                <a:shade val="50000"/>
+              </a:schemeClr>
+            </a:lnRef>
+            <a:fillRef idx="1">
+              <a:schemeClr val="accent1"/>
+            </a:fillRef>
+            <a:effectRef idx="0">
+              <a:schemeClr val="accent1"/>
+            </a:effectRef>
+            <a:fontRef idx="minor">
+              <a:schemeClr val="lt1"/>
+            </a:fontRef>
+          </p:style>
+          <p:txBody>
+            <a:bodyPr lIns="0" rIns="0" rtlCol="0" anchor="ctr"/>
+            <a:lstStyle/>
+            <a:p>
+              <a:pPr algn="ctr"/>
+              <a:r>
+                <a:rPr lang="es-ES" sz="1200" dirty="0">
+                  <a:solidFill>
+                    <a:schemeClr val="tx1"/>
+                  </a:solidFill>
+                  <a:latin typeface="Audiowide" panose="02000503000000020004" pitchFamily="2" charset="0"/>
+                </a:rPr>
+                <a:t>Output 3</a:t>
+              </a:r>
+            </a:p>
+          </p:txBody>
+        </p:sp>
+        <p:sp>
+          <p:nvSpPr>
+            <p:cNvPr id="33" name="CuadroTexto 32">
+              <a:extLst>
+                <a:ext uri="{FF2B5EF4-FFF2-40B4-BE49-F238E27FC236}">
+                  <a16:creationId xmlns:a16="http://schemas.microsoft.com/office/drawing/2014/main" id="{389F60F8-C62D-E9C7-AB58-2BAA110B742C}"/>
+                </a:ext>
+              </a:extLst>
+            </p:cNvPr>
+            <p:cNvSpPr txBox="1"/>
+            <p:nvPr/>
+          </p:nvSpPr>
+          <p:spPr>
+            <a:xfrm>
+              <a:off x="4726670" y="3314697"/>
+              <a:ext cx="335151" cy="149966"/>
+            </a:xfrm>
+            <a:prstGeom prst="rect">
+              <a:avLst/>
+            </a:prstGeom>
+            <a:noFill/>
+          </p:spPr>
+          <p:txBody>
+            <a:bodyPr wrap="square">
+              <a:spAutoFit/>
+            </a:bodyPr>
+            <a:lstStyle/>
+            <a:p>
+              <a:r>
+                <a:rPr lang="es-ES" sz="1100" dirty="0">
+                  <a:solidFill>
+                    <a:schemeClr val="bg1"/>
+                  </a:solidFill>
+                  <a:latin typeface="Audiowide" panose="02000503000000020004" pitchFamily="2" charset="0"/>
+                </a:rPr>
+                <a:t>18</a:t>
+              </a:r>
+            </a:p>
+          </p:txBody>
+        </p:sp>
+      </p:grpSp>
+      <p:grpSp>
+        <p:nvGrpSpPr>
+          <p:cNvPr id="36" name="Grupo 35">
+            <a:extLst>
+              <a:ext uri="{FF2B5EF4-FFF2-40B4-BE49-F238E27FC236}">
+                <a16:creationId xmlns:a16="http://schemas.microsoft.com/office/drawing/2014/main" id="{F43670ED-B633-E913-56B9-519F9C5F4A72}"/>
+              </a:ext>
+            </a:extLst>
+          </p:cNvPr>
+          <p:cNvGrpSpPr/>
+          <p:nvPr/>
+        </p:nvGrpSpPr>
+        <p:grpSpPr>
+          <a:xfrm rot="16200000">
+            <a:off x="4980696" y="2160226"/>
+            <a:ext cx="1234734" cy="261611"/>
+            <a:chOff x="4711030" y="3314697"/>
+            <a:chExt cx="832807" cy="149966"/>
+          </a:xfrm>
+        </p:grpSpPr>
+        <p:sp>
+          <p:nvSpPr>
+            <p:cNvPr id="38" name="Rectángulo: esquinas redondeadas 37">
+              <a:extLst>
+                <a:ext uri="{FF2B5EF4-FFF2-40B4-BE49-F238E27FC236}">
+                  <a16:creationId xmlns:a16="http://schemas.microsoft.com/office/drawing/2014/main" id="{5C189CD8-1C50-9411-2EEA-B53DB4545773}"/>
+                </a:ext>
+              </a:extLst>
+            </p:cNvPr>
+            <p:cNvSpPr/>
+            <p:nvPr/>
+          </p:nvSpPr>
+          <p:spPr>
+            <a:xfrm>
+              <a:off x="4711030" y="3315692"/>
+              <a:ext cx="832807" cy="147974"/>
+            </a:xfrm>
+            <a:prstGeom prst="roundRect">
+              <a:avLst>
+                <a:gd name="adj" fmla="val 50000"/>
+              </a:avLst>
+            </a:prstGeom>
+            <a:solidFill>
+              <a:schemeClr val="tx1"/>
+            </a:solidFill>
+            <a:ln w="12700">
+              <a:solidFill>
+                <a:schemeClr val="tx1"/>
+              </a:solidFill>
+            </a:ln>
+          </p:spPr>
+          <p:style>
+            <a:lnRef idx="2">
+              <a:schemeClr val="accent1">
+                <a:shade val="50000"/>
+              </a:schemeClr>
+            </a:lnRef>
+            <a:fillRef idx="1">
+              <a:schemeClr val="accent1"/>
+            </a:fillRef>
+            <a:effectRef idx="0">
+              <a:schemeClr val="accent1"/>
+            </a:effectRef>
+            <a:fontRef idx="minor">
+              <a:schemeClr val="lt1"/>
+            </a:fontRef>
+          </p:style>
+          <p:txBody>
+            <a:bodyPr rtlCol="0" anchor="ctr"/>
+            <a:lstStyle/>
+            <a:p>
+              <a:pPr algn="r"/>
+              <a:endParaRPr lang="es-ES" sz="3200" dirty="0"/>
+            </a:p>
+          </p:txBody>
+        </p:sp>
+        <p:sp>
+          <p:nvSpPr>
+            <p:cNvPr id="40" name="Rectángulo: esquinas redondeadas 39">
+              <a:extLst>
+                <a:ext uri="{FF2B5EF4-FFF2-40B4-BE49-F238E27FC236}">
+                  <a16:creationId xmlns:a16="http://schemas.microsoft.com/office/drawing/2014/main" id="{55246129-8A46-BC5F-4792-FADC4BA0C5DA}"/>
+                </a:ext>
+              </a:extLst>
+            </p:cNvPr>
+            <p:cNvSpPr/>
+            <p:nvPr/>
+          </p:nvSpPr>
+          <p:spPr>
+            <a:xfrm>
+              <a:off x="4918707" y="3315693"/>
+              <a:ext cx="622513" cy="147974"/>
+            </a:xfrm>
+            <a:prstGeom prst="roundRect">
+              <a:avLst>
+                <a:gd name="adj" fmla="val 50000"/>
+              </a:avLst>
+            </a:prstGeom>
+            <a:solidFill>
+              <a:schemeClr val="bg1"/>
+            </a:solidFill>
+            <a:ln w="12700">
+              <a:solidFill>
+                <a:schemeClr val="tx1"/>
+              </a:solidFill>
+            </a:ln>
+          </p:spPr>
+          <p:style>
+            <a:lnRef idx="2">
+              <a:schemeClr val="accent1">
+                <a:shade val="50000"/>
+              </a:schemeClr>
+            </a:lnRef>
+            <a:fillRef idx="1">
+              <a:schemeClr val="accent1"/>
+            </a:fillRef>
+            <a:effectRef idx="0">
+              <a:schemeClr val="accent1"/>
+            </a:effectRef>
+            <a:fontRef idx="minor">
+              <a:schemeClr val="lt1"/>
+            </a:fontRef>
+          </p:style>
+          <p:txBody>
+            <a:bodyPr lIns="0" rIns="0" rtlCol="0" anchor="ctr"/>
+            <a:lstStyle/>
+            <a:p>
+              <a:pPr algn="ctr"/>
+              <a:r>
+                <a:rPr lang="es-ES" sz="1200" dirty="0">
+                  <a:solidFill>
+                    <a:schemeClr val="tx1"/>
+                  </a:solidFill>
+                  <a:latin typeface="Audiowide" panose="02000503000000020004" pitchFamily="2" charset="0"/>
+                </a:rPr>
+                <a:t>Output 4</a:t>
+              </a:r>
+            </a:p>
+          </p:txBody>
+        </p:sp>
+        <p:sp>
+          <p:nvSpPr>
+            <p:cNvPr id="42" name="CuadroTexto 41">
+              <a:extLst>
+                <a:ext uri="{FF2B5EF4-FFF2-40B4-BE49-F238E27FC236}">
+                  <a16:creationId xmlns:a16="http://schemas.microsoft.com/office/drawing/2014/main" id="{2350A2AD-1C4A-DCBE-2A93-450773E29C17}"/>
+                </a:ext>
+              </a:extLst>
+            </p:cNvPr>
+            <p:cNvSpPr txBox="1"/>
+            <p:nvPr/>
+          </p:nvSpPr>
+          <p:spPr>
+            <a:xfrm>
+              <a:off x="4726670" y="3314697"/>
+              <a:ext cx="335151" cy="149966"/>
+            </a:xfrm>
+            <a:prstGeom prst="rect">
+              <a:avLst/>
+            </a:prstGeom>
+            <a:noFill/>
+          </p:spPr>
+          <p:txBody>
+            <a:bodyPr wrap="square">
+              <a:spAutoFit/>
+            </a:bodyPr>
+            <a:lstStyle/>
+            <a:p>
+              <a:r>
+                <a:rPr lang="es-ES" sz="1100" dirty="0">
+                  <a:solidFill>
+                    <a:schemeClr val="bg1"/>
+                  </a:solidFill>
+                  <a:latin typeface="Audiowide" panose="02000503000000020004" pitchFamily="2" charset="0"/>
+                </a:rPr>
+                <a:t>19</a:t>
+              </a:r>
+            </a:p>
+          </p:txBody>
+        </p:sp>
+      </p:grpSp>
+      <p:sp>
+        <p:nvSpPr>
+          <p:cNvPr id="43" name="CuadroTexto 42">
+            <a:extLst>
+              <a:ext uri="{FF2B5EF4-FFF2-40B4-BE49-F238E27FC236}">
+                <a16:creationId xmlns:a16="http://schemas.microsoft.com/office/drawing/2014/main" id="{1F5A0B5E-C39D-2514-0459-5CBC9EE265B6}"/>
+              </a:ext>
+            </a:extLst>
+          </p:cNvPr>
+          <p:cNvSpPr txBox="1"/>
+          <p:nvPr/>
+        </p:nvSpPr>
+        <p:spPr>
+          <a:xfrm>
+            <a:off x="6519592" y="2071642"/>
+            <a:ext cx="577086" cy="204927"/>
+          </a:xfrm>
+          <a:prstGeom prst="rect">
+            <a:avLst/>
+          </a:prstGeom>
+          <a:solidFill>
+            <a:schemeClr val="tx1"/>
+          </a:solidFill>
+        </p:spPr>
+        <p:txBody>
+          <a:bodyPr wrap="square" lIns="0" rIns="0">
+            <a:noAutofit/>
+          </a:bodyPr>
+          <a:lstStyle/>
+          <a:p>
+            <a:pPr algn="ctr" defTabSz="0">
+              <a:tabLst>
+                <a:tab pos="0" algn="l"/>
+              </a:tabLst>
+            </a:pPr>
+            <a:r>
+              <a:rPr lang="es-ES" sz="790" spc="50" dirty="0">
+                <a:solidFill>
+                  <a:schemeClr val="bg1"/>
+                </a:solidFill>
+                <a:latin typeface="Audiowide" panose="02000503000000020004" pitchFamily="2" charset="0"/>
+              </a:rPr>
+              <a:t>I2C</a:t>
+            </a:r>
+            <a:endParaRPr lang="es-ES" sz="790" spc="50" dirty="0">
+              <a:solidFill>
+                <a:schemeClr val="bg1"/>
+              </a:solidFill>
+            </a:endParaRPr>
+          </a:p>
+        </p:txBody>
+      </p:sp>
+      <p:sp>
+        <p:nvSpPr>
+          <p:cNvPr id="45" name="CuadroTexto 44">
+            <a:extLst>
+              <a:ext uri="{FF2B5EF4-FFF2-40B4-BE49-F238E27FC236}">
+                <a16:creationId xmlns:a16="http://schemas.microsoft.com/office/drawing/2014/main" id="{248E9938-167A-11CC-8A16-F2B6FE46FDB3}"/>
+              </a:ext>
+            </a:extLst>
+          </p:cNvPr>
+          <p:cNvSpPr txBox="1"/>
+          <p:nvPr/>
+        </p:nvSpPr>
+        <p:spPr>
+          <a:xfrm>
+            <a:off x="2282280" y="6885854"/>
+            <a:ext cx="427159" cy="215444"/>
+          </a:xfrm>
+          <a:prstGeom prst="rect">
+            <a:avLst/>
+          </a:prstGeom>
+          <a:noFill/>
+        </p:spPr>
+        <p:txBody>
+          <a:bodyPr wrap="square" rtlCol="0">
+            <a:spAutoFit/>
+          </a:bodyPr>
+          <a:lstStyle/>
+          <a:p>
+            <a:pPr algn="ctr"/>
+            <a:r>
+              <a:rPr lang="es-ES" sz="800" b="1" dirty="0">
+                <a:latin typeface="Audiowide" panose="02000503000000020004" pitchFamily="2" charset="0"/>
+              </a:rPr>
+              <a:t>VDC</a:t>
+            </a:r>
+            <a:endParaRPr lang="es-ES" sz="1050" b="1" dirty="0">
+              <a:latin typeface="Audiowide" panose="02000503000000020004" pitchFamily="2" charset="0"/>
+            </a:endParaRPr>
+          </a:p>
+        </p:txBody>
+      </p:sp>
+      <p:sp>
+        <p:nvSpPr>
+          <p:cNvPr id="48" name="CuadroTexto 47">
+            <a:extLst>
+              <a:ext uri="{FF2B5EF4-FFF2-40B4-BE49-F238E27FC236}">
+                <a16:creationId xmlns:a16="http://schemas.microsoft.com/office/drawing/2014/main" id="{7063056C-CDFB-395C-6A1E-129BA0D487B4}"/>
+              </a:ext>
+            </a:extLst>
+          </p:cNvPr>
+          <p:cNvSpPr txBox="1"/>
+          <p:nvPr/>
+        </p:nvSpPr>
+        <p:spPr>
+          <a:xfrm>
+            <a:off x="2904406" y="6885854"/>
+            <a:ext cx="427159" cy="215444"/>
+          </a:xfrm>
+          <a:prstGeom prst="rect">
+            <a:avLst/>
+          </a:prstGeom>
+          <a:noFill/>
+        </p:spPr>
+        <p:txBody>
+          <a:bodyPr wrap="square" rtlCol="0">
+            <a:spAutoFit/>
+          </a:bodyPr>
+          <a:lstStyle/>
+          <a:p>
+            <a:pPr algn="ctr"/>
+            <a:r>
+              <a:rPr lang="es-ES" sz="800" b="1" dirty="0">
+                <a:latin typeface="Audiowide" panose="02000503000000020004" pitchFamily="2" charset="0"/>
+              </a:rPr>
+              <a:t>VDC</a:t>
+            </a:r>
+            <a:endParaRPr lang="es-ES" sz="1050" b="1" dirty="0">
+              <a:latin typeface="Audiowide" panose="02000503000000020004" pitchFamily="2" charset="0"/>
+            </a:endParaRPr>
+          </a:p>
+        </p:txBody>
+      </p:sp>
+      <p:sp>
+        <p:nvSpPr>
+          <p:cNvPr id="50" name="CuadroTexto 49">
+            <a:extLst>
+              <a:ext uri="{FF2B5EF4-FFF2-40B4-BE49-F238E27FC236}">
+                <a16:creationId xmlns:a16="http://schemas.microsoft.com/office/drawing/2014/main" id="{DBC127DF-0BCF-8724-7B29-03418E9655F9}"/>
+              </a:ext>
+            </a:extLst>
+          </p:cNvPr>
+          <p:cNvSpPr txBox="1"/>
+          <p:nvPr/>
+        </p:nvSpPr>
+        <p:spPr>
+          <a:xfrm>
+            <a:off x="3526532" y="6885854"/>
+            <a:ext cx="427159" cy="215444"/>
+          </a:xfrm>
+          <a:prstGeom prst="rect">
+            <a:avLst/>
+          </a:prstGeom>
+          <a:noFill/>
+        </p:spPr>
+        <p:txBody>
+          <a:bodyPr wrap="square" rtlCol="0">
+            <a:spAutoFit/>
+          </a:bodyPr>
+          <a:lstStyle/>
+          <a:p>
+            <a:pPr algn="ctr"/>
+            <a:r>
+              <a:rPr lang="es-ES" sz="800" b="1" dirty="0">
+                <a:latin typeface="Audiowide" panose="02000503000000020004" pitchFamily="2" charset="0"/>
+              </a:rPr>
+              <a:t>VDC</a:t>
+            </a:r>
+            <a:endParaRPr lang="es-ES" sz="1050" b="1" dirty="0">
+              <a:latin typeface="Audiowide" panose="02000503000000020004" pitchFamily="2" charset="0"/>
+            </a:endParaRPr>
+          </a:p>
+        </p:txBody>
+      </p:sp>
+      <p:grpSp>
+        <p:nvGrpSpPr>
+          <p:cNvPr id="54" name="Grupo 53">
+            <a:extLst>
+              <a:ext uri="{FF2B5EF4-FFF2-40B4-BE49-F238E27FC236}">
+                <a16:creationId xmlns:a16="http://schemas.microsoft.com/office/drawing/2014/main" id="{D5EA00CB-F672-2E42-56A3-C03421C71A2D}"/>
+              </a:ext>
+            </a:extLst>
+          </p:cNvPr>
+          <p:cNvGrpSpPr/>
+          <p:nvPr/>
+        </p:nvGrpSpPr>
+        <p:grpSpPr>
+          <a:xfrm>
+            <a:off x="2288630" y="6408553"/>
+            <a:ext cx="2316175" cy="377026"/>
+            <a:chOff x="2288630" y="6408553"/>
+            <a:chExt cx="2316175" cy="377026"/>
+          </a:xfrm>
+        </p:grpSpPr>
+        <p:sp>
+          <p:nvSpPr>
+            <p:cNvPr id="44" name="CuadroTexto 43">
+              <a:extLst>
+                <a:ext uri="{FF2B5EF4-FFF2-40B4-BE49-F238E27FC236}">
+                  <a16:creationId xmlns:a16="http://schemas.microsoft.com/office/drawing/2014/main" id="{282876E4-5C39-EF16-DD17-DCC924526EA5}"/>
+                </a:ext>
+              </a:extLst>
+            </p:cNvPr>
+            <p:cNvSpPr txBox="1"/>
+            <p:nvPr/>
+          </p:nvSpPr>
+          <p:spPr>
+            <a:xfrm>
+              <a:off x="2288630" y="6408553"/>
+              <a:ext cx="427159" cy="377026"/>
+            </a:xfrm>
+            <a:prstGeom prst="rect">
+              <a:avLst/>
+            </a:prstGeom>
+            <a:noFill/>
+          </p:spPr>
+          <p:txBody>
+            <a:bodyPr wrap="square" rtlCol="0">
+              <a:spAutoFit/>
+            </a:bodyPr>
+            <a:lstStyle/>
+            <a:p>
+              <a:pPr algn="ctr"/>
+              <a:r>
+                <a:rPr lang="es-ES" sz="1050" dirty="0">
+                  <a:latin typeface="Audiowide" panose="02000503000000020004" pitchFamily="2" charset="0"/>
+                </a:rPr>
+                <a:t>24</a:t>
+              </a:r>
+              <a:r>
+                <a:rPr lang="es-ES" sz="800" b="1" dirty="0">
+                  <a:latin typeface="Audiowide" panose="02000503000000020004" pitchFamily="2" charset="0"/>
+                </a:rPr>
+                <a:t>VAC</a:t>
+              </a:r>
+              <a:endParaRPr lang="es-ES" sz="1050" b="1" dirty="0">
+                <a:latin typeface="Audiowide" panose="02000503000000020004" pitchFamily="2" charset="0"/>
+              </a:endParaRPr>
+            </a:p>
+          </p:txBody>
+        </p:sp>
+        <p:sp>
+          <p:nvSpPr>
+            <p:cNvPr id="47" name="CuadroTexto 46">
+              <a:extLst>
+                <a:ext uri="{FF2B5EF4-FFF2-40B4-BE49-F238E27FC236}">
+                  <a16:creationId xmlns:a16="http://schemas.microsoft.com/office/drawing/2014/main" id="{FADD303D-90C5-AAA9-637C-B8D16BC76EB5}"/>
+                </a:ext>
+              </a:extLst>
+            </p:cNvPr>
+            <p:cNvSpPr txBox="1"/>
+            <p:nvPr/>
+          </p:nvSpPr>
+          <p:spPr>
+            <a:xfrm>
+              <a:off x="2910756" y="6408553"/>
+              <a:ext cx="427159" cy="377026"/>
+            </a:xfrm>
+            <a:prstGeom prst="rect">
+              <a:avLst/>
+            </a:prstGeom>
+            <a:noFill/>
+          </p:spPr>
+          <p:txBody>
+            <a:bodyPr wrap="square" rtlCol="0">
+              <a:spAutoFit/>
+            </a:bodyPr>
+            <a:lstStyle/>
+            <a:p>
+              <a:pPr algn="ctr"/>
+              <a:r>
+                <a:rPr lang="es-ES" sz="1050" dirty="0">
+                  <a:latin typeface="Audiowide" panose="02000503000000020004" pitchFamily="2" charset="0"/>
+                </a:rPr>
+                <a:t>24</a:t>
+              </a:r>
+              <a:r>
+                <a:rPr lang="es-ES" sz="800" b="1" dirty="0">
+                  <a:latin typeface="Audiowide" panose="02000503000000020004" pitchFamily="2" charset="0"/>
+                </a:rPr>
+                <a:t>VAC</a:t>
+              </a:r>
+              <a:endParaRPr lang="es-ES" sz="1050" b="1" dirty="0">
+                <a:latin typeface="Audiowide" panose="02000503000000020004" pitchFamily="2" charset="0"/>
+              </a:endParaRPr>
+            </a:p>
+          </p:txBody>
+        </p:sp>
+        <p:sp>
+          <p:nvSpPr>
+            <p:cNvPr id="49" name="CuadroTexto 48">
+              <a:extLst>
+                <a:ext uri="{FF2B5EF4-FFF2-40B4-BE49-F238E27FC236}">
+                  <a16:creationId xmlns:a16="http://schemas.microsoft.com/office/drawing/2014/main" id="{30378934-A179-0914-BA11-156402A1467B}"/>
+                </a:ext>
+              </a:extLst>
+            </p:cNvPr>
+            <p:cNvSpPr txBox="1"/>
+            <p:nvPr/>
+          </p:nvSpPr>
+          <p:spPr>
+            <a:xfrm>
+              <a:off x="3532882" y="6408553"/>
+              <a:ext cx="427159" cy="377026"/>
+            </a:xfrm>
+            <a:prstGeom prst="rect">
+              <a:avLst/>
+            </a:prstGeom>
+            <a:noFill/>
+          </p:spPr>
+          <p:txBody>
+            <a:bodyPr wrap="square" rtlCol="0">
+              <a:spAutoFit/>
+            </a:bodyPr>
+            <a:lstStyle/>
+            <a:p>
+              <a:pPr algn="ctr"/>
+              <a:r>
+                <a:rPr lang="es-ES" sz="1050" dirty="0">
+                  <a:latin typeface="Audiowide" panose="02000503000000020004" pitchFamily="2" charset="0"/>
+                </a:rPr>
+                <a:t>24</a:t>
+              </a:r>
+              <a:r>
+                <a:rPr lang="es-ES" sz="800" b="1" dirty="0">
+                  <a:latin typeface="Audiowide" panose="02000503000000020004" pitchFamily="2" charset="0"/>
+                </a:rPr>
+                <a:t>VAC</a:t>
+              </a:r>
+              <a:endParaRPr lang="es-ES" sz="1050" b="1" dirty="0">
+                <a:latin typeface="Audiowide" panose="02000503000000020004" pitchFamily="2" charset="0"/>
+              </a:endParaRPr>
+            </a:p>
+          </p:txBody>
+        </p:sp>
+        <p:sp>
+          <p:nvSpPr>
+            <p:cNvPr id="51" name="CuadroTexto 50">
+              <a:extLst>
+                <a:ext uri="{FF2B5EF4-FFF2-40B4-BE49-F238E27FC236}">
+                  <a16:creationId xmlns:a16="http://schemas.microsoft.com/office/drawing/2014/main" id="{CA851C00-7CB8-2A5D-2813-761333981519}"/>
+                </a:ext>
+              </a:extLst>
+            </p:cNvPr>
+            <p:cNvSpPr txBox="1"/>
+            <p:nvPr/>
+          </p:nvSpPr>
+          <p:spPr>
+            <a:xfrm>
+              <a:off x="4177646" y="6408553"/>
+              <a:ext cx="427159" cy="377026"/>
+            </a:xfrm>
+            <a:prstGeom prst="rect">
+              <a:avLst/>
+            </a:prstGeom>
+            <a:noFill/>
+          </p:spPr>
+          <p:txBody>
+            <a:bodyPr wrap="square" rtlCol="0">
+              <a:spAutoFit/>
+            </a:bodyPr>
+            <a:lstStyle/>
+            <a:p>
+              <a:pPr algn="ctr"/>
+              <a:r>
+                <a:rPr lang="es-ES" sz="1050" dirty="0">
+                  <a:latin typeface="Audiowide" panose="02000503000000020004" pitchFamily="2" charset="0"/>
+                </a:rPr>
+                <a:t>24</a:t>
+              </a:r>
+              <a:r>
+                <a:rPr lang="es-ES" sz="800" b="1" dirty="0">
+                  <a:latin typeface="Audiowide" panose="02000503000000020004" pitchFamily="2" charset="0"/>
+                </a:rPr>
+                <a:t>VAC</a:t>
+              </a:r>
+              <a:endParaRPr lang="es-ES" sz="1050" b="1" dirty="0">
+                <a:latin typeface="Audiowide" panose="02000503000000020004" pitchFamily="2" charset="0"/>
+              </a:endParaRPr>
+            </a:p>
+          </p:txBody>
+        </p:sp>
+      </p:grpSp>
+      <p:sp>
+        <p:nvSpPr>
+          <p:cNvPr id="52" name="CuadroTexto 51">
+            <a:extLst>
+              <a:ext uri="{FF2B5EF4-FFF2-40B4-BE49-F238E27FC236}">
+                <a16:creationId xmlns:a16="http://schemas.microsoft.com/office/drawing/2014/main" id="{26AC70A1-63F4-5703-6068-285982027DA2}"/>
+              </a:ext>
+            </a:extLst>
+          </p:cNvPr>
+          <p:cNvSpPr txBox="1"/>
+          <p:nvPr/>
+        </p:nvSpPr>
+        <p:spPr>
+          <a:xfrm>
+            <a:off x="4171296" y="6885854"/>
+            <a:ext cx="427159" cy="215444"/>
+          </a:xfrm>
+          <a:prstGeom prst="rect">
+            <a:avLst/>
+          </a:prstGeom>
+          <a:noFill/>
+        </p:spPr>
+        <p:txBody>
+          <a:bodyPr wrap="square" rtlCol="0">
+            <a:spAutoFit/>
+          </a:bodyPr>
+          <a:lstStyle/>
+          <a:p>
+            <a:pPr algn="ctr"/>
+            <a:r>
+              <a:rPr lang="es-ES" sz="800" b="1" dirty="0">
+                <a:latin typeface="Audiowide" panose="02000503000000020004" pitchFamily="2" charset="0"/>
+              </a:rPr>
+              <a:t>VDC</a:t>
+            </a:r>
+            <a:endParaRPr lang="es-ES" sz="1050" b="1" dirty="0">
+              <a:latin typeface="Audiowide" panose="02000503000000020004" pitchFamily="2" charset="0"/>
+            </a:endParaRPr>
           </a:p>
         </p:txBody>
       </p:sp>
@@ -6158,7 +6881,7 @@
         </p:nvSpPr>
         <p:spPr>
           <a:xfrm>
-            <a:off x="2315594" y="6565661"/>
+            <a:off x="5974185" y="6396764"/>
             <a:ext cx="707735" cy="246221"/>
           </a:xfrm>
           <a:prstGeom prst="rect">
@@ -6198,10 +6921,10 @@
         </p:nvGrpSpPr>
         <p:grpSpPr>
           <a:xfrm rot="16200000">
-            <a:off x="6251978" y="5413336"/>
-            <a:ext cx="870470" cy="648883"/>
-            <a:chOff x="9142802" y="3068846"/>
-            <a:chExt cx="1231936" cy="721516"/>
+            <a:off x="6273492" y="5394086"/>
+            <a:ext cx="850433" cy="513161"/>
+            <a:chOff x="9191453" y="3085439"/>
+            <a:chExt cx="1217138" cy="716971"/>
           </a:xfrm>
         </p:grpSpPr>
         <p:sp>
@@ -6218,8 +6941,8 @@
           </p:nvSpPr>
           <p:spPr>
             <a:xfrm rot="5400000">
-              <a:off x="9874220" y="3239414"/>
-              <a:ext cx="641680" cy="359356"/>
+              <a:off x="9050290" y="3264245"/>
+              <a:ext cx="641681" cy="359355"/>
             </a:xfrm>
             <a:prstGeom prst="rect">
               <a:avLst/>
@@ -6256,8 +6979,8 @@
           </p:nvSpPr>
           <p:spPr>
             <a:xfrm rot="5400000">
-              <a:off x="9550237" y="3268534"/>
-              <a:ext cx="716971" cy="326686"/>
+              <a:off x="9296889" y="3280582"/>
+              <a:ext cx="716971" cy="326685"/>
             </a:xfrm>
             <a:prstGeom prst="rect">
               <a:avLst/>
@@ -6297,8 +7020,8 @@
           </p:nvSpPr>
           <p:spPr>
             <a:xfrm rot="5400000">
-              <a:off x="9271643" y="3210009"/>
-              <a:ext cx="641680" cy="359356"/>
+              <a:off x="9609990" y="3240789"/>
+              <a:ext cx="641679" cy="359355"/>
             </a:xfrm>
             <a:prstGeom prst="rect">
               <a:avLst/>
@@ -6338,8 +7061,8 @@
           </p:nvSpPr>
           <p:spPr>
             <a:xfrm rot="5400000">
-              <a:off x="9001640" y="3210008"/>
-              <a:ext cx="641680" cy="359356"/>
+              <a:off x="9908072" y="3252197"/>
+              <a:ext cx="641681" cy="359357"/>
             </a:xfrm>
             <a:prstGeom prst="rect">
               <a:avLst/>
@@ -6379,9 +7102,9 @@
           <p:nvPr/>
         </p:nvSpPr>
         <p:spPr>
-          <a:xfrm rot="16200000">
-            <a:off x="6102922" y="5620503"/>
-            <a:ext cx="837050" cy="220524"/>
+          <a:xfrm>
+            <a:off x="6536824" y="5044173"/>
+            <a:ext cx="535270" cy="204927"/>
           </a:xfrm>
           <a:prstGeom prst="rect">
             <a:avLst/>
@@ -6391,14 +7114,18 @@
           </a:solidFill>
         </p:spPr>
         <p:txBody>
-          <a:bodyPr wrap="square">
-            <a:spAutoFit/>
+          <a:bodyPr wrap="square" lIns="0" rIns="0">
+            <a:noAutofit/>
           </a:bodyPr>
           <a:lstStyle/>
           <a:p>
-            <a:pPr algn="ctr"/>
+            <a:pPr algn="ctr" defTabSz="0">
+              <a:tabLst>
+                <a:tab pos="0" algn="l"/>
+              </a:tabLst>
+            </a:pPr>
             <a:r>
-              <a:rPr lang="es-ES" sz="800" dirty="0">
+              <a:rPr lang="es-ES" sz="790" spc="50" dirty="0">
                 <a:solidFill>
                   <a:schemeClr val="bg1"/>
                 </a:solidFill>
@@ -6406,7 +7133,7 @@
               </a:rPr>
               <a:t>SERIAL</a:t>
             </a:r>
-            <a:endParaRPr lang="es-ES" sz="800" dirty="0">
+            <a:endParaRPr lang="es-ES" sz="790" spc="50" dirty="0">
               <a:solidFill>
                 <a:schemeClr val="bg1"/>
               </a:solidFill>
@@ -6427,8 +7154,8 @@
           <p:nvPr/>
         </p:nvSpPr>
         <p:spPr>
-          <a:xfrm>
-            <a:off x="6421742" y="2816148"/>
+          <a:xfrm rot="16200000">
+            <a:off x="5114322" y="6723826"/>
             <a:ext cx="707735" cy="246221"/>
           </a:xfrm>
           <a:prstGeom prst="rect">
@@ -6468,8 +7195,8 @@
         </p:nvSpPr>
         <p:spPr>
           <a:xfrm>
-            <a:off x="6411185" y="5312240"/>
-            <a:ext cx="728850" cy="837050"/>
+            <a:off x="6539775" y="5044173"/>
+            <a:ext cx="535270" cy="1041977"/>
           </a:xfrm>
           <a:prstGeom prst="roundRect">
             <a:avLst>
@@ -6521,8 +7248,8 @@
           <p:nvPr/>
         </p:nvGrpSpPr>
         <p:grpSpPr>
-          <a:xfrm rot="5400000">
-            <a:off x="3718616" y="4144663"/>
+          <a:xfrm>
+            <a:off x="2009042" y="5496715"/>
             <a:ext cx="1683896" cy="707886"/>
             <a:chOff x="3713954" y="815975"/>
             <a:chExt cx="1683896" cy="707886"/>
@@ -6675,10 +7402,10 @@
         </p:nvGrpSpPr>
         <p:grpSpPr>
           <a:xfrm>
-            <a:off x="426120" y="3545188"/>
-            <a:ext cx="886381" cy="215444"/>
-            <a:chOff x="4679245" y="3290345"/>
-            <a:chExt cx="864592" cy="215444"/>
+            <a:off x="330770" y="3467111"/>
+            <a:ext cx="1234734" cy="261611"/>
+            <a:chOff x="4711030" y="3314697"/>
+            <a:chExt cx="832807" cy="149966"/>
           </a:xfrm>
         </p:grpSpPr>
         <p:sp>
@@ -6695,7 +7422,7 @@
           </p:nvSpPr>
           <p:spPr>
             <a:xfrm>
-              <a:off x="4711030" y="3325666"/>
+              <a:off x="4711030" y="3315692"/>
               <a:ext cx="832807" cy="147974"/>
             </a:xfrm>
             <a:prstGeom prst="roundRect">
@@ -6733,7 +7460,7 @@
             <a:lstStyle/>
             <a:p>
               <a:pPr algn="r"/>
-              <a:endParaRPr lang="es-ES" dirty="0"/>
+              <a:endParaRPr lang="es-ES" sz="3200" dirty="0"/>
             </a:p>
           </p:txBody>
         </p:sp>
@@ -6751,7 +7478,7 @@
           </p:nvSpPr>
           <p:spPr>
             <a:xfrm>
-              <a:off x="4918707" y="3323088"/>
+              <a:off x="4918707" y="3315693"/>
               <a:ext cx="622513" cy="147974"/>
             </a:xfrm>
             <a:prstGeom prst="roundRect">
@@ -6788,9 +7515,9 @@
             <a:bodyPr lIns="0" rIns="0" rtlCol="0" anchor="ctr"/>
             <a:lstStyle/>
             <a:p>
-              <a:pPr algn="r"/>
+              <a:pPr algn="ctr"/>
               <a:r>
-                <a:rPr lang="es-ES" sz="900" dirty="0">
+                <a:rPr lang="es-ES" sz="1200" dirty="0">
                   <a:solidFill>
                     <a:schemeClr val="tx1"/>
                   </a:solidFill>
@@ -6815,8 +7542,8 @@
           </p:nvSpPr>
           <p:spPr>
             <a:xfrm>
-              <a:off x="4679245" y="3290345"/>
-              <a:ext cx="382578" cy="215444"/>
+              <a:off x="4726670" y="3314697"/>
+              <a:ext cx="335151" cy="149966"/>
             </a:xfrm>
             <a:prstGeom prst="rect">
               <a:avLst/>
@@ -6830,375 +7557,13 @@
             <a:lstStyle/>
             <a:p>
               <a:r>
-                <a:rPr lang="es-ES" sz="800" dirty="0">
+                <a:rPr lang="es-ES" sz="1100" dirty="0">
                   <a:solidFill>
                     <a:schemeClr val="bg1"/>
                   </a:solidFill>
                   <a:latin typeface="Audiowide" panose="02000503000000020004" pitchFamily="2" charset="0"/>
                 </a:rPr>
                 <a:t>16</a:t>
-              </a:r>
-            </a:p>
-          </p:txBody>
-        </p:sp>
-      </p:grpSp>
-      <p:grpSp>
-        <p:nvGrpSpPr>
-          <p:cNvPr id="128" name="Grupo 127">
-            <a:extLst>
-              <a:ext uri="{FF2B5EF4-FFF2-40B4-BE49-F238E27FC236}">
-                <a16:creationId xmlns:a16="http://schemas.microsoft.com/office/drawing/2014/main" id="{36D3F85E-2CBB-44E0-A8C1-E306D00D743D}"/>
-              </a:ext>
-            </a:extLst>
-          </p:cNvPr>
-          <p:cNvGrpSpPr/>
-          <p:nvPr/>
-        </p:nvGrpSpPr>
-        <p:grpSpPr>
-          <a:xfrm>
-            <a:off x="3140786" y="3545188"/>
-            <a:ext cx="886381" cy="215444"/>
-            <a:chOff x="4679245" y="3290345"/>
-            <a:chExt cx="864592" cy="215444"/>
-          </a:xfrm>
-        </p:grpSpPr>
-        <p:sp>
-          <p:nvSpPr>
-            <p:cNvPr id="129" name="Rectángulo: esquinas redondeadas 128">
-              <a:extLst>
-                <a:ext uri="{FF2B5EF4-FFF2-40B4-BE49-F238E27FC236}">
-                  <a16:creationId xmlns:a16="http://schemas.microsoft.com/office/drawing/2014/main" id="{50320277-844E-4A97-9245-E996EFA7E08F}"/>
-                </a:ext>
-              </a:extLst>
-            </p:cNvPr>
-            <p:cNvSpPr/>
-            <p:nvPr/>
-          </p:nvSpPr>
-          <p:spPr>
-            <a:xfrm>
-              <a:off x="4711030" y="3325666"/>
-              <a:ext cx="832807" cy="147974"/>
-            </a:xfrm>
-            <a:prstGeom prst="roundRect">
-              <a:avLst>
-                <a:gd name="adj" fmla="val 50000"/>
-              </a:avLst>
-            </a:prstGeom>
-            <a:solidFill>
-              <a:schemeClr val="tx1"/>
-            </a:solidFill>
-            <a:ln w="12700">
-              <a:solidFill>
-                <a:schemeClr val="tx1"/>
-              </a:solidFill>
-            </a:ln>
-          </p:spPr>
-          <p:style>
-            <a:lnRef idx="2">
-              <a:schemeClr val="accent1">
-                <a:shade val="50000"/>
-              </a:schemeClr>
-            </a:lnRef>
-            <a:fillRef idx="1">
-              <a:schemeClr val="accent1"/>
-            </a:fillRef>
-            <a:effectRef idx="0">
-              <a:schemeClr val="accent1"/>
-            </a:effectRef>
-            <a:fontRef idx="minor">
-              <a:schemeClr val="lt1"/>
-            </a:fontRef>
-          </p:style>
-          <p:txBody>
-            <a:bodyPr rtlCol="0" anchor="ctr"/>
-            <a:lstStyle/>
-            <a:p>
-              <a:pPr algn="r"/>
-              <a:endParaRPr lang="es-ES" dirty="0"/>
-            </a:p>
-          </p:txBody>
-        </p:sp>
-        <p:sp>
-          <p:nvSpPr>
-            <p:cNvPr id="130" name="Rectángulo: esquinas redondeadas 129">
-              <a:extLst>
-                <a:ext uri="{FF2B5EF4-FFF2-40B4-BE49-F238E27FC236}">
-                  <a16:creationId xmlns:a16="http://schemas.microsoft.com/office/drawing/2014/main" id="{E8D4A354-92E1-4C37-873B-2AC103EF15C1}"/>
-                </a:ext>
-              </a:extLst>
-            </p:cNvPr>
-            <p:cNvSpPr/>
-            <p:nvPr/>
-          </p:nvSpPr>
-          <p:spPr>
-            <a:xfrm>
-              <a:off x="4918707" y="3323088"/>
-              <a:ext cx="622513" cy="147974"/>
-            </a:xfrm>
-            <a:prstGeom prst="roundRect">
-              <a:avLst>
-                <a:gd name="adj" fmla="val 50000"/>
-              </a:avLst>
-            </a:prstGeom>
-            <a:solidFill>
-              <a:schemeClr val="bg1"/>
-            </a:solidFill>
-            <a:ln w="12700">
-              <a:solidFill>
-                <a:schemeClr val="tx1"/>
-              </a:solidFill>
-            </a:ln>
-          </p:spPr>
-          <p:style>
-            <a:lnRef idx="2">
-              <a:schemeClr val="accent1">
-                <a:shade val="50000"/>
-              </a:schemeClr>
-            </a:lnRef>
-            <a:fillRef idx="1">
-              <a:schemeClr val="accent1"/>
-            </a:fillRef>
-            <a:effectRef idx="0">
-              <a:schemeClr val="accent1"/>
-            </a:effectRef>
-            <a:fontRef idx="minor">
-              <a:schemeClr val="lt1"/>
-            </a:fontRef>
-          </p:style>
-          <p:txBody>
-            <a:bodyPr lIns="0" rIns="0" rtlCol="0" anchor="ctr"/>
-            <a:lstStyle/>
-            <a:p>
-              <a:pPr algn="r"/>
-              <a:r>
-                <a:rPr lang="es-ES" sz="900" dirty="0">
-                  <a:solidFill>
-                    <a:schemeClr val="tx1"/>
-                  </a:solidFill>
-                  <a:latin typeface="Audiowide" panose="02000503000000020004" pitchFamily="2" charset="0"/>
-                </a:rPr>
-                <a:t>Output 3</a:t>
-              </a:r>
-            </a:p>
-          </p:txBody>
-        </p:sp>
-        <p:sp>
-          <p:nvSpPr>
-            <p:cNvPr id="131" name="CuadroTexto 130">
-              <a:extLst>
-                <a:ext uri="{FF2B5EF4-FFF2-40B4-BE49-F238E27FC236}">
-                  <a16:creationId xmlns:a16="http://schemas.microsoft.com/office/drawing/2014/main" id="{28AC8FA8-BAF1-446C-ABB8-4029008F462B}"/>
-                </a:ext>
-              </a:extLst>
-            </p:cNvPr>
-            <p:cNvSpPr txBox="1"/>
-            <p:nvPr/>
-          </p:nvSpPr>
-          <p:spPr>
-            <a:xfrm>
-              <a:off x="4679245" y="3290345"/>
-              <a:ext cx="382578" cy="215444"/>
-            </a:xfrm>
-            <a:prstGeom prst="rect">
-              <a:avLst/>
-            </a:prstGeom>
-            <a:noFill/>
-          </p:spPr>
-          <p:txBody>
-            <a:bodyPr wrap="square">
-              <a:spAutoFit/>
-            </a:bodyPr>
-            <a:lstStyle/>
-            <a:p>
-              <a:r>
-                <a:rPr lang="es-ES" sz="800" dirty="0">
-                  <a:solidFill>
-                    <a:schemeClr val="bg1"/>
-                  </a:solidFill>
-                  <a:latin typeface="Audiowide" panose="02000503000000020004" pitchFamily="2" charset="0"/>
-                </a:rPr>
-                <a:t>18</a:t>
-              </a:r>
-            </a:p>
-          </p:txBody>
-        </p:sp>
-      </p:grpSp>
-      <p:grpSp>
-        <p:nvGrpSpPr>
-          <p:cNvPr id="132" name="Grupo 131">
-            <a:extLst>
-              <a:ext uri="{FF2B5EF4-FFF2-40B4-BE49-F238E27FC236}">
-                <a16:creationId xmlns:a16="http://schemas.microsoft.com/office/drawing/2014/main" id="{60607DB0-5A1F-4CEB-987E-F2B9EFC9F45C}"/>
-              </a:ext>
-            </a:extLst>
-          </p:cNvPr>
-          <p:cNvGrpSpPr/>
-          <p:nvPr/>
-        </p:nvGrpSpPr>
-        <p:grpSpPr>
-          <a:xfrm>
-            <a:off x="4168445" y="3545188"/>
-            <a:ext cx="886154" cy="215444"/>
-            <a:chOff x="4679245" y="3290345"/>
-            <a:chExt cx="864592" cy="215444"/>
-          </a:xfrm>
-        </p:grpSpPr>
-        <p:sp>
-          <p:nvSpPr>
-            <p:cNvPr id="133" name="Rectángulo: esquinas redondeadas 132">
-              <a:extLst>
-                <a:ext uri="{FF2B5EF4-FFF2-40B4-BE49-F238E27FC236}">
-                  <a16:creationId xmlns:a16="http://schemas.microsoft.com/office/drawing/2014/main" id="{CADCB9FF-8C79-4376-AECF-AA78916AF7EC}"/>
-                </a:ext>
-              </a:extLst>
-            </p:cNvPr>
-            <p:cNvSpPr/>
-            <p:nvPr/>
-          </p:nvSpPr>
-          <p:spPr>
-            <a:xfrm>
-              <a:off x="4711030" y="3325666"/>
-              <a:ext cx="832807" cy="147974"/>
-            </a:xfrm>
-            <a:prstGeom prst="roundRect">
-              <a:avLst>
-                <a:gd name="adj" fmla="val 50000"/>
-              </a:avLst>
-            </a:prstGeom>
-            <a:solidFill>
-              <a:schemeClr val="tx1"/>
-            </a:solidFill>
-            <a:ln w="12700">
-              <a:solidFill>
-                <a:schemeClr val="tx1"/>
-              </a:solidFill>
-            </a:ln>
-          </p:spPr>
-          <p:style>
-            <a:lnRef idx="2">
-              <a:schemeClr val="accent1">
-                <a:shade val="50000"/>
-              </a:schemeClr>
-            </a:lnRef>
-            <a:fillRef idx="1">
-              <a:schemeClr val="accent1"/>
-            </a:fillRef>
-            <a:effectRef idx="0">
-              <a:schemeClr val="accent1"/>
-            </a:effectRef>
-            <a:fontRef idx="minor">
-              <a:schemeClr val="lt1"/>
-            </a:fontRef>
-          </p:style>
-          <p:txBody>
-            <a:bodyPr rtlCol="0" anchor="ctr"/>
-            <a:lstStyle/>
-            <a:p>
-              <a:pPr algn="r"/>
-              <a:endParaRPr lang="es-ES" dirty="0"/>
-            </a:p>
-          </p:txBody>
-        </p:sp>
-        <p:sp>
-          <p:nvSpPr>
-            <p:cNvPr id="134" name="Rectángulo: esquinas redondeadas 133">
-              <a:extLst>
-                <a:ext uri="{FF2B5EF4-FFF2-40B4-BE49-F238E27FC236}">
-                  <a16:creationId xmlns:a16="http://schemas.microsoft.com/office/drawing/2014/main" id="{FBD919F5-54C2-468C-966F-22023A589B85}"/>
-                </a:ext>
-              </a:extLst>
-            </p:cNvPr>
-            <p:cNvSpPr/>
-            <p:nvPr/>
-          </p:nvSpPr>
-          <p:spPr>
-            <a:xfrm>
-              <a:off x="4918707" y="3323088"/>
-              <a:ext cx="622513" cy="147974"/>
-            </a:xfrm>
-            <a:prstGeom prst="roundRect">
-              <a:avLst>
-                <a:gd name="adj" fmla="val 50000"/>
-              </a:avLst>
-            </a:prstGeom>
-            <a:solidFill>
-              <a:schemeClr val="bg1"/>
-            </a:solidFill>
-            <a:ln w="12700">
-              <a:solidFill>
-                <a:schemeClr val="tx1"/>
-              </a:solidFill>
-            </a:ln>
-          </p:spPr>
-          <p:style>
-            <a:lnRef idx="2">
-              <a:schemeClr val="accent1">
-                <a:shade val="50000"/>
-              </a:schemeClr>
-            </a:lnRef>
-            <a:fillRef idx="1">
-              <a:schemeClr val="accent1"/>
-            </a:fillRef>
-            <a:effectRef idx="0">
-              <a:schemeClr val="accent1"/>
-            </a:effectRef>
-            <a:fontRef idx="minor">
-              <a:schemeClr val="lt1"/>
-            </a:fontRef>
-          </p:style>
-          <p:txBody>
-            <a:bodyPr lIns="0" rIns="0" rtlCol="0" anchor="ctr"/>
-            <a:lstStyle/>
-            <a:p>
-              <a:pPr algn="r"/>
-              <a:r>
-                <a:rPr lang="es-ES" sz="900" dirty="0">
-                  <a:solidFill>
-                    <a:schemeClr val="tx1"/>
-                  </a:solidFill>
-                  <a:latin typeface="Audiowide" panose="02000503000000020004" pitchFamily="2" charset="0"/>
-                </a:rPr>
-                <a:t>Output 4</a:t>
-              </a:r>
-            </a:p>
-          </p:txBody>
-        </p:sp>
-        <p:sp>
-          <p:nvSpPr>
-            <p:cNvPr id="135" name="CuadroTexto 134">
-              <a:extLst>
-                <a:ext uri="{FF2B5EF4-FFF2-40B4-BE49-F238E27FC236}">
-                  <a16:creationId xmlns:a16="http://schemas.microsoft.com/office/drawing/2014/main" id="{EDE1BAFC-7689-4490-91C6-C580E60D16D0}"/>
-                </a:ext>
-              </a:extLst>
-            </p:cNvPr>
-            <p:cNvSpPr txBox="1"/>
-            <p:nvPr/>
-          </p:nvSpPr>
-          <p:spPr>
-            <a:xfrm>
-              <a:off x="4679245" y="3290345"/>
-              <a:ext cx="382578" cy="215444"/>
-            </a:xfrm>
-            <a:prstGeom prst="rect">
-              <a:avLst/>
-            </a:prstGeom>
-            <a:noFill/>
-          </p:spPr>
-          <p:txBody>
-            <a:bodyPr wrap="square">
-              <a:spAutoFit/>
-            </a:bodyPr>
-            <a:lstStyle/>
-            <a:p>
-              <a:r>
-                <a:rPr lang="es-ES" sz="800" dirty="0">
-                  <a:solidFill>
-                    <a:schemeClr val="bg1"/>
-                  </a:solidFill>
-                  <a:latin typeface="Audiowide" panose="02000503000000020004" pitchFamily="2" charset="0"/>
-                </a:rPr>
-                <a:t>19</a:t>
               </a:r>
             </a:p>
           </p:txBody>
@@ -7218,10 +7583,10 @@
         </p:nvGrpSpPr>
         <p:grpSpPr>
           <a:xfrm>
-            <a:off x="1040714" y="177036"/>
-            <a:ext cx="3730175" cy="461667"/>
+            <a:off x="1186020" y="270465"/>
+            <a:ext cx="3532209" cy="461667"/>
             <a:chOff x="993938" y="5977235"/>
-            <a:chExt cx="3730175" cy="461667"/>
+            <a:chExt cx="3532209" cy="461667"/>
           </a:xfrm>
         </p:grpSpPr>
         <p:grpSp>
@@ -7335,10 +7700,10 @@
           </p:nvGrpSpPr>
           <p:grpSpPr>
             <a:xfrm>
-              <a:off x="1996071" y="5977236"/>
-              <a:ext cx="1299799" cy="461665"/>
-              <a:chOff x="574430" y="5970636"/>
-              <a:chExt cx="1299799" cy="461665"/>
+              <a:off x="1901804" y="5977236"/>
+              <a:ext cx="1271515" cy="461665"/>
+              <a:chOff x="480163" y="5970636"/>
+              <a:chExt cx="1271515" cy="461665"/>
             </a:xfrm>
           </p:grpSpPr>
           <p:sp>
@@ -7355,7 +7720,7 @@
             </p:nvSpPr>
             <p:spPr>
               <a:xfrm>
-                <a:off x="574430" y="5970636"/>
+                <a:off x="480163" y="5970636"/>
                 <a:ext cx="308291" cy="461665"/>
               </a:xfrm>
               <a:prstGeom prst="rect">
@@ -7393,7 +7758,7 @@
             </p:nvSpPr>
             <p:spPr>
               <a:xfrm>
-                <a:off x="1565938" y="5970636"/>
+                <a:off x="1443387" y="5970636"/>
                 <a:ext cx="308291" cy="461665"/>
               </a:xfrm>
               <a:prstGeom prst="rect">
@@ -7432,10 +7797,10 @@
           </p:nvGrpSpPr>
           <p:grpSpPr>
             <a:xfrm>
-              <a:off x="3390821" y="5977236"/>
-              <a:ext cx="908183" cy="461665"/>
-              <a:chOff x="540651" y="5970636"/>
-              <a:chExt cx="908183" cy="461665"/>
+              <a:off x="3268270" y="5977236"/>
+              <a:ext cx="832768" cy="461665"/>
+              <a:chOff x="418100" y="5970636"/>
+              <a:chExt cx="832768" cy="461665"/>
             </a:xfrm>
           </p:grpSpPr>
           <p:sp>
@@ -7452,7 +7817,7 @@
             </p:nvSpPr>
             <p:spPr>
               <a:xfrm>
-                <a:off x="540651" y="5970636"/>
+                <a:off x="418100" y="5970636"/>
                 <a:ext cx="308291" cy="461665"/>
               </a:xfrm>
               <a:prstGeom prst="rect">
@@ -7490,7 +7855,7 @@
             </p:nvSpPr>
             <p:spPr>
               <a:xfrm>
-                <a:off x="1140543" y="5970636"/>
+                <a:off x="942577" y="5970636"/>
                 <a:ext cx="308291" cy="461665"/>
               </a:xfrm>
               <a:prstGeom prst="rect">
@@ -7529,10 +7894,10 @@
           </p:nvGrpSpPr>
           <p:grpSpPr>
             <a:xfrm>
-              <a:off x="2425307" y="5977235"/>
-              <a:ext cx="2298806" cy="461666"/>
-              <a:chOff x="-1851541" y="5970635"/>
-              <a:chExt cx="2298806" cy="461666"/>
+              <a:off x="2331040" y="5977235"/>
+              <a:ext cx="2195107" cy="461666"/>
+              <a:chOff x="-1945808" y="5970635"/>
+              <a:chExt cx="2195107" cy="461666"/>
             </a:xfrm>
           </p:grpSpPr>
           <p:sp>
@@ -7549,7 +7914,7 @@
             </p:nvSpPr>
             <p:spPr>
               <a:xfrm>
-                <a:off x="138974" y="5970635"/>
+                <a:off x="-58992" y="5970635"/>
                 <a:ext cx="308291" cy="461665"/>
               </a:xfrm>
               <a:prstGeom prst="rect">
@@ -7587,7 +7952,7 @@
             </p:nvSpPr>
             <p:spPr>
               <a:xfrm>
-                <a:off x="-1851541" y="5970636"/>
+                <a:off x="-1945808" y="5970636"/>
                 <a:ext cx="308291" cy="461665"/>
               </a:xfrm>
               <a:prstGeom prst="rect">
@@ -7627,7 +7992,7 @@
         </p:nvGrpSpPr>
         <p:grpSpPr>
           <a:xfrm rot="5400000">
-            <a:off x="1301428" y="5264220"/>
+            <a:off x="357846" y="6019331"/>
             <a:ext cx="261610" cy="883033"/>
             <a:chOff x="6778219" y="1366503"/>
             <a:chExt cx="261610" cy="663456"/>
@@ -7727,286 +8092,43 @@
           </p:txBody>
         </p:sp>
       </p:grpSp>
-      <p:grpSp>
-        <p:nvGrpSpPr>
-          <p:cNvPr id="136" name="Grupo 135">
+      <p:sp>
+        <p:nvSpPr>
+          <p:cNvPr id="145" name="CuadroTexto 144">
             <a:extLst>
               <a:ext uri="{FF2B5EF4-FFF2-40B4-BE49-F238E27FC236}">
-                <a16:creationId xmlns:a16="http://schemas.microsoft.com/office/drawing/2014/main" id="{4714960D-2DB8-44DC-B0F0-695592214008}"/>
+                <a16:creationId xmlns:a16="http://schemas.microsoft.com/office/drawing/2014/main" id="{EB1D1819-39DD-462C-8AD7-A62421EF882C}"/>
               </a:ext>
             </a:extLst>
           </p:cNvPr>
-          <p:cNvGrpSpPr/>
+          <p:cNvSpPr txBox="1"/>
           <p:nvPr/>
-        </p:nvGrpSpPr>
-        <p:grpSpPr>
+        </p:nvSpPr>
+        <p:spPr>
           <a:xfrm>
-            <a:off x="1803121" y="3545188"/>
-            <a:ext cx="886381" cy="215444"/>
-            <a:chOff x="4679245" y="3290345"/>
-            <a:chExt cx="864592" cy="215444"/>
+            <a:off x="5948413" y="5087499"/>
+            <a:ext cx="641412" cy="261610"/>
           </a:xfrm>
-        </p:grpSpPr>
-        <p:sp>
-          <p:nvSpPr>
-            <p:cNvPr id="137" name="Rectángulo: esquinas redondeadas 136">
-              <a:extLst>
-                <a:ext uri="{FF2B5EF4-FFF2-40B4-BE49-F238E27FC236}">
-                  <a16:creationId xmlns:a16="http://schemas.microsoft.com/office/drawing/2014/main" id="{D7DB57BE-3C3B-4028-A5CA-15C4BE6CF426}"/>
-                </a:ext>
-              </a:extLst>
-            </p:cNvPr>
-            <p:cNvSpPr/>
-            <p:nvPr/>
-          </p:nvSpPr>
-          <p:spPr>
-            <a:xfrm>
-              <a:off x="4711030" y="3325666"/>
-              <a:ext cx="832807" cy="147974"/>
-            </a:xfrm>
-            <a:prstGeom prst="roundRect">
-              <a:avLst>
-                <a:gd name="adj" fmla="val 50000"/>
-              </a:avLst>
-            </a:prstGeom>
-            <a:solidFill>
-              <a:schemeClr val="tx1"/>
-            </a:solidFill>
-            <a:ln w="12700">
-              <a:solidFill>
-                <a:schemeClr val="tx1"/>
-              </a:solidFill>
-            </a:ln>
-          </p:spPr>
-          <p:style>
-            <a:lnRef idx="2">
-              <a:schemeClr val="accent1">
-                <a:shade val="50000"/>
-              </a:schemeClr>
-            </a:lnRef>
-            <a:fillRef idx="1">
-              <a:schemeClr val="accent1"/>
-            </a:fillRef>
-            <a:effectRef idx="0">
-              <a:schemeClr val="accent1"/>
-            </a:effectRef>
-            <a:fontRef idx="minor">
-              <a:schemeClr val="lt1"/>
-            </a:fontRef>
-          </p:style>
-          <p:txBody>
-            <a:bodyPr rtlCol="0" anchor="ctr"/>
-            <a:lstStyle/>
-            <a:p>
-              <a:pPr algn="r"/>
-              <a:endParaRPr lang="es-ES" dirty="0"/>
-            </a:p>
-          </p:txBody>
-        </p:sp>
-        <p:sp>
-          <p:nvSpPr>
-            <p:cNvPr id="140" name="Rectángulo: esquinas redondeadas 139">
-              <a:extLst>
-                <a:ext uri="{FF2B5EF4-FFF2-40B4-BE49-F238E27FC236}">
-                  <a16:creationId xmlns:a16="http://schemas.microsoft.com/office/drawing/2014/main" id="{7B7B1053-846E-4EBF-9C2C-CAACF03724C6}"/>
-                </a:ext>
-              </a:extLst>
-            </p:cNvPr>
-            <p:cNvSpPr/>
-            <p:nvPr/>
-          </p:nvSpPr>
-          <p:spPr>
-            <a:xfrm>
-              <a:off x="4918707" y="3323088"/>
-              <a:ext cx="622513" cy="147974"/>
-            </a:xfrm>
-            <a:prstGeom prst="roundRect">
-              <a:avLst>
-                <a:gd name="adj" fmla="val 50000"/>
-              </a:avLst>
-            </a:prstGeom>
-            <a:solidFill>
-              <a:schemeClr val="bg1"/>
-            </a:solidFill>
-            <a:ln w="12700">
-              <a:solidFill>
-                <a:schemeClr val="tx1"/>
-              </a:solidFill>
-            </a:ln>
-          </p:spPr>
-          <p:style>
-            <a:lnRef idx="2">
-              <a:schemeClr val="accent1">
-                <a:shade val="50000"/>
-              </a:schemeClr>
-            </a:lnRef>
-            <a:fillRef idx="1">
-              <a:schemeClr val="accent1"/>
-            </a:fillRef>
-            <a:effectRef idx="0">
-              <a:schemeClr val="accent1"/>
-            </a:effectRef>
-            <a:fontRef idx="minor">
-              <a:schemeClr val="lt1"/>
-            </a:fontRef>
-          </p:style>
-          <p:txBody>
-            <a:bodyPr lIns="0" rIns="0" rtlCol="0" anchor="ctr"/>
-            <a:lstStyle/>
-            <a:p>
-              <a:pPr algn="r"/>
-              <a:r>
-                <a:rPr lang="es-ES" sz="900" dirty="0">
-                  <a:solidFill>
-                    <a:schemeClr val="tx1"/>
-                  </a:solidFill>
-                  <a:latin typeface="Audiowide" panose="02000503000000020004" pitchFamily="2" charset="0"/>
-                </a:rPr>
-                <a:t>Output 2</a:t>
-              </a:r>
-            </a:p>
-          </p:txBody>
-        </p:sp>
-        <p:sp>
-          <p:nvSpPr>
-            <p:cNvPr id="142" name="CuadroTexto 141">
-              <a:extLst>
-                <a:ext uri="{FF2B5EF4-FFF2-40B4-BE49-F238E27FC236}">
-                  <a16:creationId xmlns:a16="http://schemas.microsoft.com/office/drawing/2014/main" id="{1CE53834-22E7-4510-9E22-963EC4CBC09C}"/>
-                </a:ext>
-              </a:extLst>
-            </p:cNvPr>
-            <p:cNvSpPr txBox="1"/>
-            <p:nvPr/>
-          </p:nvSpPr>
-          <p:spPr>
-            <a:xfrm>
-              <a:off x="4679245" y="3290345"/>
-              <a:ext cx="382578" cy="215444"/>
-            </a:xfrm>
-            <a:prstGeom prst="rect">
-              <a:avLst/>
-            </a:prstGeom>
-            <a:noFill/>
-          </p:spPr>
-          <p:txBody>
-            <a:bodyPr wrap="square">
-              <a:spAutoFit/>
-            </a:bodyPr>
-            <a:lstStyle/>
-            <a:p>
-              <a:r>
-                <a:rPr lang="es-ES" sz="800" dirty="0">
-                  <a:solidFill>
-                    <a:schemeClr val="bg1"/>
-                  </a:solidFill>
-                  <a:latin typeface="Audiowide" panose="02000503000000020004" pitchFamily="2" charset="0"/>
-                </a:rPr>
-                <a:t>17</a:t>
-              </a:r>
-            </a:p>
-          </p:txBody>
-        </p:sp>
-      </p:grpSp>
-      <p:grpSp>
-        <p:nvGrpSpPr>
-          <p:cNvPr id="17" name="Grupo 16">
-            <a:extLst>
-              <a:ext uri="{FF2B5EF4-FFF2-40B4-BE49-F238E27FC236}">
-                <a16:creationId xmlns:a16="http://schemas.microsoft.com/office/drawing/2014/main" id="{58F7D9D3-3041-482B-AFA7-C9F285D5E488}"/>
-              </a:ext>
-            </a:extLst>
-          </p:cNvPr>
-          <p:cNvGrpSpPr/>
-          <p:nvPr/>
-        </p:nvGrpSpPr>
-        <p:grpSpPr>
-          <a:xfrm rot="16200000">
-            <a:off x="6108420" y="1348758"/>
-            <a:ext cx="1030287" cy="261610"/>
-            <a:chOff x="7199313" y="1657087"/>
-            <a:chExt cx="1030287" cy="261610"/>
-          </a:xfrm>
-        </p:grpSpPr>
-        <p:sp>
-          <p:nvSpPr>
-            <p:cNvPr id="145" name="CuadroTexto 144">
-              <a:extLst>
-                <a:ext uri="{FF2B5EF4-FFF2-40B4-BE49-F238E27FC236}">
-                  <a16:creationId xmlns:a16="http://schemas.microsoft.com/office/drawing/2014/main" id="{EB1D1819-39DD-462C-8AD7-A62421EF882C}"/>
-                </a:ext>
-              </a:extLst>
-            </p:cNvPr>
-            <p:cNvSpPr txBox="1"/>
-            <p:nvPr/>
-          </p:nvSpPr>
-          <p:spPr>
-            <a:xfrm>
-              <a:off x="7199313" y="1657087"/>
-              <a:ext cx="1030287" cy="261610"/>
-            </a:xfrm>
-            <a:prstGeom prst="rect">
-              <a:avLst/>
-            </a:prstGeom>
-            <a:noFill/>
-          </p:spPr>
-          <p:txBody>
-            <a:bodyPr wrap="square" rtlCol="0">
-              <a:spAutoFit/>
-            </a:bodyPr>
-            <a:lstStyle/>
-            <a:p>
-              <a:r>
-                <a:rPr lang="es-ES" sz="1100" b="1" dirty="0">
-                  <a:latin typeface="Audiowide" panose="02000503000000020004" pitchFamily="2" charset="0"/>
-                </a:rPr>
-                <a:t>Flash</a:t>
-              </a:r>
-            </a:p>
-          </p:txBody>
-        </p:sp>
-        <p:cxnSp>
-          <p:nvCxnSpPr>
-            <p:cNvPr id="146" name="Conector recto de flecha 145">
-              <a:extLst>
-                <a:ext uri="{FF2B5EF4-FFF2-40B4-BE49-F238E27FC236}">
-                  <a16:creationId xmlns:a16="http://schemas.microsoft.com/office/drawing/2014/main" id="{8DE73C4C-4A8A-41C4-84E3-874F8BB37C45}"/>
-                </a:ext>
-              </a:extLst>
-            </p:cNvPr>
-            <p:cNvCxnSpPr>
-              <a:cxnSpLocks/>
-            </p:cNvCxnSpPr>
-            <p:nvPr/>
-          </p:nvCxnSpPr>
-          <p:spPr>
-            <a:xfrm rot="5400000" flipV="1">
-              <a:off x="7973041" y="1634532"/>
-              <a:ext cx="0" cy="298249"/>
-            </a:xfrm>
-            <a:prstGeom prst="straightConnector1">
-              <a:avLst/>
-            </a:prstGeom>
-            <a:ln w="57150">
-              <a:tailEnd type="triangle"/>
-            </a:ln>
-          </p:spPr>
-          <p:style>
-            <a:lnRef idx="3">
-              <a:schemeClr val="dk1"/>
-            </a:lnRef>
-            <a:fillRef idx="0">
-              <a:schemeClr val="dk1"/>
-            </a:fillRef>
-            <a:effectRef idx="2">
-              <a:schemeClr val="dk1"/>
-            </a:effectRef>
-            <a:fontRef idx="minor">
-              <a:schemeClr val="tx1"/>
-            </a:fontRef>
-          </p:style>
-        </p:cxnSp>
-      </p:grpSp>
+          <a:prstGeom prst="rect">
+            <a:avLst/>
+          </a:prstGeom>
+          <a:noFill/>
+        </p:spPr>
+        <p:txBody>
+          <a:bodyPr wrap="square" rtlCol="0">
+            <a:spAutoFit/>
+          </a:bodyPr>
+          <a:lstStyle/>
+          <a:p>
+            <a:r>
+              <a:rPr lang="es-ES" sz="1100" b="1" dirty="0">
+                <a:latin typeface="Audiowide" panose="02000503000000020004" pitchFamily="2" charset="0"/>
+              </a:rPr>
+              <a:t>Flash</a:t>
+            </a:r>
+          </a:p>
+        </p:txBody>
+      </p:sp>
       <p:graphicFrame>
         <p:nvGraphicFramePr>
           <p:cNvPr id="147" name="Tabla 7">
@@ -8022,8 +8144,8 @@
           <p:nvPr/>
         </p:nvGraphicFramePr>
         <p:xfrm>
-          <a:off x="5663363" y="1137709"/>
-          <a:ext cx="844635" cy="656234"/>
+          <a:off x="6070726" y="1130130"/>
+          <a:ext cx="1025500" cy="850820"/>
         </p:xfrm>
         <a:graphic>
           <a:graphicData uri="http://schemas.openxmlformats.org/drawingml/2006/table">
@@ -8032,28 +8154,28 @@
                 <a:tableStyleId>{073A0DAA-6AF3-43AB-8588-CEC1D06C72B9}</a:tableStyleId>
               </a:tblPr>
               <a:tblGrid>
-                <a:gridCol w="202449">
+                <a:gridCol w="245800">
                   <a:extLst>
                     <a:ext uri="{9D8B030D-6E8A-4147-A177-3AD203B41FA5}">
                       <a16:colId xmlns:a16="http://schemas.microsoft.com/office/drawing/2014/main" val="486858203"/>
                     </a:ext>
                   </a:extLst>
                 </a:gridCol>
-                <a:gridCol w="214062">
+                <a:gridCol w="259900">
                   <a:extLst>
                     <a:ext uri="{9D8B030D-6E8A-4147-A177-3AD203B41FA5}">
                       <a16:colId xmlns:a16="http://schemas.microsoft.com/office/drawing/2014/main" val="3938050864"/>
                     </a:ext>
                   </a:extLst>
                 </a:gridCol>
-                <a:gridCol w="214062">
+                <a:gridCol w="259900">
                   <a:extLst>
                     <a:ext uri="{9D8B030D-6E8A-4147-A177-3AD203B41FA5}">
                       <a16:colId xmlns:a16="http://schemas.microsoft.com/office/drawing/2014/main" val="3072194285"/>
                     </a:ext>
                   </a:extLst>
                 </a:gridCol>
-                <a:gridCol w="214062">
+                <a:gridCol w="259900">
                   <a:extLst>
                     <a:ext uri="{9D8B030D-6E8A-4147-A177-3AD203B41FA5}">
                       <a16:colId xmlns:a16="http://schemas.microsoft.com/office/drawing/2014/main" val="624226288"/>
@@ -8061,7 +8183,7 @@
                   </a:extLst>
                 </a:gridCol>
               </a:tblGrid>
-              <a:tr h="229953">
+              <a:tr h="337276">
                 <a:tc>
                   <a:txBody>
                     <a:bodyPr/>
@@ -8069,7 +8191,7 @@
                     <a:p>
                       <a:pPr algn="ctr"/>
                       <a:r>
-                        <a:rPr lang="es-ES" sz="1600" b="1" dirty="0">
+                        <a:rPr lang="es-ES" sz="2400" b="1" dirty="0">
                           <a:latin typeface="Audiowide" panose="02000503000000020004" pitchFamily="2" charset="0"/>
                         </a:rPr>
                         <a:t>-</a:t>
@@ -8127,7 +8249,7 @@
                     <a:p>
                       <a:pPr algn="ctr"/>
                       <a:r>
-                        <a:rPr lang="es-ES" sz="1600" b="1" dirty="0">
+                        <a:rPr lang="es-ES" sz="2400" b="1" dirty="0">
                           <a:latin typeface="Audiowide" panose="02000503000000020004" pitchFamily="2" charset="0"/>
                         </a:rPr>
                         <a:t>-</a:t>
@@ -8187,7 +8309,7 @@
                     <a:p>
                       <a:pPr algn="ctr"/>
                       <a:r>
-                        <a:rPr lang="es-ES" sz="1600" b="1" dirty="0">
+                        <a:rPr lang="es-ES" sz="2400" b="1" dirty="0">
                           <a:latin typeface="Audiowide" panose="02000503000000020004" pitchFamily="2" charset="0"/>
                         </a:rPr>
                         <a:t>-</a:t>
@@ -8247,7 +8369,7 @@
                     <a:p>
                       <a:pPr algn="ctr"/>
                       <a:r>
-                        <a:rPr lang="es-ES" sz="1600" b="1" dirty="0">
+                        <a:rPr lang="es-ES" sz="2400" b="1" dirty="0">
                           <a:latin typeface="Audiowide" panose="02000503000000020004" pitchFamily="2" charset="0"/>
                         </a:rPr>
                         <a:t>-</a:t>
@@ -8304,7 +8426,7 @@
                   </a:ext>
                 </a:extLst>
               </a:tr>
-              <a:tr h="206197">
+              <a:tr h="242530">
                 <a:tc>
                   <a:txBody>
                     <a:bodyPr/>
@@ -8312,7 +8434,7 @@
                     <a:p>
                       <a:pPr algn="ctr"/>
                       <a:r>
-                        <a:rPr lang="es-ES" sz="900" b="1" dirty="0">
+                        <a:rPr lang="es-ES" sz="1100" b="1" dirty="0">
                           <a:latin typeface="Audiowide" panose="02000503000000020004" pitchFamily="2" charset="0"/>
                         </a:rPr>
                         <a:t>23</a:t>
@@ -8372,7 +8494,7 @@
                     <a:p>
                       <a:pPr algn="ctr"/>
                       <a:r>
-                        <a:rPr lang="es-ES" sz="900" b="1" dirty="0">
+                        <a:rPr lang="es-ES" sz="1100" b="1" dirty="0">
                           <a:latin typeface="Audiowide" panose="02000503000000020004" pitchFamily="2" charset="0"/>
                         </a:rPr>
                         <a:t>25</a:t>
@@ -8434,7 +8556,7 @@
                     <a:p>
                       <a:pPr algn="ctr"/>
                       <a:r>
-                        <a:rPr lang="es-ES" sz="900" b="1" dirty="0">
+                        <a:rPr lang="es-ES" sz="1100" b="1" dirty="0">
                           <a:latin typeface="Audiowide" panose="02000503000000020004" pitchFamily="2" charset="0"/>
                         </a:rPr>
                         <a:t>26</a:t>
@@ -8496,7 +8618,7 @@
                     <a:p>
                       <a:pPr algn="ctr"/>
                       <a:r>
-                        <a:rPr lang="es-ES" sz="900" b="1" dirty="0">
+                        <a:rPr lang="es-ES" sz="1100" b="1" dirty="0">
                           <a:latin typeface="Audiowide" panose="02000503000000020004" pitchFamily="2" charset="0"/>
                         </a:rPr>
                         <a:t>27</a:t>
@@ -8555,7 +8677,7 @@
                   </a:ext>
                 </a:extLst>
               </a:tr>
-              <a:tr h="206197">
+              <a:tr h="242530">
                 <a:tc>
                   <a:txBody>
                     <a:bodyPr/>
@@ -8563,7 +8685,7 @@
                     <a:p>
                       <a:pPr algn="ctr"/>
                       <a:r>
-                        <a:rPr lang="es-ES" sz="900" b="1" dirty="0">
+                        <a:rPr lang="es-ES" sz="1100" b="1" dirty="0">
                           <a:latin typeface="Audiowide" panose="02000503000000020004" pitchFamily="2" charset="0"/>
                         </a:rPr>
                         <a:t>4</a:t>
@@ -8621,7 +8743,7 @@
                     <a:p>
                       <a:pPr algn="ctr"/>
                       <a:r>
-                        <a:rPr lang="es-ES" sz="900" b="1" dirty="0">
+                        <a:rPr lang="es-ES" sz="1100" b="1" dirty="0">
                           <a:latin typeface="Audiowide" panose="02000503000000020004" pitchFamily="2" charset="0"/>
                         </a:rPr>
                         <a:t>5</a:t>
@@ -8681,7 +8803,7 @@
                     <a:p>
                       <a:pPr algn="ctr"/>
                       <a:r>
-                        <a:rPr lang="es-ES" sz="900" b="1" dirty="0">
+                        <a:rPr lang="es-ES" sz="1100" b="1" dirty="0">
                           <a:latin typeface="Audiowide" panose="02000503000000020004" pitchFamily="2" charset="0"/>
                         </a:rPr>
                         <a:t>14</a:t>
@@ -8741,7 +8863,7 @@
                     <a:p>
                       <a:pPr algn="ctr"/>
                       <a:r>
-                        <a:rPr lang="es-ES" sz="900" b="1" dirty="0">
+                        <a:rPr lang="es-ES" sz="1100" b="1" dirty="0">
                           <a:latin typeface="Audiowide" panose="02000503000000020004" pitchFamily="2" charset="0"/>
                         </a:rPr>
                         <a:t>15</a:t>
@@ -8816,7 +8938,7 @@
         </p:nvGrpSpPr>
         <p:grpSpPr>
           <a:xfrm rot="16200000">
-            <a:off x="6239764" y="2090358"/>
+            <a:off x="6188868" y="2350764"/>
             <a:ext cx="862623" cy="644795"/>
             <a:chOff x="9153906" y="3039497"/>
             <a:chExt cx="1220831" cy="716971"/>
@@ -8986,54 +9108,6 @@
       </p:grpSp>
       <p:sp>
         <p:nvSpPr>
-          <p:cNvPr id="169" name="CuadroTexto 168">
-            <a:extLst>
-              <a:ext uri="{FF2B5EF4-FFF2-40B4-BE49-F238E27FC236}">
-                <a16:creationId xmlns:a16="http://schemas.microsoft.com/office/drawing/2014/main" id="{146C4107-9C02-4C10-A15E-848C25314ED4}"/>
-              </a:ext>
-            </a:extLst>
-          </p:cNvPr>
-          <p:cNvSpPr txBox="1"/>
-          <p:nvPr/>
-        </p:nvSpPr>
-        <p:spPr>
-          <a:xfrm rot="16200000">
-            <a:off x="6061884" y="2299399"/>
-            <a:ext cx="837050" cy="220524"/>
-          </a:xfrm>
-          <a:prstGeom prst="rect">
-            <a:avLst/>
-          </a:prstGeom>
-          <a:solidFill>
-            <a:schemeClr val="tx1"/>
-          </a:solidFill>
-        </p:spPr>
-        <p:txBody>
-          <a:bodyPr wrap="square">
-            <a:spAutoFit/>
-          </a:bodyPr>
-          <a:lstStyle/>
-          <a:p>
-            <a:pPr algn="ctr"/>
-            <a:r>
-              <a:rPr lang="es-ES" sz="800" dirty="0">
-                <a:solidFill>
-                  <a:schemeClr val="bg1"/>
-                </a:solidFill>
-                <a:latin typeface="Audiowide" panose="02000503000000020004" pitchFamily="2" charset="0"/>
-              </a:rPr>
-              <a:t>I2C</a:t>
-            </a:r>
-            <a:endParaRPr lang="es-ES" sz="800" dirty="0">
-              <a:solidFill>
-                <a:schemeClr val="bg1"/>
-              </a:solidFill>
-            </a:endParaRPr>
-          </a:p>
-        </p:txBody>
-      </p:sp>
-      <p:sp>
-        <p:nvSpPr>
           <p:cNvPr id="170" name="Rectángulo: esquinas redondeadas 169">
             <a:extLst>
               <a:ext uri="{FF2B5EF4-FFF2-40B4-BE49-F238E27FC236}">
@@ -9046,8 +9120,8 @@
         </p:nvSpPr>
         <p:spPr>
           <a:xfrm>
-            <a:off x="6362772" y="1991136"/>
-            <a:ext cx="789565" cy="837050"/>
+            <a:off x="6524357" y="2066879"/>
+            <a:ext cx="577084" cy="1021713"/>
           </a:xfrm>
           <a:prstGeom prst="roundRect">
             <a:avLst>
@@ -9100,8 +9174,8 @@
         </p:nvSpPr>
         <p:spPr>
           <a:xfrm>
-            <a:off x="5663363" y="1152531"/>
-            <a:ext cx="844634" cy="641412"/>
+            <a:off x="6070726" y="1130131"/>
+            <a:ext cx="1025500" cy="837050"/>
           </a:xfrm>
           <a:prstGeom prst="roundRect">
             <a:avLst/>
@@ -9138,10 +9212,1387 @@
           </a:p>
         </p:txBody>
       </p:sp>
+      <p:grpSp>
+        <p:nvGrpSpPr>
+          <p:cNvPr id="9" name="Grupo 8">
+            <a:extLst>
+              <a:ext uri="{FF2B5EF4-FFF2-40B4-BE49-F238E27FC236}">
+                <a16:creationId xmlns:a16="http://schemas.microsoft.com/office/drawing/2014/main" id="{AC46E214-2EA0-7B37-40C4-185D9FCEC282}"/>
+              </a:ext>
+            </a:extLst>
+          </p:cNvPr>
+          <p:cNvGrpSpPr/>
+          <p:nvPr/>
+        </p:nvGrpSpPr>
+        <p:grpSpPr>
+          <a:xfrm>
+            <a:off x="1101176" y="1107018"/>
+            <a:ext cx="3711316" cy="461667"/>
+            <a:chOff x="993938" y="5977235"/>
+            <a:chExt cx="3711316" cy="461667"/>
+          </a:xfrm>
+        </p:grpSpPr>
+        <p:grpSp>
+          <p:nvGrpSpPr>
+            <p:cNvPr id="10" name="Grupo 9">
+              <a:extLst>
+                <a:ext uri="{FF2B5EF4-FFF2-40B4-BE49-F238E27FC236}">
+                  <a16:creationId xmlns:a16="http://schemas.microsoft.com/office/drawing/2014/main" id="{DDCF81D9-0A42-30BA-335F-F2B77CC98371}"/>
+                </a:ext>
+              </a:extLst>
+            </p:cNvPr>
+            <p:cNvGrpSpPr/>
+            <p:nvPr/>
+          </p:nvGrpSpPr>
+          <p:grpSpPr>
+            <a:xfrm>
+              <a:off x="993938" y="5977236"/>
+              <a:ext cx="899338" cy="461666"/>
+              <a:chOff x="993938" y="5970636"/>
+              <a:chExt cx="899338" cy="461666"/>
+            </a:xfrm>
+          </p:grpSpPr>
+          <p:sp>
+            <p:nvSpPr>
+              <p:cNvPr id="21" name="CuadroTexto 20">
+                <a:extLst>
+                  <a:ext uri="{FF2B5EF4-FFF2-40B4-BE49-F238E27FC236}">
+                    <a16:creationId xmlns:a16="http://schemas.microsoft.com/office/drawing/2014/main" id="{ABA12C70-491F-F0B0-0CD6-561A03F46CA4}"/>
+                  </a:ext>
+                </a:extLst>
+              </p:cNvPr>
+              <p:cNvSpPr txBox="1"/>
+              <p:nvPr/>
+            </p:nvSpPr>
+            <p:spPr>
+              <a:xfrm>
+                <a:off x="993938" y="5970637"/>
+                <a:ext cx="308291" cy="461665"/>
+              </a:xfrm>
+              <a:prstGeom prst="rect">
+                <a:avLst/>
+              </a:prstGeom>
+              <a:noFill/>
+            </p:spPr>
+            <p:txBody>
+              <a:bodyPr wrap="square">
+                <a:spAutoFit/>
+              </a:bodyPr>
+              <a:lstStyle/>
+              <a:p>
+                <a:r>
+                  <a:rPr lang="es-ES" sz="2400" dirty="0">
+                    <a:latin typeface="Audiowide" panose="02000503000000020004" pitchFamily="2" charset="0"/>
+                  </a:rPr>
+                  <a:t>-</a:t>
+                </a:r>
+                <a:endParaRPr lang="es-ES" sz="2400" dirty="0"/>
+              </a:p>
+            </p:txBody>
+          </p:sp>
+          <p:sp>
+            <p:nvSpPr>
+              <p:cNvPr id="22" name="CuadroTexto 21">
+                <a:extLst>
+                  <a:ext uri="{FF2B5EF4-FFF2-40B4-BE49-F238E27FC236}">
+                    <a16:creationId xmlns:a16="http://schemas.microsoft.com/office/drawing/2014/main" id="{C3EE6A94-F623-BC49-2A8C-84EFC711ECAA}"/>
+                  </a:ext>
+                </a:extLst>
+              </p:cNvPr>
+              <p:cNvSpPr txBox="1"/>
+              <p:nvPr/>
+            </p:nvSpPr>
+            <p:spPr>
+              <a:xfrm>
+                <a:off x="1584985" y="5970636"/>
+                <a:ext cx="308291" cy="461665"/>
+              </a:xfrm>
+              <a:prstGeom prst="rect">
+                <a:avLst/>
+              </a:prstGeom>
+              <a:noFill/>
+            </p:spPr>
+            <p:txBody>
+              <a:bodyPr wrap="square">
+                <a:spAutoFit/>
+              </a:bodyPr>
+              <a:lstStyle/>
+              <a:p>
+                <a:r>
+                  <a:rPr lang="es-ES" sz="2400" dirty="0">
+                    <a:latin typeface="Audiowide" panose="02000503000000020004" pitchFamily="2" charset="0"/>
+                  </a:rPr>
+                  <a:t>+</a:t>
+                </a:r>
+                <a:endParaRPr lang="es-ES" sz="2400" dirty="0"/>
+              </a:p>
+            </p:txBody>
+          </p:sp>
+        </p:grpSp>
+        <p:grpSp>
+          <p:nvGrpSpPr>
+            <p:cNvPr id="11" name="Grupo 10">
+              <a:extLst>
+                <a:ext uri="{FF2B5EF4-FFF2-40B4-BE49-F238E27FC236}">
+                  <a16:creationId xmlns:a16="http://schemas.microsoft.com/office/drawing/2014/main" id="{1EBBECA4-C391-7D63-FC84-058D9EA5B799}"/>
+                </a:ext>
+              </a:extLst>
+            </p:cNvPr>
+            <p:cNvGrpSpPr/>
+            <p:nvPr/>
+          </p:nvGrpSpPr>
+          <p:grpSpPr>
+            <a:xfrm>
+              <a:off x="1901804" y="5977236"/>
+              <a:ext cx="1271515" cy="461665"/>
+              <a:chOff x="480163" y="5970636"/>
+              <a:chExt cx="1271515" cy="461665"/>
+            </a:xfrm>
+          </p:grpSpPr>
+          <p:sp>
+            <p:nvSpPr>
+              <p:cNvPr id="19" name="CuadroTexto 18">
+                <a:extLst>
+                  <a:ext uri="{FF2B5EF4-FFF2-40B4-BE49-F238E27FC236}">
+                    <a16:creationId xmlns:a16="http://schemas.microsoft.com/office/drawing/2014/main" id="{91E9EDA1-DB05-DFD5-35BA-A2AFA90CC793}"/>
+                  </a:ext>
+                </a:extLst>
+              </p:cNvPr>
+              <p:cNvSpPr txBox="1"/>
+              <p:nvPr/>
+            </p:nvSpPr>
+            <p:spPr>
+              <a:xfrm>
+                <a:off x="480163" y="5970636"/>
+                <a:ext cx="308291" cy="461665"/>
+              </a:xfrm>
+              <a:prstGeom prst="rect">
+                <a:avLst/>
+              </a:prstGeom>
+              <a:noFill/>
+            </p:spPr>
+            <p:txBody>
+              <a:bodyPr wrap="square">
+                <a:spAutoFit/>
+              </a:bodyPr>
+              <a:lstStyle/>
+              <a:p>
+                <a:r>
+                  <a:rPr lang="es-ES" sz="2400" dirty="0">
+                    <a:latin typeface="Audiowide" panose="02000503000000020004" pitchFamily="2" charset="0"/>
+                  </a:rPr>
+                  <a:t>-</a:t>
+                </a:r>
+                <a:endParaRPr lang="es-ES" sz="2400" dirty="0"/>
+              </a:p>
+            </p:txBody>
+          </p:sp>
+          <p:sp>
+            <p:nvSpPr>
+              <p:cNvPr id="20" name="CuadroTexto 19">
+                <a:extLst>
+                  <a:ext uri="{FF2B5EF4-FFF2-40B4-BE49-F238E27FC236}">
+                    <a16:creationId xmlns:a16="http://schemas.microsoft.com/office/drawing/2014/main" id="{2187E1E2-9CAE-335D-0DC0-B331ADA7936F}"/>
+                  </a:ext>
+                </a:extLst>
+              </p:cNvPr>
+              <p:cNvSpPr txBox="1"/>
+              <p:nvPr/>
+            </p:nvSpPr>
+            <p:spPr>
+              <a:xfrm>
+                <a:off x="1443387" y="5970636"/>
+                <a:ext cx="308291" cy="461665"/>
+              </a:xfrm>
+              <a:prstGeom prst="rect">
+                <a:avLst/>
+              </a:prstGeom>
+              <a:noFill/>
+            </p:spPr>
+            <p:txBody>
+              <a:bodyPr wrap="square">
+                <a:spAutoFit/>
+              </a:bodyPr>
+              <a:lstStyle/>
+              <a:p>
+                <a:r>
+                  <a:rPr lang="es-ES" sz="2400" dirty="0">
+                    <a:latin typeface="Audiowide" panose="02000503000000020004" pitchFamily="2" charset="0"/>
+                  </a:rPr>
+                  <a:t>-</a:t>
+                </a:r>
+                <a:endParaRPr lang="es-ES" sz="2400" dirty="0"/>
+              </a:p>
+            </p:txBody>
+          </p:sp>
+        </p:grpSp>
+        <p:grpSp>
+          <p:nvGrpSpPr>
+            <p:cNvPr id="12" name="Grupo 11">
+              <a:extLst>
+                <a:ext uri="{FF2B5EF4-FFF2-40B4-BE49-F238E27FC236}">
+                  <a16:creationId xmlns:a16="http://schemas.microsoft.com/office/drawing/2014/main" id="{5F7AFC18-9C2D-6DE2-6D0A-D90B8734B631}"/>
+                </a:ext>
+              </a:extLst>
+            </p:cNvPr>
+            <p:cNvGrpSpPr/>
+            <p:nvPr/>
+          </p:nvGrpSpPr>
+          <p:grpSpPr>
+            <a:xfrm>
+              <a:off x="3447377" y="5977236"/>
+              <a:ext cx="653661" cy="461665"/>
+              <a:chOff x="597207" y="5970636"/>
+              <a:chExt cx="653661" cy="461665"/>
+            </a:xfrm>
+          </p:grpSpPr>
+          <p:sp>
+            <p:nvSpPr>
+              <p:cNvPr id="16" name="CuadroTexto 15">
+                <a:extLst>
+                  <a:ext uri="{FF2B5EF4-FFF2-40B4-BE49-F238E27FC236}">
+                    <a16:creationId xmlns:a16="http://schemas.microsoft.com/office/drawing/2014/main" id="{40354A8D-6A43-475D-7205-D3EA6E3E238B}"/>
+                  </a:ext>
+                </a:extLst>
+              </p:cNvPr>
+              <p:cNvSpPr txBox="1"/>
+              <p:nvPr/>
+            </p:nvSpPr>
+            <p:spPr>
+              <a:xfrm>
+                <a:off x="597207" y="5970636"/>
+                <a:ext cx="308291" cy="461665"/>
+              </a:xfrm>
+              <a:prstGeom prst="rect">
+                <a:avLst/>
+              </a:prstGeom>
+              <a:noFill/>
+            </p:spPr>
+            <p:txBody>
+              <a:bodyPr wrap="square">
+                <a:spAutoFit/>
+              </a:bodyPr>
+              <a:lstStyle/>
+              <a:p>
+                <a:r>
+                  <a:rPr lang="es-ES" sz="2400" dirty="0">
+                    <a:latin typeface="Audiowide" panose="02000503000000020004" pitchFamily="2" charset="0"/>
+                  </a:rPr>
+                  <a:t>+</a:t>
+                </a:r>
+                <a:endParaRPr lang="es-ES" sz="2400" dirty="0"/>
+              </a:p>
+            </p:txBody>
+          </p:sp>
+          <p:sp>
+            <p:nvSpPr>
+              <p:cNvPr id="18" name="CuadroTexto 17">
+                <a:extLst>
+                  <a:ext uri="{FF2B5EF4-FFF2-40B4-BE49-F238E27FC236}">
+                    <a16:creationId xmlns:a16="http://schemas.microsoft.com/office/drawing/2014/main" id="{C76E4CBA-631A-E63E-48F3-BE8232B15332}"/>
+                  </a:ext>
+                </a:extLst>
+              </p:cNvPr>
+              <p:cNvSpPr txBox="1"/>
+              <p:nvPr/>
+            </p:nvSpPr>
+            <p:spPr>
+              <a:xfrm>
+                <a:off x="942577" y="5970636"/>
+                <a:ext cx="308291" cy="461665"/>
+              </a:xfrm>
+              <a:prstGeom prst="rect">
+                <a:avLst/>
+              </a:prstGeom>
+              <a:noFill/>
+            </p:spPr>
+            <p:txBody>
+              <a:bodyPr wrap="square">
+                <a:spAutoFit/>
+              </a:bodyPr>
+              <a:lstStyle/>
+              <a:p>
+                <a:r>
+                  <a:rPr lang="es-ES" sz="2400" dirty="0">
+                    <a:latin typeface="Audiowide" panose="02000503000000020004" pitchFamily="2" charset="0"/>
+                  </a:rPr>
+                  <a:t>-</a:t>
+                </a:r>
+                <a:endParaRPr lang="es-ES" sz="2400" dirty="0"/>
+              </a:p>
+            </p:txBody>
+          </p:sp>
+        </p:grpSp>
+        <p:grpSp>
+          <p:nvGrpSpPr>
+            <p:cNvPr id="13" name="Grupo 12">
+              <a:extLst>
+                <a:ext uri="{FF2B5EF4-FFF2-40B4-BE49-F238E27FC236}">
+                  <a16:creationId xmlns:a16="http://schemas.microsoft.com/office/drawing/2014/main" id="{A6C1E1DB-D206-02D5-2A41-CF41AA51568E}"/>
+                </a:ext>
+              </a:extLst>
+            </p:cNvPr>
+            <p:cNvGrpSpPr/>
+            <p:nvPr/>
+          </p:nvGrpSpPr>
+          <p:grpSpPr>
+            <a:xfrm>
+              <a:off x="2510147" y="5977235"/>
+              <a:ext cx="2195107" cy="461666"/>
+              <a:chOff x="-1766701" y="5970635"/>
+              <a:chExt cx="2195107" cy="461666"/>
+            </a:xfrm>
+          </p:grpSpPr>
+          <p:sp>
+            <p:nvSpPr>
+              <p:cNvPr id="14" name="CuadroTexto 13">
+                <a:extLst>
+                  <a:ext uri="{FF2B5EF4-FFF2-40B4-BE49-F238E27FC236}">
+                    <a16:creationId xmlns:a16="http://schemas.microsoft.com/office/drawing/2014/main" id="{380C2292-DB8E-5371-5B98-E114BAC70802}"/>
+                  </a:ext>
+                </a:extLst>
+              </p:cNvPr>
+              <p:cNvSpPr txBox="1"/>
+              <p:nvPr/>
+            </p:nvSpPr>
+            <p:spPr>
+              <a:xfrm>
+                <a:off x="120115" y="5970635"/>
+                <a:ext cx="308291" cy="461665"/>
+              </a:xfrm>
+              <a:prstGeom prst="rect">
+                <a:avLst/>
+              </a:prstGeom>
+              <a:noFill/>
+            </p:spPr>
+            <p:txBody>
+              <a:bodyPr wrap="square">
+                <a:spAutoFit/>
+              </a:bodyPr>
+              <a:lstStyle/>
+              <a:p>
+                <a:r>
+                  <a:rPr lang="es-ES" sz="2400" dirty="0">
+                    <a:latin typeface="Audiowide" panose="02000503000000020004" pitchFamily="2" charset="0"/>
+                  </a:rPr>
+                  <a:t>+</a:t>
+                </a:r>
+                <a:endParaRPr lang="es-ES" sz="2400" dirty="0"/>
+              </a:p>
+            </p:txBody>
+          </p:sp>
+          <p:sp>
+            <p:nvSpPr>
+              <p:cNvPr id="15" name="CuadroTexto 14">
+                <a:extLst>
+                  <a:ext uri="{FF2B5EF4-FFF2-40B4-BE49-F238E27FC236}">
+                    <a16:creationId xmlns:a16="http://schemas.microsoft.com/office/drawing/2014/main" id="{7AE5EF7C-41A4-B495-F08E-A393A92CF709}"/>
+                  </a:ext>
+                </a:extLst>
+              </p:cNvPr>
+              <p:cNvSpPr txBox="1"/>
+              <p:nvPr/>
+            </p:nvSpPr>
+            <p:spPr>
+              <a:xfrm>
+                <a:off x="-1766701" y="5970636"/>
+                <a:ext cx="308291" cy="461665"/>
+              </a:xfrm>
+              <a:prstGeom prst="rect">
+                <a:avLst/>
+              </a:prstGeom>
+              <a:noFill/>
+            </p:spPr>
+            <p:txBody>
+              <a:bodyPr wrap="square">
+                <a:spAutoFit/>
+              </a:bodyPr>
+              <a:lstStyle/>
+              <a:p>
+                <a:r>
+                  <a:rPr lang="es-ES" sz="2400" dirty="0">
+                    <a:latin typeface="Audiowide" panose="02000503000000020004" pitchFamily="2" charset="0"/>
+                  </a:rPr>
+                  <a:t>+</a:t>
+                </a:r>
+                <a:endParaRPr lang="es-ES" sz="2400" dirty="0"/>
+              </a:p>
+            </p:txBody>
+          </p:sp>
+        </p:grpSp>
+      </p:grpSp>
+      <p:grpSp>
+        <p:nvGrpSpPr>
+          <p:cNvPr id="23" name="Grupo 22">
+            <a:extLst>
+              <a:ext uri="{FF2B5EF4-FFF2-40B4-BE49-F238E27FC236}">
+                <a16:creationId xmlns:a16="http://schemas.microsoft.com/office/drawing/2014/main" id="{F259E1A9-400B-1E1C-E9E1-75F8A7AC997F}"/>
+              </a:ext>
+            </a:extLst>
+          </p:cNvPr>
+          <p:cNvGrpSpPr/>
+          <p:nvPr/>
+        </p:nvGrpSpPr>
+        <p:grpSpPr>
+          <a:xfrm>
+            <a:off x="1604279" y="3468850"/>
+            <a:ext cx="1234734" cy="261611"/>
+            <a:chOff x="4711030" y="3314697"/>
+            <a:chExt cx="832807" cy="149966"/>
+          </a:xfrm>
+        </p:grpSpPr>
+        <p:sp>
+          <p:nvSpPr>
+            <p:cNvPr id="26" name="Rectángulo: esquinas redondeadas 25">
+              <a:extLst>
+                <a:ext uri="{FF2B5EF4-FFF2-40B4-BE49-F238E27FC236}">
+                  <a16:creationId xmlns:a16="http://schemas.microsoft.com/office/drawing/2014/main" id="{02B8A1BE-06F6-1008-BCAC-92D35B25D501}"/>
+                </a:ext>
+              </a:extLst>
+            </p:cNvPr>
+            <p:cNvSpPr/>
+            <p:nvPr/>
+          </p:nvSpPr>
+          <p:spPr>
+            <a:xfrm>
+              <a:off x="4711030" y="3315692"/>
+              <a:ext cx="832807" cy="147974"/>
+            </a:xfrm>
+            <a:prstGeom prst="roundRect">
+              <a:avLst>
+                <a:gd name="adj" fmla="val 50000"/>
+              </a:avLst>
+            </a:prstGeom>
+            <a:solidFill>
+              <a:schemeClr val="tx1"/>
+            </a:solidFill>
+            <a:ln w="12700">
+              <a:solidFill>
+                <a:schemeClr val="tx1"/>
+              </a:solidFill>
+            </a:ln>
+          </p:spPr>
+          <p:style>
+            <a:lnRef idx="2">
+              <a:schemeClr val="accent1">
+                <a:shade val="50000"/>
+              </a:schemeClr>
+            </a:lnRef>
+            <a:fillRef idx="1">
+              <a:schemeClr val="accent1"/>
+            </a:fillRef>
+            <a:effectRef idx="0">
+              <a:schemeClr val="accent1"/>
+            </a:effectRef>
+            <a:fontRef idx="minor">
+              <a:schemeClr val="lt1"/>
+            </a:fontRef>
+          </p:style>
+          <p:txBody>
+            <a:bodyPr rtlCol="0" anchor="ctr"/>
+            <a:lstStyle/>
+            <a:p>
+              <a:pPr algn="r"/>
+              <a:endParaRPr lang="es-ES" sz="3200" dirty="0"/>
+            </a:p>
+          </p:txBody>
+        </p:sp>
+        <p:sp>
+          <p:nvSpPr>
+            <p:cNvPr id="27" name="Rectángulo: esquinas redondeadas 26">
+              <a:extLst>
+                <a:ext uri="{FF2B5EF4-FFF2-40B4-BE49-F238E27FC236}">
+                  <a16:creationId xmlns:a16="http://schemas.microsoft.com/office/drawing/2014/main" id="{A59B2F50-6B81-80BA-F3BE-9D861C25E3D6}"/>
+                </a:ext>
+              </a:extLst>
+            </p:cNvPr>
+            <p:cNvSpPr/>
+            <p:nvPr/>
+          </p:nvSpPr>
+          <p:spPr>
+            <a:xfrm>
+              <a:off x="4918707" y="3315693"/>
+              <a:ext cx="622513" cy="147974"/>
+            </a:xfrm>
+            <a:prstGeom prst="roundRect">
+              <a:avLst>
+                <a:gd name="adj" fmla="val 50000"/>
+              </a:avLst>
+            </a:prstGeom>
+            <a:solidFill>
+              <a:schemeClr val="bg1"/>
+            </a:solidFill>
+            <a:ln w="12700">
+              <a:solidFill>
+                <a:schemeClr val="tx1"/>
+              </a:solidFill>
+            </a:ln>
+          </p:spPr>
+          <p:style>
+            <a:lnRef idx="2">
+              <a:schemeClr val="accent1">
+                <a:shade val="50000"/>
+              </a:schemeClr>
+            </a:lnRef>
+            <a:fillRef idx="1">
+              <a:schemeClr val="accent1"/>
+            </a:fillRef>
+            <a:effectRef idx="0">
+              <a:schemeClr val="accent1"/>
+            </a:effectRef>
+            <a:fontRef idx="minor">
+              <a:schemeClr val="lt1"/>
+            </a:fontRef>
+          </p:style>
+          <p:txBody>
+            <a:bodyPr lIns="0" rIns="0" rtlCol="0" anchor="ctr"/>
+            <a:lstStyle/>
+            <a:p>
+              <a:pPr algn="ctr"/>
+              <a:r>
+                <a:rPr lang="es-ES" sz="1200" dirty="0">
+                  <a:solidFill>
+                    <a:schemeClr val="tx1"/>
+                  </a:solidFill>
+                  <a:latin typeface="Audiowide" panose="02000503000000020004" pitchFamily="2" charset="0"/>
+                </a:rPr>
+                <a:t>Output 2</a:t>
+              </a:r>
+            </a:p>
+          </p:txBody>
+        </p:sp>
+        <p:sp>
+          <p:nvSpPr>
+            <p:cNvPr id="28" name="CuadroTexto 27">
+              <a:extLst>
+                <a:ext uri="{FF2B5EF4-FFF2-40B4-BE49-F238E27FC236}">
+                  <a16:creationId xmlns:a16="http://schemas.microsoft.com/office/drawing/2014/main" id="{35E1FAB5-0BB3-FBB6-8B28-84CD44C0F5F4}"/>
+                </a:ext>
+              </a:extLst>
+            </p:cNvPr>
+            <p:cNvSpPr txBox="1"/>
+            <p:nvPr/>
+          </p:nvSpPr>
+          <p:spPr>
+            <a:xfrm>
+              <a:off x="4726670" y="3314697"/>
+              <a:ext cx="335151" cy="149966"/>
+            </a:xfrm>
+            <a:prstGeom prst="rect">
+              <a:avLst/>
+            </a:prstGeom>
+            <a:noFill/>
+          </p:spPr>
+          <p:txBody>
+            <a:bodyPr wrap="square">
+              <a:spAutoFit/>
+            </a:bodyPr>
+            <a:lstStyle/>
+            <a:p>
+              <a:r>
+                <a:rPr lang="es-ES" sz="1100" dirty="0">
+                  <a:solidFill>
+                    <a:schemeClr val="bg1"/>
+                  </a:solidFill>
+                  <a:latin typeface="Audiowide" panose="02000503000000020004" pitchFamily="2" charset="0"/>
+                </a:rPr>
+                <a:t>17</a:t>
+              </a:r>
+            </a:p>
+          </p:txBody>
+        </p:sp>
+      </p:grpSp>
+      <p:grpSp>
+        <p:nvGrpSpPr>
+          <p:cNvPr id="29" name="Grupo 28">
+            <a:extLst>
+              <a:ext uri="{FF2B5EF4-FFF2-40B4-BE49-F238E27FC236}">
+                <a16:creationId xmlns:a16="http://schemas.microsoft.com/office/drawing/2014/main" id="{E8E147E4-7930-A166-D013-6BE1C04A33A6}"/>
+              </a:ext>
+            </a:extLst>
+          </p:cNvPr>
+          <p:cNvGrpSpPr/>
+          <p:nvPr/>
+        </p:nvGrpSpPr>
+        <p:grpSpPr>
+          <a:xfrm>
+            <a:off x="2904406" y="3468850"/>
+            <a:ext cx="1234734" cy="261611"/>
+            <a:chOff x="4711030" y="3314697"/>
+            <a:chExt cx="832807" cy="149966"/>
+          </a:xfrm>
+        </p:grpSpPr>
+        <p:sp>
+          <p:nvSpPr>
+            <p:cNvPr id="30" name="Rectángulo: esquinas redondeadas 29">
+              <a:extLst>
+                <a:ext uri="{FF2B5EF4-FFF2-40B4-BE49-F238E27FC236}">
+                  <a16:creationId xmlns:a16="http://schemas.microsoft.com/office/drawing/2014/main" id="{FC8B2C2D-36AC-8CE2-3F03-BC7E6AC8AC11}"/>
+                </a:ext>
+              </a:extLst>
+            </p:cNvPr>
+            <p:cNvSpPr/>
+            <p:nvPr/>
+          </p:nvSpPr>
+          <p:spPr>
+            <a:xfrm>
+              <a:off x="4711030" y="3315692"/>
+              <a:ext cx="832807" cy="147974"/>
+            </a:xfrm>
+            <a:prstGeom prst="roundRect">
+              <a:avLst>
+                <a:gd name="adj" fmla="val 50000"/>
+              </a:avLst>
+            </a:prstGeom>
+            <a:solidFill>
+              <a:schemeClr val="tx1"/>
+            </a:solidFill>
+            <a:ln w="12700">
+              <a:solidFill>
+                <a:schemeClr val="tx1"/>
+              </a:solidFill>
+            </a:ln>
+          </p:spPr>
+          <p:style>
+            <a:lnRef idx="2">
+              <a:schemeClr val="accent1">
+                <a:shade val="50000"/>
+              </a:schemeClr>
+            </a:lnRef>
+            <a:fillRef idx="1">
+              <a:schemeClr val="accent1"/>
+            </a:fillRef>
+            <a:effectRef idx="0">
+              <a:schemeClr val="accent1"/>
+            </a:effectRef>
+            <a:fontRef idx="minor">
+              <a:schemeClr val="lt1"/>
+            </a:fontRef>
+          </p:style>
+          <p:txBody>
+            <a:bodyPr rtlCol="0" anchor="ctr"/>
+            <a:lstStyle/>
+            <a:p>
+              <a:pPr algn="r"/>
+              <a:endParaRPr lang="es-ES" sz="3200" dirty="0"/>
+            </a:p>
+          </p:txBody>
+        </p:sp>
+        <p:sp>
+          <p:nvSpPr>
+            <p:cNvPr id="32" name="Rectángulo: esquinas redondeadas 31">
+              <a:extLst>
+                <a:ext uri="{FF2B5EF4-FFF2-40B4-BE49-F238E27FC236}">
+                  <a16:creationId xmlns:a16="http://schemas.microsoft.com/office/drawing/2014/main" id="{AB546801-69B3-BFF1-6760-54B5305E48C0}"/>
+                </a:ext>
+              </a:extLst>
+            </p:cNvPr>
+            <p:cNvSpPr/>
+            <p:nvPr/>
+          </p:nvSpPr>
+          <p:spPr>
+            <a:xfrm>
+              <a:off x="4918707" y="3315693"/>
+              <a:ext cx="622513" cy="147974"/>
+            </a:xfrm>
+            <a:prstGeom prst="roundRect">
+              <a:avLst>
+                <a:gd name="adj" fmla="val 50000"/>
+              </a:avLst>
+            </a:prstGeom>
+            <a:solidFill>
+              <a:schemeClr val="bg1"/>
+            </a:solidFill>
+            <a:ln w="12700">
+              <a:solidFill>
+                <a:schemeClr val="tx1"/>
+              </a:solidFill>
+            </a:ln>
+          </p:spPr>
+          <p:style>
+            <a:lnRef idx="2">
+              <a:schemeClr val="accent1">
+                <a:shade val="50000"/>
+              </a:schemeClr>
+            </a:lnRef>
+            <a:fillRef idx="1">
+              <a:schemeClr val="accent1"/>
+            </a:fillRef>
+            <a:effectRef idx="0">
+              <a:schemeClr val="accent1"/>
+            </a:effectRef>
+            <a:fontRef idx="minor">
+              <a:schemeClr val="lt1"/>
+            </a:fontRef>
+          </p:style>
+          <p:txBody>
+            <a:bodyPr lIns="0" rIns="0" rtlCol="0" anchor="ctr"/>
+            <a:lstStyle/>
+            <a:p>
+              <a:pPr algn="ctr"/>
+              <a:r>
+                <a:rPr lang="es-ES" sz="1200" dirty="0">
+                  <a:solidFill>
+                    <a:schemeClr val="tx1"/>
+                  </a:solidFill>
+                  <a:latin typeface="Audiowide" panose="02000503000000020004" pitchFamily="2" charset="0"/>
+                </a:rPr>
+                <a:t>Output 3</a:t>
+              </a:r>
+            </a:p>
+          </p:txBody>
+        </p:sp>
+        <p:sp>
+          <p:nvSpPr>
+            <p:cNvPr id="33" name="CuadroTexto 32">
+              <a:extLst>
+                <a:ext uri="{FF2B5EF4-FFF2-40B4-BE49-F238E27FC236}">
+                  <a16:creationId xmlns:a16="http://schemas.microsoft.com/office/drawing/2014/main" id="{389F60F8-C62D-E9C7-AB58-2BAA110B742C}"/>
+                </a:ext>
+              </a:extLst>
+            </p:cNvPr>
+            <p:cNvSpPr txBox="1"/>
+            <p:nvPr/>
+          </p:nvSpPr>
+          <p:spPr>
+            <a:xfrm>
+              <a:off x="4726670" y="3314697"/>
+              <a:ext cx="335151" cy="149966"/>
+            </a:xfrm>
+            <a:prstGeom prst="rect">
+              <a:avLst/>
+            </a:prstGeom>
+            <a:noFill/>
+          </p:spPr>
+          <p:txBody>
+            <a:bodyPr wrap="square">
+              <a:spAutoFit/>
+            </a:bodyPr>
+            <a:lstStyle/>
+            <a:p>
+              <a:r>
+                <a:rPr lang="es-ES" sz="1100" dirty="0">
+                  <a:solidFill>
+                    <a:schemeClr val="bg1"/>
+                  </a:solidFill>
+                  <a:latin typeface="Audiowide" panose="02000503000000020004" pitchFamily="2" charset="0"/>
+                </a:rPr>
+                <a:t>18</a:t>
+              </a:r>
+            </a:p>
+          </p:txBody>
+        </p:sp>
+      </p:grpSp>
+      <p:grpSp>
+        <p:nvGrpSpPr>
+          <p:cNvPr id="36" name="Grupo 35">
+            <a:extLst>
+              <a:ext uri="{FF2B5EF4-FFF2-40B4-BE49-F238E27FC236}">
+                <a16:creationId xmlns:a16="http://schemas.microsoft.com/office/drawing/2014/main" id="{F43670ED-B633-E913-56B9-519F9C5F4A72}"/>
+              </a:ext>
+            </a:extLst>
+          </p:cNvPr>
+          <p:cNvGrpSpPr/>
+          <p:nvPr/>
+        </p:nvGrpSpPr>
+        <p:grpSpPr>
+          <a:xfrm rot="16200000">
+            <a:off x="4980696" y="2160226"/>
+            <a:ext cx="1234734" cy="261611"/>
+            <a:chOff x="4711030" y="3314697"/>
+            <a:chExt cx="832807" cy="149966"/>
+          </a:xfrm>
+        </p:grpSpPr>
+        <p:sp>
+          <p:nvSpPr>
+            <p:cNvPr id="38" name="Rectángulo: esquinas redondeadas 37">
+              <a:extLst>
+                <a:ext uri="{FF2B5EF4-FFF2-40B4-BE49-F238E27FC236}">
+                  <a16:creationId xmlns:a16="http://schemas.microsoft.com/office/drawing/2014/main" id="{5C189CD8-1C50-9411-2EEA-B53DB4545773}"/>
+                </a:ext>
+              </a:extLst>
+            </p:cNvPr>
+            <p:cNvSpPr/>
+            <p:nvPr/>
+          </p:nvSpPr>
+          <p:spPr>
+            <a:xfrm>
+              <a:off x="4711030" y="3315692"/>
+              <a:ext cx="832807" cy="147974"/>
+            </a:xfrm>
+            <a:prstGeom prst="roundRect">
+              <a:avLst>
+                <a:gd name="adj" fmla="val 50000"/>
+              </a:avLst>
+            </a:prstGeom>
+            <a:solidFill>
+              <a:schemeClr val="tx1"/>
+            </a:solidFill>
+            <a:ln w="12700">
+              <a:solidFill>
+                <a:schemeClr val="tx1"/>
+              </a:solidFill>
+            </a:ln>
+          </p:spPr>
+          <p:style>
+            <a:lnRef idx="2">
+              <a:schemeClr val="accent1">
+                <a:shade val="50000"/>
+              </a:schemeClr>
+            </a:lnRef>
+            <a:fillRef idx="1">
+              <a:schemeClr val="accent1"/>
+            </a:fillRef>
+            <a:effectRef idx="0">
+              <a:schemeClr val="accent1"/>
+            </a:effectRef>
+            <a:fontRef idx="minor">
+              <a:schemeClr val="lt1"/>
+            </a:fontRef>
+          </p:style>
+          <p:txBody>
+            <a:bodyPr rtlCol="0" anchor="ctr"/>
+            <a:lstStyle/>
+            <a:p>
+              <a:pPr algn="r"/>
+              <a:endParaRPr lang="es-ES" sz="3200" dirty="0"/>
+            </a:p>
+          </p:txBody>
+        </p:sp>
+        <p:sp>
+          <p:nvSpPr>
+            <p:cNvPr id="40" name="Rectángulo: esquinas redondeadas 39">
+              <a:extLst>
+                <a:ext uri="{FF2B5EF4-FFF2-40B4-BE49-F238E27FC236}">
+                  <a16:creationId xmlns:a16="http://schemas.microsoft.com/office/drawing/2014/main" id="{55246129-8A46-BC5F-4792-FADC4BA0C5DA}"/>
+                </a:ext>
+              </a:extLst>
+            </p:cNvPr>
+            <p:cNvSpPr/>
+            <p:nvPr/>
+          </p:nvSpPr>
+          <p:spPr>
+            <a:xfrm>
+              <a:off x="4918707" y="3315693"/>
+              <a:ext cx="622513" cy="147974"/>
+            </a:xfrm>
+            <a:prstGeom prst="roundRect">
+              <a:avLst>
+                <a:gd name="adj" fmla="val 50000"/>
+              </a:avLst>
+            </a:prstGeom>
+            <a:solidFill>
+              <a:schemeClr val="bg1"/>
+            </a:solidFill>
+            <a:ln w="12700">
+              <a:solidFill>
+                <a:schemeClr val="tx1"/>
+              </a:solidFill>
+            </a:ln>
+          </p:spPr>
+          <p:style>
+            <a:lnRef idx="2">
+              <a:schemeClr val="accent1">
+                <a:shade val="50000"/>
+              </a:schemeClr>
+            </a:lnRef>
+            <a:fillRef idx="1">
+              <a:schemeClr val="accent1"/>
+            </a:fillRef>
+            <a:effectRef idx="0">
+              <a:schemeClr val="accent1"/>
+            </a:effectRef>
+            <a:fontRef idx="minor">
+              <a:schemeClr val="lt1"/>
+            </a:fontRef>
+          </p:style>
+          <p:txBody>
+            <a:bodyPr lIns="0" rIns="0" rtlCol="0" anchor="ctr"/>
+            <a:lstStyle/>
+            <a:p>
+              <a:pPr algn="ctr"/>
+              <a:r>
+                <a:rPr lang="es-ES" sz="1200" dirty="0">
+                  <a:solidFill>
+                    <a:schemeClr val="tx1"/>
+                  </a:solidFill>
+                  <a:latin typeface="Audiowide" panose="02000503000000020004" pitchFamily="2" charset="0"/>
+                </a:rPr>
+                <a:t>Output 4</a:t>
+              </a:r>
+            </a:p>
+          </p:txBody>
+        </p:sp>
+        <p:sp>
+          <p:nvSpPr>
+            <p:cNvPr id="42" name="CuadroTexto 41">
+              <a:extLst>
+                <a:ext uri="{FF2B5EF4-FFF2-40B4-BE49-F238E27FC236}">
+                  <a16:creationId xmlns:a16="http://schemas.microsoft.com/office/drawing/2014/main" id="{2350A2AD-1C4A-DCBE-2A93-450773E29C17}"/>
+                </a:ext>
+              </a:extLst>
+            </p:cNvPr>
+            <p:cNvSpPr txBox="1"/>
+            <p:nvPr/>
+          </p:nvSpPr>
+          <p:spPr>
+            <a:xfrm>
+              <a:off x="4726670" y="3314697"/>
+              <a:ext cx="335151" cy="149966"/>
+            </a:xfrm>
+            <a:prstGeom prst="rect">
+              <a:avLst/>
+            </a:prstGeom>
+            <a:noFill/>
+          </p:spPr>
+          <p:txBody>
+            <a:bodyPr wrap="square">
+              <a:spAutoFit/>
+            </a:bodyPr>
+            <a:lstStyle/>
+            <a:p>
+              <a:r>
+                <a:rPr lang="es-ES" sz="1100" dirty="0">
+                  <a:solidFill>
+                    <a:schemeClr val="bg1"/>
+                  </a:solidFill>
+                  <a:latin typeface="Audiowide" panose="02000503000000020004" pitchFamily="2" charset="0"/>
+                </a:rPr>
+                <a:t>19</a:t>
+              </a:r>
+            </a:p>
+          </p:txBody>
+        </p:sp>
+      </p:grpSp>
+      <p:sp>
+        <p:nvSpPr>
+          <p:cNvPr id="43" name="CuadroTexto 42">
+            <a:extLst>
+              <a:ext uri="{FF2B5EF4-FFF2-40B4-BE49-F238E27FC236}">
+                <a16:creationId xmlns:a16="http://schemas.microsoft.com/office/drawing/2014/main" id="{1F5A0B5E-C39D-2514-0459-5CBC9EE265B6}"/>
+              </a:ext>
+            </a:extLst>
+          </p:cNvPr>
+          <p:cNvSpPr txBox="1"/>
+          <p:nvPr/>
+        </p:nvSpPr>
+        <p:spPr>
+          <a:xfrm>
+            <a:off x="6519592" y="2071642"/>
+            <a:ext cx="577086" cy="204927"/>
+          </a:xfrm>
+          <a:prstGeom prst="rect">
+            <a:avLst/>
+          </a:prstGeom>
+          <a:solidFill>
+            <a:schemeClr val="tx1"/>
+          </a:solidFill>
+        </p:spPr>
+        <p:txBody>
+          <a:bodyPr wrap="square" lIns="0" rIns="0">
+            <a:noAutofit/>
+          </a:bodyPr>
+          <a:lstStyle/>
+          <a:p>
+            <a:pPr algn="ctr" defTabSz="0">
+              <a:tabLst>
+                <a:tab pos="0" algn="l"/>
+              </a:tabLst>
+            </a:pPr>
+            <a:r>
+              <a:rPr lang="es-ES" sz="790" spc="50" dirty="0">
+                <a:solidFill>
+                  <a:schemeClr val="bg1"/>
+                </a:solidFill>
+                <a:latin typeface="Audiowide" panose="02000503000000020004" pitchFamily="2" charset="0"/>
+              </a:rPr>
+              <a:t>I2C</a:t>
+            </a:r>
+            <a:endParaRPr lang="es-ES" sz="790" spc="50" dirty="0">
+              <a:solidFill>
+                <a:schemeClr val="bg1"/>
+              </a:solidFill>
+            </a:endParaRPr>
+          </a:p>
+        </p:txBody>
+      </p:sp>
+      <p:sp>
+        <p:nvSpPr>
+          <p:cNvPr id="45" name="CuadroTexto 44">
+            <a:extLst>
+              <a:ext uri="{FF2B5EF4-FFF2-40B4-BE49-F238E27FC236}">
+                <a16:creationId xmlns:a16="http://schemas.microsoft.com/office/drawing/2014/main" id="{248E9938-167A-11CC-8A16-F2B6FE46FDB3}"/>
+              </a:ext>
+            </a:extLst>
+          </p:cNvPr>
+          <p:cNvSpPr txBox="1"/>
+          <p:nvPr/>
+        </p:nvSpPr>
+        <p:spPr>
+          <a:xfrm>
+            <a:off x="2282280" y="6885854"/>
+            <a:ext cx="427159" cy="215444"/>
+          </a:xfrm>
+          <a:prstGeom prst="rect">
+            <a:avLst/>
+          </a:prstGeom>
+          <a:noFill/>
+        </p:spPr>
+        <p:txBody>
+          <a:bodyPr wrap="square" rtlCol="0">
+            <a:spAutoFit/>
+          </a:bodyPr>
+          <a:lstStyle/>
+          <a:p>
+            <a:pPr algn="ctr"/>
+            <a:r>
+              <a:rPr lang="es-ES" sz="800" b="1" dirty="0">
+                <a:latin typeface="Audiowide" panose="02000503000000020004" pitchFamily="2" charset="0"/>
+              </a:rPr>
+              <a:t>VDC</a:t>
+            </a:r>
+            <a:endParaRPr lang="es-ES" sz="1050" b="1" dirty="0">
+              <a:latin typeface="Audiowide" panose="02000503000000020004" pitchFamily="2" charset="0"/>
+            </a:endParaRPr>
+          </a:p>
+        </p:txBody>
+      </p:sp>
+      <p:sp>
+        <p:nvSpPr>
+          <p:cNvPr id="48" name="CuadroTexto 47">
+            <a:extLst>
+              <a:ext uri="{FF2B5EF4-FFF2-40B4-BE49-F238E27FC236}">
+                <a16:creationId xmlns:a16="http://schemas.microsoft.com/office/drawing/2014/main" id="{7063056C-CDFB-395C-6A1E-129BA0D487B4}"/>
+              </a:ext>
+            </a:extLst>
+          </p:cNvPr>
+          <p:cNvSpPr txBox="1"/>
+          <p:nvPr/>
+        </p:nvSpPr>
+        <p:spPr>
+          <a:xfrm>
+            <a:off x="2904406" y="6885854"/>
+            <a:ext cx="427159" cy="215444"/>
+          </a:xfrm>
+          <a:prstGeom prst="rect">
+            <a:avLst/>
+          </a:prstGeom>
+          <a:noFill/>
+        </p:spPr>
+        <p:txBody>
+          <a:bodyPr wrap="square" rtlCol="0">
+            <a:spAutoFit/>
+          </a:bodyPr>
+          <a:lstStyle/>
+          <a:p>
+            <a:pPr algn="ctr"/>
+            <a:r>
+              <a:rPr lang="es-ES" sz="800" b="1" dirty="0">
+                <a:latin typeface="Audiowide" panose="02000503000000020004" pitchFamily="2" charset="0"/>
+              </a:rPr>
+              <a:t>VDC</a:t>
+            </a:r>
+            <a:endParaRPr lang="es-ES" sz="1050" b="1" dirty="0">
+              <a:latin typeface="Audiowide" panose="02000503000000020004" pitchFamily="2" charset="0"/>
+            </a:endParaRPr>
+          </a:p>
+        </p:txBody>
+      </p:sp>
+      <p:sp>
+        <p:nvSpPr>
+          <p:cNvPr id="50" name="CuadroTexto 49">
+            <a:extLst>
+              <a:ext uri="{FF2B5EF4-FFF2-40B4-BE49-F238E27FC236}">
+                <a16:creationId xmlns:a16="http://schemas.microsoft.com/office/drawing/2014/main" id="{DBC127DF-0BCF-8724-7B29-03418E9655F9}"/>
+              </a:ext>
+            </a:extLst>
+          </p:cNvPr>
+          <p:cNvSpPr txBox="1"/>
+          <p:nvPr/>
+        </p:nvSpPr>
+        <p:spPr>
+          <a:xfrm>
+            <a:off x="3526532" y="6885854"/>
+            <a:ext cx="427159" cy="215444"/>
+          </a:xfrm>
+          <a:prstGeom prst="rect">
+            <a:avLst/>
+          </a:prstGeom>
+          <a:noFill/>
+        </p:spPr>
+        <p:txBody>
+          <a:bodyPr wrap="square" rtlCol="0">
+            <a:spAutoFit/>
+          </a:bodyPr>
+          <a:lstStyle/>
+          <a:p>
+            <a:pPr algn="ctr"/>
+            <a:r>
+              <a:rPr lang="es-ES" sz="800" b="1" dirty="0">
+                <a:latin typeface="Audiowide" panose="02000503000000020004" pitchFamily="2" charset="0"/>
+              </a:rPr>
+              <a:t>VDC</a:t>
+            </a:r>
+            <a:endParaRPr lang="es-ES" sz="1050" b="1" dirty="0">
+              <a:latin typeface="Audiowide" panose="02000503000000020004" pitchFamily="2" charset="0"/>
+            </a:endParaRPr>
+          </a:p>
+        </p:txBody>
+      </p:sp>
+      <p:grpSp>
+        <p:nvGrpSpPr>
+          <p:cNvPr id="54" name="Grupo 53">
+            <a:extLst>
+              <a:ext uri="{FF2B5EF4-FFF2-40B4-BE49-F238E27FC236}">
+                <a16:creationId xmlns:a16="http://schemas.microsoft.com/office/drawing/2014/main" id="{D5EA00CB-F672-2E42-56A3-C03421C71A2D}"/>
+              </a:ext>
+            </a:extLst>
+          </p:cNvPr>
+          <p:cNvGrpSpPr/>
+          <p:nvPr/>
+        </p:nvGrpSpPr>
+        <p:grpSpPr>
+          <a:xfrm>
+            <a:off x="2288630" y="6408553"/>
+            <a:ext cx="2316175" cy="377026"/>
+            <a:chOff x="2288630" y="6408553"/>
+            <a:chExt cx="2316175" cy="377026"/>
+          </a:xfrm>
+        </p:grpSpPr>
+        <p:sp>
+          <p:nvSpPr>
+            <p:cNvPr id="44" name="CuadroTexto 43">
+              <a:extLst>
+                <a:ext uri="{FF2B5EF4-FFF2-40B4-BE49-F238E27FC236}">
+                  <a16:creationId xmlns:a16="http://schemas.microsoft.com/office/drawing/2014/main" id="{282876E4-5C39-EF16-DD17-DCC924526EA5}"/>
+                </a:ext>
+              </a:extLst>
+            </p:cNvPr>
+            <p:cNvSpPr txBox="1"/>
+            <p:nvPr/>
+          </p:nvSpPr>
+          <p:spPr>
+            <a:xfrm>
+              <a:off x="2288630" y="6408553"/>
+              <a:ext cx="427159" cy="377026"/>
+            </a:xfrm>
+            <a:prstGeom prst="rect">
+              <a:avLst/>
+            </a:prstGeom>
+            <a:noFill/>
+          </p:spPr>
+          <p:txBody>
+            <a:bodyPr wrap="square" rtlCol="0">
+              <a:spAutoFit/>
+            </a:bodyPr>
+            <a:lstStyle/>
+            <a:p>
+              <a:pPr algn="ctr"/>
+              <a:r>
+                <a:rPr lang="es-ES" sz="1050" dirty="0">
+                  <a:latin typeface="Audiowide" panose="02000503000000020004" pitchFamily="2" charset="0"/>
+                </a:rPr>
+                <a:t>24</a:t>
+              </a:r>
+              <a:r>
+                <a:rPr lang="es-ES" sz="800" b="1" dirty="0">
+                  <a:latin typeface="Audiowide" panose="02000503000000020004" pitchFamily="2" charset="0"/>
+                </a:rPr>
+                <a:t>VAC</a:t>
+              </a:r>
+              <a:endParaRPr lang="es-ES" sz="1050" b="1" dirty="0">
+                <a:latin typeface="Audiowide" panose="02000503000000020004" pitchFamily="2" charset="0"/>
+              </a:endParaRPr>
+            </a:p>
+          </p:txBody>
+        </p:sp>
+        <p:sp>
+          <p:nvSpPr>
+            <p:cNvPr id="47" name="CuadroTexto 46">
+              <a:extLst>
+                <a:ext uri="{FF2B5EF4-FFF2-40B4-BE49-F238E27FC236}">
+                  <a16:creationId xmlns:a16="http://schemas.microsoft.com/office/drawing/2014/main" id="{FADD303D-90C5-AAA9-637C-B8D16BC76EB5}"/>
+                </a:ext>
+              </a:extLst>
+            </p:cNvPr>
+            <p:cNvSpPr txBox="1"/>
+            <p:nvPr/>
+          </p:nvSpPr>
+          <p:spPr>
+            <a:xfrm>
+              <a:off x="2910756" y="6408553"/>
+              <a:ext cx="427159" cy="377026"/>
+            </a:xfrm>
+            <a:prstGeom prst="rect">
+              <a:avLst/>
+            </a:prstGeom>
+            <a:noFill/>
+          </p:spPr>
+          <p:txBody>
+            <a:bodyPr wrap="square" rtlCol="0">
+              <a:spAutoFit/>
+            </a:bodyPr>
+            <a:lstStyle/>
+            <a:p>
+              <a:pPr algn="ctr"/>
+              <a:r>
+                <a:rPr lang="es-ES" sz="1050" dirty="0">
+                  <a:latin typeface="Audiowide" panose="02000503000000020004" pitchFamily="2" charset="0"/>
+                </a:rPr>
+                <a:t>24</a:t>
+              </a:r>
+              <a:r>
+                <a:rPr lang="es-ES" sz="800" b="1" dirty="0">
+                  <a:latin typeface="Audiowide" panose="02000503000000020004" pitchFamily="2" charset="0"/>
+                </a:rPr>
+                <a:t>VAC</a:t>
+              </a:r>
+              <a:endParaRPr lang="es-ES" sz="1050" b="1" dirty="0">
+                <a:latin typeface="Audiowide" panose="02000503000000020004" pitchFamily="2" charset="0"/>
+              </a:endParaRPr>
+            </a:p>
+          </p:txBody>
+        </p:sp>
+        <p:sp>
+          <p:nvSpPr>
+            <p:cNvPr id="49" name="CuadroTexto 48">
+              <a:extLst>
+                <a:ext uri="{FF2B5EF4-FFF2-40B4-BE49-F238E27FC236}">
+                  <a16:creationId xmlns:a16="http://schemas.microsoft.com/office/drawing/2014/main" id="{30378934-A179-0914-BA11-156402A1467B}"/>
+                </a:ext>
+              </a:extLst>
+            </p:cNvPr>
+            <p:cNvSpPr txBox="1"/>
+            <p:nvPr/>
+          </p:nvSpPr>
+          <p:spPr>
+            <a:xfrm>
+              <a:off x="3532882" y="6408553"/>
+              <a:ext cx="427159" cy="377026"/>
+            </a:xfrm>
+            <a:prstGeom prst="rect">
+              <a:avLst/>
+            </a:prstGeom>
+            <a:noFill/>
+          </p:spPr>
+          <p:txBody>
+            <a:bodyPr wrap="square" rtlCol="0">
+              <a:spAutoFit/>
+            </a:bodyPr>
+            <a:lstStyle/>
+            <a:p>
+              <a:pPr algn="ctr"/>
+              <a:r>
+                <a:rPr lang="es-ES" sz="1050" dirty="0">
+                  <a:latin typeface="Audiowide" panose="02000503000000020004" pitchFamily="2" charset="0"/>
+                </a:rPr>
+                <a:t>24</a:t>
+              </a:r>
+              <a:r>
+                <a:rPr lang="es-ES" sz="800" b="1" dirty="0">
+                  <a:latin typeface="Audiowide" panose="02000503000000020004" pitchFamily="2" charset="0"/>
+                </a:rPr>
+                <a:t>VAC</a:t>
+              </a:r>
+              <a:endParaRPr lang="es-ES" sz="1050" b="1" dirty="0">
+                <a:latin typeface="Audiowide" panose="02000503000000020004" pitchFamily="2" charset="0"/>
+              </a:endParaRPr>
+            </a:p>
+          </p:txBody>
+        </p:sp>
+        <p:sp>
+          <p:nvSpPr>
+            <p:cNvPr id="51" name="CuadroTexto 50">
+              <a:extLst>
+                <a:ext uri="{FF2B5EF4-FFF2-40B4-BE49-F238E27FC236}">
+                  <a16:creationId xmlns:a16="http://schemas.microsoft.com/office/drawing/2014/main" id="{CA851C00-7CB8-2A5D-2813-761333981519}"/>
+                </a:ext>
+              </a:extLst>
+            </p:cNvPr>
+            <p:cNvSpPr txBox="1"/>
+            <p:nvPr/>
+          </p:nvSpPr>
+          <p:spPr>
+            <a:xfrm>
+              <a:off x="4177646" y="6408553"/>
+              <a:ext cx="427159" cy="377026"/>
+            </a:xfrm>
+            <a:prstGeom prst="rect">
+              <a:avLst/>
+            </a:prstGeom>
+            <a:noFill/>
+          </p:spPr>
+          <p:txBody>
+            <a:bodyPr wrap="square" rtlCol="0">
+              <a:spAutoFit/>
+            </a:bodyPr>
+            <a:lstStyle/>
+            <a:p>
+              <a:pPr algn="ctr"/>
+              <a:r>
+                <a:rPr lang="es-ES" sz="1050" dirty="0">
+                  <a:latin typeface="Audiowide" panose="02000503000000020004" pitchFamily="2" charset="0"/>
+                </a:rPr>
+                <a:t>24</a:t>
+              </a:r>
+              <a:r>
+                <a:rPr lang="es-ES" sz="800" b="1" dirty="0">
+                  <a:latin typeface="Audiowide" panose="02000503000000020004" pitchFamily="2" charset="0"/>
+                </a:rPr>
+                <a:t>VAC</a:t>
+              </a:r>
+              <a:endParaRPr lang="es-ES" sz="1050" b="1" dirty="0">
+                <a:latin typeface="Audiowide" panose="02000503000000020004" pitchFamily="2" charset="0"/>
+              </a:endParaRPr>
+            </a:p>
+          </p:txBody>
+        </p:sp>
+      </p:grpSp>
+      <p:sp>
+        <p:nvSpPr>
+          <p:cNvPr id="52" name="CuadroTexto 51">
+            <a:extLst>
+              <a:ext uri="{FF2B5EF4-FFF2-40B4-BE49-F238E27FC236}">
+                <a16:creationId xmlns:a16="http://schemas.microsoft.com/office/drawing/2014/main" id="{26AC70A1-63F4-5703-6068-285982027DA2}"/>
+              </a:ext>
+            </a:extLst>
+          </p:cNvPr>
+          <p:cNvSpPr txBox="1"/>
+          <p:nvPr/>
+        </p:nvSpPr>
+        <p:spPr>
+          <a:xfrm>
+            <a:off x="4171296" y="6885854"/>
+            <a:ext cx="427159" cy="215444"/>
+          </a:xfrm>
+          <a:prstGeom prst="rect">
+            <a:avLst/>
+          </a:prstGeom>
+          <a:noFill/>
+        </p:spPr>
+        <p:txBody>
+          <a:bodyPr wrap="square" rtlCol="0">
+            <a:spAutoFit/>
+          </a:bodyPr>
+          <a:lstStyle/>
+          <a:p>
+            <a:pPr algn="ctr"/>
+            <a:r>
+              <a:rPr lang="es-ES" sz="800" b="1" dirty="0">
+                <a:latin typeface="Audiowide" panose="02000503000000020004" pitchFamily="2" charset="0"/>
+              </a:rPr>
+              <a:t>VDC</a:t>
+            </a:r>
+            <a:endParaRPr lang="es-ES" sz="1050" b="1" dirty="0">
+              <a:latin typeface="Audiowide" panose="02000503000000020004" pitchFamily="2" charset="0"/>
+            </a:endParaRPr>
+          </a:p>
+        </p:txBody>
+      </p:sp>
     </p:spTree>
     <p:extLst>
       <p:ext uri="{BB962C8B-B14F-4D97-AF65-F5344CB8AC3E}">
-        <p14:creationId xmlns:p14="http://schemas.microsoft.com/office/powerpoint/2010/main" val="36373170"/>
+        <p14:creationId xmlns:p14="http://schemas.microsoft.com/office/powerpoint/2010/main" val="975037223"/>
       </p:ext>
     </p:extLst>
   </p:cSld>
@@ -9170,10 +10621,10 @@
       </p:grpSpPr>
       <p:pic>
         <p:nvPicPr>
-          <p:cNvPr id="59" name="Imagen 58">
+          <p:cNvPr id="2" name="Imagen 1">
             <a:extLst>
               <a:ext uri="{FF2B5EF4-FFF2-40B4-BE49-F238E27FC236}">
-                <a16:creationId xmlns:a16="http://schemas.microsoft.com/office/drawing/2014/main" id="{848A3399-11B5-4FD3-8829-55B241417255}"/>
+                <a16:creationId xmlns:a16="http://schemas.microsoft.com/office/drawing/2014/main" id="{DE24EA49-C962-763C-9FCB-976773509A97}"/>
               </a:ext>
             </a:extLst>
           </p:cNvPr>
@@ -9194,11 +10645,6 @@
                 </a:srgbClr>
               </a:clrTo>
             </a:clrChange>
-            <a:extLst>
-              <a:ext uri="{28A0092B-C50C-407E-A947-70E740481C1C}">
-                <a14:useLocalDpi xmlns:a14="http://schemas.microsoft.com/office/drawing/2010/main" val="0"/>
-              </a:ext>
-            </a:extLst>
           </a:blip>
           <a:stretch>
             <a:fillRect/>
@@ -9206,8 +10652,8 @@
         </p:blipFill>
         <p:spPr>
           <a:xfrm>
-            <a:off x="0" y="270989"/>
-            <a:ext cx="7199313" cy="6611614"/>
+            <a:off x="-13433" y="388178"/>
+            <a:ext cx="7226178" cy="6819887"/>
           </a:xfrm>
           <a:prstGeom prst="rect">
             <a:avLst/>
@@ -9228,7 +10674,7 @@
         </p:nvGrpSpPr>
         <p:grpSpPr>
           <a:xfrm>
-            <a:off x="1216361" y="1493520"/>
+            <a:off x="1216361" y="3017520"/>
             <a:ext cx="4437610" cy="1754326"/>
             <a:chOff x="3713961" y="815977"/>
             <a:chExt cx="1683889" cy="665694"/>
@@ -9411,7 +10857,7 @@
         </p:nvGrpSpPr>
         <p:grpSpPr>
           <a:xfrm>
-            <a:off x="1216361" y="1493520"/>
+            <a:off x="1216361" y="3017520"/>
             <a:ext cx="4437610" cy="1754326"/>
             <a:chOff x="3713961" y="815977"/>
             <a:chExt cx="1683889" cy="665694"/>
@@ -9553,7 +10999,7 @@
     </p:spTree>
     <p:extLst>
       <p:ext uri="{BB962C8B-B14F-4D97-AF65-F5344CB8AC3E}">
-        <p14:creationId xmlns:p14="http://schemas.microsoft.com/office/powerpoint/2010/main" val="3784143662"/>
+        <p14:creationId xmlns:p14="http://schemas.microsoft.com/office/powerpoint/2010/main" val="1002772217"/>
       </p:ext>
     </p:extLst>
   </p:cSld>
